--- a/Documents/МЫС Web — Презентация.pptx
+++ b/Documents/МЫС Web — Презентация.pptx
@@ -8,10 +8,9 @@
     <p:sldId id="256" r:id="rId2"/>
     <p:sldId id="257" r:id="rId3"/>
     <p:sldId id="259" r:id="rId4"/>
-    <p:sldId id="261" r:id="rId5"/>
-    <p:sldId id="260" r:id="rId6"/>
-    <p:sldId id="262" r:id="rId7"/>
-    <p:sldId id="266" r:id="rId16"/>
+    <p:sldId id="260" r:id="rId5"/>
+    <p:sldId id="262" r:id="rId6"/>
+    <p:sldId id="266" r:id="rId7"/>
     <p:sldId id="264" r:id="rId8"/>
     <p:sldId id="263" r:id="rId9"/>
     <p:sldId id="265" r:id="rId10"/>
@@ -122,3179 +121,6 @@
 </p:presentation>
 </file>
 
-<file path=ppt/diagrams/colors1.xml><?xml version="1.0" encoding="utf-8"?>
-<dgm:colorsDef xmlns:dgm="http://schemas.openxmlformats.org/drawingml/2006/diagram" xmlns:a="http://schemas.openxmlformats.org/drawingml/2006/main" uniqueId="urn:microsoft.com/office/officeart/2005/8/colors/accent1_2">
-  <dgm:title val=""/>
-  <dgm:desc val=""/>
-  <dgm:catLst>
-    <dgm:cat type="accent1" pri="11200"/>
-  </dgm:catLst>
-  <dgm:styleLbl name="node0">
-    <dgm:fillClrLst meth="repeat">
-      <a:schemeClr val="accent1"/>
-    </dgm:fillClrLst>
-    <dgm:linClrLst meth="repeat">
-      <a:schemeClr val="lt1"/>
-    </dgm:linClrLst>
-    <dgm:effectClrLst/>
-    <dgm:txLinClrLst/>
-    <dgm:txFillClrLst/>
-    <dgm:txEffectClrLst/>
-  </dgm:styleLbl>
-  <dgm:styleLbl name="alignNode1">
-    <dgm:fillClrLst meth="repeat">
-      <a:schemeClr val="accent1"/>
-    </dgm:fillClrLst>
-    <dgm:linClrLst meth="repeat">
-      <a:schemeClr val="accent1"/>
-    </dgm:linClrLst>
-    <dgm:effectClrLst/>
-    <dgm:txLinClrLst/>
-    <dgm:txFillClrLst/>
-    <dgm:txEffectClrLst/>
-  </dgm:styleLbl>
-  <dgm:styleLbl name="node1">
-    <dgm:fillClrLst meth="repeat">
-      <a:schemeClr val="accent1"/>
-    </dgm:fillClrLst>
-    <dgm:linClrLst meth="repeat">
-      <a:schemeClr val="lt1"/>
-    </dgm:linClrLst>
-    <dgm:effectClrLst/>
-    <dgm:txLinClrLst/>
-    <dgm:txFillClrLst/>
-    <dgm:txEffectClrLst/>
-  </dgm:styleLbl>
-  <dgm:styleLbl name="lnNode1">
-    <dgm:fillClrLst meth="repeat">
-      <a:schemeClr val="accent1"/>
-    </dgm:fillClrLst>
-    <dgm:linClrLst meth="repeat">
-      <a:schemeClr val="lt1"/>
-    </dgm:linClrLst>
-    <dgm:effectClrLst/>
-    <dgm:txLinClrLst/>
-    <dgm:txFillClrLst/>
-    <dgm:txEffectClrLst/>
-  </dgm:styleLbl>
-  <dgm:styleLbl name="vennNode1">
-    <dgm:fillClrLst meth="repeat">
-      <a:schemeClr val="accent1">
-        <a:alpha val="50000"/>
-      </a:schemeClr>
-    </dgm:fillClrLst>
-    <dgm:linClrLst meth="repeat">
-      <a:schemeClr val="lt1"/>
-    </dgm:linClrLst>
-    <dgm:effectClrLst/>
-    <dgm:txLinClrLst/>
-    <dgm:txFillClrLst/>
-    <dgm:txEffectClrLst/>
-  </dgm:styleLbl>
-  <dgm:styleLbl name="node2">
-    <dgm:fillClrLst meth="repeat">
-      <a:schemeClr val="accent1"/>
-    </dgm:fillClrLst>
-    <dgm:linClrLst meth="repeat">
-      <a:schemeClr val="lt1"/>
-    </dgm:linClrLst>
-    <dgm:effectClrLst/>
-    <dgm:txLinClrLst/>
-    <dgm:txFillClrLst/>
-    <dgm:txEffectClrLst/>
-  </dgm:styleLbl>
-  <dgm:styleLbl name="node3">
-    <dgm:fillClrLst meth="repeat">
-      <a:schemeClr val="accent1"/>
-    </dgm:fillClrLst>
-    <dgm:linClrLst meth="repeat">
-      <a:schemeClr val="lt1"/>
-    </dgm:linClrLst>
-    <dgm:effectClrLst/>
-    <dgm:txLinClrLst/>
-    <dgm:txFillClrLst/>
-    <dgm:txEffectClrLst/>
-  </dgm:styleLbl>
-  <dgm:styleLbl name="node4">
-    <dgm:fillClrLst meth="repeat">
-      <a:schemeClr val="accent1"/>
-    </dgm:fillClrLst>
-    <dgm:linClrLst meth="repeat">
-      <a:schemeClr val="lt1"/>
-    </dgm:linClrLst>
-    <dgm:effectClrLst/>
-    <dgm:txLinClrLst/>
-    <dgm:txFillClrLst/>
-    <dgm:txEffectClrLst/>
-  </dgm:styleLbl>
-  <dgm:styleLbl name="fgImgPlace1">
-    <dgm:fillClrLst meth="repeat">
-      <a:schemeClr val="accent1">
-        <a:tint val="50000"/>
-      </a:schemeClr>
-    </dgm:fillClrLst>
-    <dgm:linClrLst meth="repeat">
-      <a:schemeClr val="lt1"/>
-    </dgm:linClrLst>
-    <dgm:effectClrLst/>
-    <dgm:txLinClrLst/>
-    <dgm:txFillClrLst meth="repeat">
-      <a:schemeClr val="lt1"/>
-    </dgm:txFillClrLst>
-    <dgm:txEffectClrLst/>
-  </dgm:styleLbl>
-  <dgm:styleLbl name="alignImgPlace1">
-    <dgm:fillClrLst meth="repeat">
-      <a:schemeClr val="accent1">
-        <a:tint val="50000"/>
-      </a:schemeClr>
-    </dgm:fillClrLst>
-    <dgm:linClrLst meth="repeat">
-      <a:schemeClr val="lt1"/>
-    </dgm:linClrLst>
-    <dgm:effectClrLst/>
-    <dgm:txLinClrLst/>
-    <dgm:txFillClrLst meth="repeat">
-      <a:schemeClr val="lt1"/>
-    </dgm:txFillClrLst>
-    <dgm:txEffectClrLst/>
-  </dgm:styleLbl>
-  <dgm:styleLbl name="bgImgPlace1">
-    <dgm:fillClrLst meth="repeat">
-      <a:schemeClr val="accent1">
-        <a:tint val="50000"/>
-      </a:schemeClr>
-    </dgm:fillClrLst>
-    <dgm:linClrLst meth="repeat">
-      <a:schemeClr val="lt1"/>
-    </dgm:linClrLst>
-    <dgm:effectClrLst/>
-    <dgm:txLinClrLst/>
-    <dgm:txFillClrLst meth="repeat">
-      <a:schemeClr val="lt1"/>
-    </dgm:txFillClrLst>
-    <dgm:txEffectClrLst/>
-  </dgm:styleLbl>
-  <dgm:styleLbl name="sibTrans2D1">
-    <dgm:fillClrLst meth="repeat">
-      <a:schemeClr val="accent1">
-        <a:tint val="60000"/>
-      </a:schemeClr>
-    </dgm:fillClrLst>
-    <dgm:linClrLst meth="repeat">
-      <a:schemeClr val="accent1">
-        <a:tint val="60000"/>
-      </a:schemeClr>
-    </dgm:linClrLst>
-    <dgm:effectClrLst/>
-    <dgm:txLinClrLst/>
-    <dgm:txFillClrLst/>
-    <dgm:txEffectClrLst/>
-  </dgm:styleLbl>
-  <dgm:styleLbl name="fgSibTrans2D1">
-    <dgm:fillClrLst meth="repeat">
-      <a:schemeClr val="accent1">
-        <a:tint val="60000"/>
-      </a:schemeClr>
-    </dgm:fillClrLst>
-    <dgm:linClrLst meth="repeat">
-      <a:schemeClr val="accent1">
-        <a:tint val="60000"/>
-      </a:schemeClr>
-    </dgm:linClrLst>
-    <dgm:effectClrLst/>
-    <dgm:txLinClrLst/>
-    <dgm:txFillClrLst/>
-    <dgm:txEffectClrLst/>
-  </dgm:styleLbl>
-  <dgm:styleLbl name="bgSibTrans2D1">
-    <dgm:fillClrLst meth="repeat">
-      <a:schemeClr val="accent1">
-        <a:tint val="60000"/>
-      </a:schemeClr>
-    </dgm:fillClrLst>
-    <dgm:linClrLst meth="repeat">
-      <a:schemeClr val="accent1">
-        <a:tint val="60000"/>
-      </a:schemeClr>
-    </dgm:linClrLst>
-    <dgm:effectClrLst/>
-    <dgm:txLinClrLst/>
-    <dgm:txFillClrLst/>
-    <dgm:txEffectClrLst/>
-  </dgm:styleLbl>
-  <dgm:styleLbl name="sibTrans1D1">
-    <dgm:fillClrLst meth="repeat">
-      <a:schemeClr val="accent1"/>
-    </dgm:fillClrLst>
-    <dgm:linClrLst meth="repeat">
-      <a:schemeClr val="accent1"/>
-    </dgm:linClrLst>
-    <dgm:effectClrLst/>
-    <dgm:txLinClrLst/>
-    <dgm:txFillClrLst meth="repeat">
-      <a:schemeClr val="tx1"/>
-    </dgm:txFillClrLst>
-    <dgm:txEffectClrLst/>
-  </dgm:styleLbl>
-  <dgm:styleLbl name="callout">
-    <dgm:fillClrLst meth="repeat">
-      <a:schemeClr val="accent1"/>
-    </dgm:fillClrLst>
-    <dgm:linClrLst meth="repeat">
-      <a:schemeClr val="accent1">
-        <a:tint val="50000"/>
-      </a:schemeClr>
-    </dgm:linClrLst>
-    <dgm:effectClrLst/>
-    <dgm:txLinClrLst/>
-    <dgm:txFillClrLst meth="repeat">
-      <a:schemeClr val="tx1"/>
-    </dgm:txFillClrLst>
-    <dgm:txEffectClrLst/>
-  </dgm:styleLbl>
-  <dgm:styleLbl name="asst0">
-    <dgm:fillClrLst meth="repeat">
-      <a:schemeClr val="accent1"/>
-    </dgm:fillClrLst>
-    <dgm:linClrLst meth="repeat">
-      <a:schemeClr val="lt1"/>
-    </dgm:linClrLst>
-    <dgm:effectClrLst/>
-    <dgm:txLinClrLst/>
-    <dgm:txFillClrLst/>
-    <dgm:txEffectClrLst/>
-  </dgm:styleLbl>
-  <dgm:styleLbl name="asst1">
-    <dgm:fillClrLst meth="repeat">
-      <a:schemeClr val="accent1"/>
-    </dgm:fillClrLst>
-    <dgm:linClrLst meth="repeat">
-      <a:schemeClr val="lt1"/>
-    </dgm:linClrLst>
-    <dgm:effectClrLst/>
-    <dgm:txLinClrLst/>
-    <dgm:txFillClrLst/>
-    <dgm:txEffectClrLst/>
-  </dgm:styleLbl>
-  <dgm:styleLbl name="asst2">
-    <dgm:fillClrLst meth="repeat">
-      <a:schemeClr val="accent1"/>
-    </dgm:fillClrLst>
-    <dgm:linClrLst meth="repeat">
-      <a:schemeClr val="lt1"/>
-    </dgm:linClrLst>
-    <dgm:effectClrLst/>
-    <dgm:txLinClrLst/>
-    <dgm:txFillClrLst/>
-    <dgm:txEffectClrLst/>
-  </dgm:styleLbl>
-  <dgm:styleLbl name="asst3">
-    <dgm:fillClrLst meth="repeat">
-      <a:schemeClr val="accent1"/>
-    </dgm:fillClrLst>
-    <dgm:linClrLst meth="repeat">
-      <a:schemeClr val="lt1"/>
-    </dgm:linClrLst>
-    <dgm:effectClrLst/>
-    <dgm:txLinClrLst/>
-    <dgm:txFillClrLst/>
-    <dgm:txEffectClrLst/>
-  </dgm:styleLbl>
-  <dgm:styleLbl name="asst4">
-    <dgm:fillClrLst meth="repeat">
-      <a:schemeClr val="accent1"/>
-    </dgm:fillClrLst>
-    <dgm:linClrLst meth="repeat">
-      <a:schemeClr val="lt1"/>
-    </dgm:linClrLst>
-    <dgm:effectClrLst/>
-    <dgm:txLinClrLst/>
-    <dgm:txFillClrLst/>
-    <dgm:txEffectClrLst/>
-  </dgm:styleLbl>
-  <dgm:styleLbl name="parChTrans2D1">
-    <dgm:fillClrLst meth="repeat">
-      <a:schemeClr val="accent1">
-        <a:tint val="60000"/>
-      </a:schemeClr>
-    </dgm:fillClrLst>
-    <dgm:linClrLst meth="repeat">
-      <a:schemeClr val="accent1">
-        <a:tint val="60000"/>
-      </a:schemeClr>
-    </dgm:linClrLst>
-    <dgm:effectClrLst/>
-    <dgm:txLinClrLst/>
-    <dgm:txFillClrLst meth="repeat">
-      <a:schemeClr val="lt1"/>
-    </dgm:txFillClrLst>
-    <dgm:txEffectClrLst/>
-  </dgm:styleLbl>
-  <dgm:styleLbl name="parChTrans2D2">
-    <dgm:fillClrLst meth="repeat">
-      <a:schemeClr val="accent1"/>
-    </dgm:fillClrLst>
-    <dgm:linClrLst meth="repeat">
-      <a:schemeClr val="accent1"/>
-    </dgm:linClrLst>
-    <dgm:effectClrLst/>
-    <dgm:txLinClrLst/>
-    <dgm:txFillClrLst meth="repeat">
-      <a:schemeClr val="lt1"/>
-    </dgm:txFillClrLst>
-    <dgm:txEffectClrLst/>
-  </dgm:styleLbl>
-  <dgm:styleLbl name="parChTrans2D3">
-    <dgm:fillClrLst meth="repeat">
-      <a:schemeClr val="accent1"/>
-    </dgm:fillClrLst>
-    <dgm:linClrLst meth="repeat">
-      <a:schemeClr val="accent1"/>
-    </dgm:linClrLst>
-    <dgm:effectClrLst/>
-    <dgm:txLinClrLst/>
-    <dgm:txFillClrLst meth="repeat">
-      <a:schemeClr val="lt1"/>
-    </dgm:txFillClrLst>
-    <dgm:txEffectClrLst/>
-  </dgm:styleLbl>
-  <dgm:styleLbl name="parChTrans2D4">
-    <dgm:fillClrLst meth="repeat">
-      <a:schemeClr val="accent1"/>
-    </dgm:fillClrLst>
-    <dgm:linClrLst meth="repeat">
-      <a:schemeClr val="accent1"/>
-    </dgm:linClrLst>
-    <dgm:effectClrLst/>
-    <dgm:txLinClrLst/>
-    <dgm:txFillClrLst meth="repeat">
-      <a:schemeClr val="lt1"/>
-    </dgm:txFillClrLst>
-    <dgm:txEffectClrLst/>
-  </dgm:styleLbl>
-  <dgm:styleLbl name="parChTrans1D1">
-    <dgm:fillClrLst meth="repeat">
-      <a:schemeClr val="accent1"/>
-    </dgm:fillClrLst>
-    <dgm:linClrLst meth="repeat">
-      <a:schemeClr val="accent1">
-        <a:shade val="60000"/>
-      </a:schemeClr>
-    </dgm:linClrLst>
-    <dgm:effectClrLst/>
-    <dgm:txLinClrLst/>
-    <dgm:txFillClrLst meth="repeat">
-      <a:schemeClr val="tx1"/>
-    </dgm:txFillClrLst>
-    <dgm:txEffectClrLst/>
-  </dgm:styleLbl>
-  <dgm:styleLbl name="parChTrans1D2">
-    <dgm:fillClrLst meth="repeat">
-      <a:schemeClr val="accent1"/>
-    </dgm:fillClrLst>
-    <dgm:linClrLst meth="repeat">
-      <a:schemeClr val="accent1">
-        <a:shade val="60000"/>
-      </a:schemeClr>
-    </dgm:linClrLst>
-    <dgm:effectClrLst/>
-    <dgm:txLinClrLst/>
-    <dgm:txFillClrLst meth="repeat">
-      <a:schemeClr val="tx1"/>
-    </dgm:txFillClrLst>
-    <dgm:txEffectClrLst/>
-  </dgm:styleLbl>
-  <dgm:styleLbl name="parChTrans1D3">
-    <dgm:fillClrLst meth="repeat">
-      <a:schemeClr val="accent1"/>
-    </dgm:fillClrLst>
-    <dgm:linClrLst meth="repeat">
-      <a:schemeClr val="accent1">
-        <a:shade val="80000"/>
-      </a:schemeClr>
-    </dgm:linClrLst>
-    <dgm:effectClrLst/>
-    <dgm:txLinClrLst/>
-    <dgm:txFillClrLst meth="repeat">
-      <a:schemeClr val="tx1"/>
-    </dgm:txFillClrLst>
-    <dgm:txEffectClrLst/>
-  </dgm:styleLbl>
-  <dgm:styleLbl name="parChTrans1D4">
-    <dgm:fillClrLst meth="repeat">
-      <a:schemeClr val="accent1"/>
-    </dgm:fillClrLst>
-    <dgm:linClrLst meth="repeat">
-      <a:schemeClr val="accent1">
-        <a:shade val="80000"/>
-      </a:schemeClr>
-    </dgm:linClrLst>
-    <dgm:effectClrLst/>
-    <dgm:txLinClrLst/>
-    <dgm:txFillClrLst meth="repeat">
-      <a:schemeClr val="tx1"/>
-    </dgm:txFillClrLst>
-    <dgm:txEffectClrLst/>
-  </dgm:styleLbl>
-  <dgm:styleLbl name="fgAcc1">
-    <dgm:fillClrLst meth="repeat">
-      <a:schemeClr val="lt1">
-        <a:alpha val="90000"/>
-      </a:schemeClr>
-    </dgm:fillClrLst>
-    <dgm:linClrLst meth="repeat">
-      <a:schemeClr val="accent1"/>
-    </dgm:linClrLst>
-    <dgm:effectClrLst/>
-    <dgm:txLinClrLst/>
-    <dgm:txFillClrLst meth="repeat">
-      <a:schemeClr val="dk1"/>
-    </dgm:txFillClrLst>
-    <dgm:txEffectClrLst/>
-  </dgm:styleLbl>
-  <dgm:styleLbl name="conFgAcc1">
-    <dgm:fillClrLst meth="repeat">
-      <a:schemeClr val="lt1">
-        <a:alpha val="90000"/>
-      </a:schemeClr>
-    </dgm:fillClrLst>
-    <dgm:linClrLst meth="repeat">
-      <a:schemeClr val="accent1"/>
-    </dgm:linClrLst>
-    <dgm:effectClrLst/>
-    <dgm:txLinClrLst/>
-    <dgm:txFillClrLst meth="repeat">
-      <a:schemeClr val="dk1"/>
-    </dgm:txFillClrLst>
-    <dgm:txEffectClrLst/>
-  </dgm:styleLbl>
-  <dgm:styleLbl name="alignAcc1">
-    <dgm:fillClrLst meth="repeat">
-      <a:schemeClr val="lt1">
-        <a:alpha val="90000"/>
-      </a:schemeClr>
-    </dgm:fillClrLst>
-    <dgm:linClrLst meth="repeat">
-      <a:schemeClr val="accent1"/>
-    </dgm:linClrLst>
-    <dgm:effectClrLst/>
-    <dgm:txLinClrLst/>
-    <dgm:txFillClrLst meth="repeat">
-      <a:schemeClr val="dk1"/>
-    </dgm:txFillClrLst>
-    <dgm:txEffectClrLst/>
-  </dgm:styleLbl>
-  <dgm:styleLbl name="trAlignAcc1">
-    <dgm:fillClrLst meth="repeat">
-      <a:schemeClr val="lt1">
-        <a:alpha val="40000"/>
-      </a:schemeClr>
-    </dgm:fillClrLst>
-    <dgm:linClrLst meth="repeat">
-      <a:schemeClr val="accent1"/>
-    </dgm:linClrLst>
-    <dgm:effectClrLst/>
-    <dgm:txLinClrLst/>
-    <dgm:txFillClrLst meth="repeat">
-      <a:schemeClr val="dk1"/>
-    </dgm:txFillClrLst>
-    <dgm:txEffectClrLst/>
-  </dgm:styleLbl>
-  <dgm:styleLbl name="bgAcc1">
-    <dgm:fillClrLst meth="repeat">
-      <a:schemeClr val="lt1">
-        <a:alpha val="90000"/>
-      </a:schemeClr>
-    </dgm:fillClrLst>
-    <dgm:linClrLst meth="repeat">
-      <a:schemeClr val="accent1"/>
-    </dgm:linClrLst>
-    <dgm:effectClrLst/>
-    <dgm:txLinClrLst/>
-    <dgm:txFillClrLst meth="repeat">
-      <a:schemeClr val="dk1"/>
-    </dgm:txFillClrLst>
-    <dgm:txEffectClrLst/>
-  </dgm:styleLbl>
-  <dgm:styleLbl name="solidFgAcc1">
-    <dgm:fillClrLst meth="repeat">
-      <a:schemeClr val="lt1"/>
-    </dgm:fillClrLst>
-    <dgm:linClrLst meth="repeat">
-      <a:schemeClr val="accent1"/>
-    </dgm:linClrLst>
-    <dgm:effectClrLst/>
-    <dgm:txLinClrLst/>
-    <dgm:txFillClrLst meth="repeat">
-      <a:schemeClr val="dk1"/>
-    </dgm:txFillClrLst>
-    <dgm:txEffectClrLst/>
-  </dgm:styleLbl>
-  <dgm:styleLbl name="solidAlignAcc1">
-    <dgm:fillClrLst meth="repeat">
-      <a:schemeClr val="lt1"/>
-    </dgm:fillClrLst>
-    <dgm:linClrLst meth="repeat">
-      <a:schemeClr val="accent1"/>
-    </dgm:linClrLst>
-    <dgm:effectClrLst/>
-    <dgm:txLinClrLst/>
-    <dgm:txFillClrLst meth="repeat">
-      <a:schemeClr val="dk1"/>
-    </dgm:txFillClrLst>
-    <dgm:txEffectClrLst/>
-  </dgm:styleLbl>
-  <dgm:styleLbl name="solidBgAcc1">
-    <dgm:fillClrLst meth="repeat">
-      <a:schemeClr val="lt1"/>
-    </dgm:fillClrLst>
-    <dgm:linClrLst meth="repeat">
-      <a:schemeClr val="accent1"/>
-    </dgm:linClrLst>
-    <dgm:effectClrLst/>
-    <dgm:txLinClrLst/>
-    <dgm:txFillClrLst meth="repeat">
-      <a:schemeClr val="dk1"/>
-    </dgm:txFillClrLst>
-    <dgm:txEffectClrLst/>
-  </dgm:styleLbl>
-  <dgm:styleLbl name="fgAccFollowNode1">
-    <dgm:fillClrLst meth="repeat">
-      <a:schemeClr val="accent1">
-        <a:alpha val="90000"/>
-        <a:tint val="40000"/>
-      </a:schemeClr>
-    </dgm:fillClrLst>
-    <dgm:linClrLst meth="repeat">
-      <a:schemeClr val="accent1">
-        <a:alpha val="90000"/>
-        <a:tint val="40000"/>
-      </a:schemeClr>
-    </dgm:linClrLst>
-    <dgm:effectClrLst/>
-    <dgm:txLinClrLst/>
-    <dgm:txFillClrLst meth="repeat">
-      <a:schemeClr val="dk1"/>
-    </dgm:txFillClrLst>
-    <dgm:txEffectClrLst/>
-  </dgm:styleLbl>
-  <dgm:styleLbl name="alignAccFollowNode1">
-    <dgm:fillClrLst meth="repeat">
-      <a:schemeClr val="accent1">
-        <a:alpha val="90000"/>
-        <a:tint val="40000"/>
-      </a:schemeClr>
-    </dgm:fillClrLst>
-    <dgm:linClrLst meth="repeat">
-      <a:schemeClr val="accent1">
-        <a:alpha val="90000"/>
-        <a:tint val="40000"/>
-      </a:schemeClr>
-    </dgm:linClrLst>
-    <dgm:effectClrLst/>
-    <dgm:txLinClrLst/>
-    <dgm:txFillClrLst meth="repeat">
-      <a:schemeClr val="dk1"/>
-    </dgm:txFillClrLst>
-    <dgm:txEffectClrLst/>
-  </dgm:styleLbl>
-  <dgm:styleLbl name="bgAccFollowNode1">
-    <dgm:fillClrLst meth="repeat">
-      <a:schemeClr val="accent1">
-        <a:alpha val="90000"/>
-        <a:tint val="40000"/>
-      </a:schemeClr>
-    </dgm:fillClrLst>
-    <dgm:linClrLst meth="repeat">
-      <a:schemeClr val="accent1">
-        <a:alpha val="90000"/>
-        <a:tint val="40000"/>
-      </a:schemeClr>
-    </dgm:linClrLst>
-    <dgm:effectClrLst/>
-    <dgm:txLinClrLst/>
-    <dgm:txFillClrLst meth="repeat">
-      <a:schemeClr val="dk1"/>
-    </dgm:txFillClrLst>
-    <dgm:txEffectClrLst/>
-  </dgm:styleLbl>
-  <dgm:styleLbl name="fgAcc0">
-    <dgm:fillClrLst meth="repeat">
-      <a:schemeClr val="lt1">
-        <a:alpha val="90000"/>
-      </a:schemeClr>
-    </dgm:fillClrLst>
-    <dgm:linClrLst meth="repeat">
-      <a:schemeClr val="accent1"/>
-    </dgm:linClrLst>
-    <dgm:effectClrLst/>
-    <dgm:txLinClrLst/>
-    <dgm:txFillClrLst meth="repeat">
-      <a:schemeClr val="dk1"/>
-    </dgm:txFillClrLst>
-    <dgm:txEffectClrLst/>
-  </dgm:styleLbl>
-  <dgm:styleLbl name="fgAcc2">
-    <dgm:fillClrLst meth="repeat">
-      <a:schemeClr val="lt1">
-        <a:alpha val="90000"/>
-      </a:schemeClr>
-    </dgm:fillClrLst>
-    <dgm:linClrLst meth="repeat">
-      <a:schemeClr val="accent1"/>
-    </dgm:linClrLst>
-    <dgm:effectClrLst/>
-    <dgm:txLinClrLst/>
-    <dgm:txFillClrLst meth="repeat">
-      <a:schemeClr val="dk1"/>
-    </dgm:txFillClrLst>
-    <dgm:txEffectClrLst/>
-  </dgm:styleLbl>
-  <dgm:styleLbl name="fgAcc3">
-    <dgm:fillClrLst meth="repeat">
-      <a:schemeClr val="lt1">
-        <a:alpha val="90000"/>
-      </a:schemeClr>
-    </dgm:fillClrLst>
-    <dgm:linClrLst meth="repeat">
-      <a:schemeClr val="accent1"/>
-    </dgm:linClrLst>
-    <dgm:effectClrLst/>
-    <dgm:txLinClrLst/>
-    <dgm:txFillClrLst meth="repeat">
-      <a:schemeClr val="dk1"/>
-    </dgm:txFillClrLst>
-    <dgm:txEffectClrLst/>
-  </dgm:styleLbl>
-  <dgm:styleLbl name="fgAcc4">
-    <dgm:fillClrLst meth="repeat">
-      <a:schemeClr val="lt1">
-        <a:alpha val="90000"/>
-      </a:schemeClr>
-    </dgm:fillClrLst>
-    <dgm:linClrLst meth="repeat">
-      <a:schemeClr val="accent1"/>
-    </dgm:linClrLst>
-    <dgm:effectClrLst/>
-    <dgm:txLinClrLst/>
-    <dgm:txFillClrLst meth="repeat">
-      <a:schemeClr val="dk1"/>
-    </dgm:txFillClrLst>
-    <dgm:txEffectClrLst/>
-  </dgm:styleLbl>
-  <dgm:styleLbl name="bgShp">
-    <dgm:fillClrLst meth="repeat">
-      <a:schemeClr val="accent1">
-        <a:tint val="40000"/>
-      </a:schemeClr>
-    </dgm:fillClrLst>
-    <dgm:linClrLst meth="repeat">
-      <a:schemeClr val="accent1"/>
-    </dgm:linClrLst>
-    <dgm:effectClrLst/>
-    <dgm:txLinClrLst/>
-    <dgm:txFillClrLst meth="repeat">
-      <a:schemeClr val="dk1"/>
-    </dgm:txFillClrLst>
-    <dgm:txEffectClrLst/>
-  </dgm:styleLbl>
-  <dgm:styleLbl name="dkBgShp">
-    <dgm:fillClrLst meth="repeat">
-      <a:schemeClr val="accent1">
-        <a:shade val="80000"/>
-      </a:schemeClr>
-    </dgm:fillClrLst>
-    <dgm:linClrLst meth="repeat">
-      <a:schemeClr val="accent1"/>
-    </dgm:linClrLst>
-    <dgm:effectClrLst/>
-    <dgm:txLinClrLst/>
-    <dgm:txFillClrLst meth="repeat">
-      <a:schemeClr val="lt1"/>
-    </dgm:txFillClrLst>
-    <dgm:txEffectClrLst/>
-  </dgm:styleLbl>
-  <dgm:styleLbl name="trBgShp">
-    <dgm:fillClrLst meth="repeat">
-      <a:schemeClr val="accent1">
-        <a:tint val="50000"/>
-        <a:alpha val="40000"/>
-      </a:schemeClr>
-    </dgm:fillClrLst>
-    <dgm:linClrLst meth="repeat">
-      <a:schemeClr val="accent1"/>
-    </dgm:linClrLst>
-    <dgm:effectClrLst/>
-    <dgm:txLinClrLst/>
-    <dgm:txFillClrLst meth="repeat">
-      <a:schemeClr val="lt1"/>
-    </dgm:txFillClrLst>
-    <dgm:txEffectClrLst/>
-  </dgm:styleLbl>
-  <dgm:styleLbl name="fgShp">
-    <dgm:fillClrLst meth="repeat">
-      <a:schemeClr val="accent1">
-        <a:tint val="60000"/>
-      </a:schemeClr>
-    </dgm:fillClrLst>
-    <dgm:linClrLst meth="repeat">
-      <a:schemeClr val="lt1"/>
-    </dgm:linClrLst>
-    <dgm:effectClrLst/>
-    <dgm:txLinClrLst/>
-    <dgm:txFillClrLst meth="repeat">
-      <a:schemeClr val="dk1"/>
-    </dgm:txFillClrLst>
-    <dgm:txEffectClrLst/>
-  </dgm:styleLbl>
-  <dgm:styleLbl name="revTx">
-    <dgm:fillClrLst meth="repeat">
-      <a:schemeClr val="lt1">
-        <a:alpha val="0"/>
-      </a:schemeClr>
-    </dgm:fillClrLst>
-    <dgm:linClrLst meth="repeat">
-      <a:schemeClr val="dk1">
-        <a:alpha val="0"/>
-      </a:schemeClr>
-    </dgm:linClrLst>
-    <dgm:effectClrLst/>
-    <dgm:txLinClrLst/>
-    <dgm:txFillClrLst meth="repeat">
-      <a:schemeClr val="tx1"/>
-    </dgm:txFillClrLst>
-    <dgm:txEffectClrLst/>
-  </dgm:styleLbl>
-</dgm:colorsDef>
-</file>
-
-<file path=ppt/diagrams/data1.xml><?xml version="1.0" encoding="utf-8"?>
-<dgm:dataModel xmlns:dgm="http://schemas.openxmlformats.org/drawingml/2006/diagram" xmlns:a="http://schemas.openxmlformats.org/drawingml/2006/main">
-  <dgm:ptLst>
-    <dgm:pt modelId="{48E39E26-4498-4D66-9ACE-D147A05BBA18}" type="doc">
-      <dgm:prSet loTypeId="urn:microsoft.com/office/officeart/2005/8/layout/vList2" loCatId="list" qsTypeId="urn:microsoft.com/office/officeart/2005/8/quickstyle/simple1" qsCatId="simple" csTypeId="urn:microsoft.com/office/officeart/2005/8/colors/accent1_2" csCatId="accent1" phldr="1"/>
-      <dgm:spPr/>
-      <dgm:t>
-        <a:bodyPr/>
-        <a:lstStyle/>
-        <a:p>
-          <a:endParaRPr lang="ru-RU"/>
-        </a:p>
-      </dgm:t>
-    </dgm:pt>
-    <dgm:pt modelId="{B890F178-2207-4E77-941A-BA9290FC9135}">
-      <dgm:prSet phldrT="[Текст]">
-        <dgm:style>
-          <a:lnRef idx="3">
-            <a:schemeClr val="lt1"/>
-          </a:lnRef>
-          <a:fillRef idx="1">
-            <a:schemeClr val="accent4"/>
-          </a:fillRef>
-          <a:effectRef idx="1">
-            <a:schemeClr val="accent4"/>
-          </a:effectRef>
-          <a:fontRef idx="minor">
-            <a:schemeClr val="lt1"/>
-          </a:fontRef>
-        </dgm:style>
-      </dgm:prSet>
-      <dgm:spPr/>
-      <dgm:t>
-        <a:bodyPr/>
-        <a:lstStyle/>
-        <a:p>
-          <a:r>
-            <a:rPr lang="ru-RU" dirty="0"/>
-            <a:t>Этап 1</a:t>
-          </a:r>
-        </a:p>
-      </dgm:t>
-    </dgm:pt>
-    <dgm:pt modelId="{12FB196E-507C-44AD-8284-AD02ABE0B653}" type="parTrans" cxnId="{F05B04D2-90FB-44BD-88C1-FFE04BA6D884}">
-      <dgm:prSet/>
-      <dgm:spPr/>
-      <dgm:t>
-        <a:bodyPr/>
-        <a:lstStyle/>
-        <a:p>
-          <a:endParaRPr lang="ru-RU"/>
-        </a:p>
-      </dgm:t>
-    </dgm:pt>
-    <dgm:pt modelId="{2F05576B-D3E1-4CA2-BA6A-56121E80F8BA}" type="sibTrans" cxnId="{F05B04D2-90FB-44BD-88C1-FFE04BA6D884}">
-      <dgm:prSet/>
-      <dgm:spPr/>
-      <dgm:t>
-        <a:bodyPr/>
-        <a:lstStyle/>
-        <a:p>
-          <a:endParaRPr lang="ru-RU"/>
-        </a:p>
-      </dgm:t>
-    </dgm:pt>
-    <dgm:pt modelId="{C076E7CD-DE72-40A9-B02D-BB0144FFDDF4}">
-      <dgm:prSet phldrT="[Текст]"/>
-      <dgm:spPr/>
-      <dgm:t>
-        <a:bodyPr/>
-        <a:lstStyle/>
-        <a:p>
-          <a:r>
-            <a:rPr lang="ru-RU" dirty="0"/>
-            <a:t>Что-то делаем</a:t>
-          </a:r>
-        </a:p>
-      </dgm:t>
-    </dgm:pt>
-    <dgm:pt modelId="{AC932AC5-7C10-405E-BB32-B9E25BF0A2B5}" type="parTrans" cxnId="{4135D8EC-5968-4101-940B-AF13588704DA}">
-      <dgm:prSet/>
-      <dgm:spPr/>
-      <dgm:t>
-        <a:bodyPr/>
-        <a:lstStyle/>
-        <a:p>
-          <a:endParaRPr lang="ru-RU"/>
-        </a:p>
-      </dgm:t>
-    </dgm:pt>
-    <dgm:pt modelId="{D2A83FA3-FBF2-4C6D-B4F1-DD6903B25802}" type="sibTrans" cxnId="{4135D8EC-5968-4101-940B-AF13588704DA}">
-      <dgm:prSet/>
-      <dgm:spPr/>
-      <dgm:t>
-        <a:bodyPr/>
-        <a:lstStyle/>
-        <a:p>
-          <a:endParaRPr lang="ru-RU"/>
-        </a:p>
-      </dgm:t>
-    </dgm:pt>
-    <dgm:pt modelId="{CBB83EAD-CF02-4DB1-9C37-A8A0F2124D78}">
-      <dgm:prSet phldrT="[Текст]">
-        <dgm:style>
-          <a:lnRef idx="3">
-            <a:schemeClr val="lt1"/>
-          </a:lnRef>
-          <a:fillRef idx="1">
-            <a:schemeClr val="accent4"/>
-          </a:fillRef>
-          <a:effectRef idx="1">
-            <a:schemeClr val="accent4"/>
-          </a:effectRef>
-          <a:fontRef idx="minor">
-            <a:schemeClr val="lt1"/>
-          </a:fontRef>
-        </dgm:style>
-      </dgm:prSet>
-      <dgm:spPr/>
-      <dgm:t>
-        <a:bodyPr/>
-        <a:lstStyle/>
-        <a:p>
-          <a:r>
-            <a:rPr lang="ru-RU" dirty="0"/>
-            <a:t>Этап 2</a:t>
-          </a:r>
-        </a:p>
-      </dgm:t>
-    </dgm:pt>
-    <dgm:pt modelId="{2351BF96-9D81-46F0-8819-2CD9C3FF03C4}" type="parTrans" cxnId="{4728576A-7E06-499D-9109-D62DCF83189F}">
-      <dgm:prSet/>
-      <dgm:spPr/>
-      <dgm:t>
-        <a:bodyPr/>
-        <a:lstStyle/>
-        <a:p>
-          <a:endParaRPr lang="ru-RU"/>
-        </a:p>
-      </dgm:t>
-    </dgm:pt>
-    <dgm:pt modelId="{16069F65-4515-4EA8-8EAC-2B651BA33EE1}" type="sibTrans" cxnId="{4728576A-7E06-499D-9109-D62DCF83189F}">
-      <dgm:prSet/>
-      <dgm:spPr/>
-      <dgm:t>
-        <a:bodyPr/>
-        <a:lstStyle/>
-        <a:p>
-          <a:endParaRPr lang="ru-RU"/>
-        </a:p>
-      </dgm:t>
-    </dgm:pt>
-    <dgm:pt modelId="{DC2E4A70-4962-4810-AEB2-610360114E91}">
-      <dgm:prSet phldrT="[Текст]"/>
-      <dgm:spPr/>
-      <dgm:t>
-        <a:bodyPr/>
-        <a:lstStyle/>
-        <a:p>
-          <a:r>
-            <a:rPr lang="ru-RU" dirty="0"/>
-            <a:t>Что-то делаем</a:t>
-          </a:r>
-        </a:p>
-      </dgm:t>
-    </dgm:pt>
-    <dgm:pt modelId="{D5515433-54A7-4AE0-89B0-DE14EBCD393D}" type="parTrans" cxnId="{23596AF7-C408-45DC-9FEB-60E73E9BF08B}">
-      <dgm:prSet/>
-      <dgm:spPr/>
-      <dgm:t>
-        <a:bodyPr/>
-        <a:lstStyle/>
-        <a:p>
-          <a:endParaRPr lang="ru-RU"/>
-        </a:p>
-      </dgm:t>
-    </dgm:pt>
-    <dgm:pt modelId="{CBE252F0-BDF2-4652-B4A5-E8E0A5BDCD9E}" type="sibTrans" cxnId="{23596AF7-C408-45DC-9FEB-60E73E9BF08B}">
-      <dgm:prSet/>
-      <dgm:spPr/>
-      <dgm:t>
-        <a:bodyPr/>
-        <a:lstStyle/>
-        <a:p>
-          <a:endParaRPr lang="ru-RU"/>
-        </a:p>
-      </dgm:t>
-    </dgm:pt>
-    <dgm:pt modelId="{A95449E9-8760-4361-9459-04FCEEB1A875}">
-      <dgm:prSet phldrT="[Текст]"/>
-      <dgm:spPr/>
-      <dgm:t>
-        <a:bodyPr/>
-        <a:lstStyle/>
-        <a:p>
-          <a:r>
-            <a:rPr lang="ru-RU" dirty="0"/>
-            <a:t>Что-то делаем</a:t>
-          </a:r>
-        </a:p>
-      </dgm:t>
-    </dgm:pt>
-    <dgm:pt modelId="{B87F7129-0E54-4198-B056-928BF7D0CB40}" type="parTrans" cxnId="{711C5AB1-BA62-4BB3-BD2D-40334E8E440D}">
-      <dgm:prSet/>
-      <dgm:spPr/>
-      <dgm:t>
-        <a:bodyPr/>
-        <a:lstStyle/>
-        <a:p>
-          <a:endParaRPr lang="ru-RU"/>
-        </a:p>
-      </dgm:t>
-    </dgm:pt>
-    <dgm:pt modelId="{E73B632B-BB4E-4E02-AE00-DB675980FDF7}" type="sibTrans" cxnId="{711C5AB1-BA62-4BB3-BD2D-40334E8E440D}">
-      <dgm:prSet/>
-      <dgm:spPr/>
-      <dgm:t>
-        <a:bodyPr/>
-        <a:lstStyle/>
-        <a:p>
-          <a:endParaRPr lang="ru-RU"/>
-        </a:p>
-      </dgm:t>
-    </dgm:pt>
-    <dgm:pt modelId="{DC3D0DD9-E455-435C-89FB-A6541E2D47E9}">
-      <dgm:prSet phldrT="[Текст]"/>
-      <dgm:spPr/>
-      <dgm:t>
-        <a:bodyPr/>
-        <a:lstStyle/>
-        <a:p>
-          <a:r>
-            <a:rPr lang="ru-RU" dirty="0"/>
-            <a:t>Что-то делаем</a:t>
-          </a:r>
-        </a:p>
-      </dgm:t>
-    </dgm:pt>
-    <dgm:pt modelId="{966C5567-0020-44F7-97C2-1A6179375B6B}" type="parTrans" cxnId="{A976C9AA-36FB-4AB0-94C7-93EE90CD7D2D}">
-      <dgm:prSet/>
-      <dgm:spPr/>
-      <dgm:t>
-        <a:bodyPr/>
-        <a:lstStyle/>
-        <a:p>
-          <a:endParaRPr lang="ru-RU"/>
-        </a:p>
-      </dgm:t>
-    </dgm:pt>
-    <dgm:pt modelId="{D659FEC6-6DA6-4008-8F8D-8F19E98A91CF}" type="sibTrans" cxnId="{A976C9AA-36FB-4AB0-94C7-93EE90CD7D2D}">
-      <dgm:prSet/>
-      <dgm:spPr/>
-      <dgm:t>
-        <a:bodyPr/>
-        <a:lstStyle/>
-        <a:p>
-          <a:endParaRPr lang="ru-RU"/>
-        </a:p>
-      </dgm:t>
-    </dgm:pt>
-    <dgm:pt modelId="{177A6A29-B5CF-45FB-9989-8C6BC6E3368A}">
-      <dgm:prSet phldrT="[Текст]">
-        <dgm:style>
-          <a:lnRef idx="3">
-            <a:schemeClr val="lt1"/>
-          </a:lnRef>
-          <a:fillRef idx="1">
-            <a:schemeClr val="accent4"/>
-          </a:fillRef>
-          <a:effectRef idx="1">
-            <a:schemeClr val="accent4"/>
-          </a:effectRef>
-          <a:fontRef idx="minor">
-            <a:schemeClr val="lt1"/>
-          </a:fontRef>
-        </dgm:style>
-      </dgm:prSet>
-      <dgm:spPr/>
-      <dgm:t>
-        <a:bodyPr/>
-        <a:lstStyle/>
-        <a:p>
-          <a:r>
-            <a:rPr lang="ru-RU" dirty="0"/>
-            <a:t>Этап 3</a:t>
-          </a:r>
-        </a:p>
-      </dgm:t>
-    </dgm:pt>
-    <dgm:pt modelId="{163D27F8-1867-4A18-9370-7F5A5E62C16D}" type="parTrans" cxnId="{B18C44B3-53EC-4A69-8008-DAA1C99E4F43}">
-      <dgm:prSet/>
-      <dgm:spPr/>
-      <dgm:t>
-        <a:bodyPr/>
-        <a:lstStyle/>
-        <a:p>
-          <a:endParaRPr lang="ru-RU"/>
-        </a:p>
-      </dgm:t>
-    </dgm:pt>
-    <dgm:pt modelId="{AF36CDCC-EA78-4FC4-BF42-6847A696C3B7}" type="sibTrans" cxnId="{B18C44B3-53EC-4A69-8008-DAA1C99E4F43}">
-      <dgm:prSet/>
-      <dgm:spPr/>
-      <dgm:t>
-        <a:bodyPr/>
-        <a:lstStyle/>
-        <a:p>
-          <a:endParaRPr lang="ru-RU"/>
-        </a:p>
-      </dgm:t>
-    </dgm:pt>
-    <dgm:pt modelId="{7F3C21C0-0039-407A-8293-B92BBA6F369E}">
-      <dgm:prSet phldrT="[Текст]"/>
-      <dgm:spPr/>
-      <dgm:t>
-        <a:bodyPr/>
-        <a:lstStyle/>
-        <a:p>
-          <a:r>
-            <a:rPr lang="ru-RU" dirty="0"/>
-            <a:t>Что-то делаем</a:t>
-          </a:r>
-        </a:p>
-      </dgm:t>
-    </dgm:pt>
-    <dgm:pt modelId="{F9224E6B-E96C-47C1-8AC6-BC54B4398425}" type="parTrans" cxnId="{CDFEA63F-2876-4610-86FB-3A6E692FCED2}">
-      <dgm:prSet/>
-      <dgm:spPr/>
-      <dgm:t>
-        <a:bodyPr/>
-        <a:lstStyle/>
-        <a:p>
-          <a:endParaRPr lang="ru-RU"/>
-        </a:p>
-      </dgm:t>
-    </dgm:pt>
-    <dgm:pt modelId="{2DA181AA-1401-41FA-91F4-13B664F31F3B}" type="sibTrans" cxnId="{CDFEA63F-2876-4610-86FB-3A6E692FCED2}">
-      <dgm:prSet/>
-      <dgm:spPr/>
-      <dgm:t>
-        <a:bodyPr/>
-        <a:lstStyle/>
-        <a:p>
-          <a:endParaRPr lang="ru-RU"/>
-        </a:p>
-      </dgm:t>
-    </dgm:pt>
-    <dgm:pt modelId="{D2DBF182-73DE-4890-990C-47A7E2DD3D1C}">
-      <dgm:prSet phldrT="[Текст]">
-        <dgm:style>
-          <a:lnRef idx="3">
-            <a:schemeClr val="lt1"/>
-          </a:lnRef>
-          <a:fillRef idx="1">
-            <a:schemeClr val="accent4"/>
-          </a:fillRef>
-          <a:effectRef idx="1">
-            <a:schemeClr val="accent4"/>
-          </a:effectRef>
-          <a:fontRef idx="minor">
-            <a:schemeClr val="lt1"/>
-          </a:fontRef>
-        </dgm:style>
-      </dgm:prSet>
-      <dgm:spPr/>
-      <dgm:t>
-        <a:bodyPr/>
-        <a:lstStyle/>
-        <a:p>
-          <a:r>
-            <a:rPr lang="ru-RU" dirty="0"/>
-            <a:t>Этап 4</a:t>
-          </a:r>
-        </a:p>
-      </dgm:t>
-    </dgm:pt>
-    <dgm:pt modelId="{2D6ABC2F-289E-470F-950D-D6FAFBB615C7}" type="parTrans" cxnId="{6A25BAB3-B8F3-46DC-AFAA-FF5AECACB4E9}">
-      <dgm:prSet/>
-      <dgm:spPr/>
-      <dgm:t>
-        <a:bodyPr/>
-        <a:lstStyle/>
-        <a:p>
-          <a:endParaRPr lang="ru-RU"/>
-        </a:p>
-      </dgm:t>
-    </dgm:pt>
-    <dgm:pt modelId="{B1DB4936-DDBB-4CB4-8995-1700BA9A0629}" type="sibTrans" cxnId="{6A25BAB3-B8F3-46DC-AFAA-FF5AECACB4E9}">
-      <dgm:prSet/>
-      <dgm:spPr/>
-      <dgm:t>
-        <a:bodyPr/>
-        <a:lstStyle/>
-        <a:p>
-          <a:endParaRPr lang="ru-RU"/>
-        </a:p>
-      </dgm:t>
-    </dgm:pt>
-    <dgm:pt modelId="{EE7CA6B5-C50F-401F-953E-C9C5E4AC03EA}">
-      <dgm:prSet phldrT="[Текст]"/>
-      <dgm:spPr/>
-      <dgm:t>
-        <a:bodyPr/>
-        <a:lstStyle/>
-        <a:p>
-          <a:r>
-            <a:rPr lang="ru-RU" dirty="0"/>
-            <a:t>Что-то делаем</a:t>
-          </a:r>
-        </a:p>
-      </dgm:t>
-    </dgm:pt>
-    <dgm:pt modelId="{44069ECB-1EF0-494E-9F95-832FE84505E9}" type="parTrans" cxnId="{B8E91CC3-2075-4B10-A8A8-3ED51828AAC5}">
-      <dgm:prSet/>
-      <dgm:spPr/>
-      <dgm:t>
-        <a:bodyPr/>
-        <a:lstStyle/>
-        <a:p>
-          <a:endParaRPr lang="ru-RU"/>
-        </a:p>
-      </dgm:t>
-    </dgm:pt>
-    <dgm:pt modelId="{27B9AEC0-C063-45FB-9DD3-61621AE572CE}" type="sibTrans" cxnId="{B8E91CC3-2075-4B10-A8A8-3ED51828AAC5}">
-      <dgm:prSet/>
-      <dgm:spPr/>
-      <dgm:t>
-        <a:bodyPr/>
-        <a:lstStyle/>
-        <a:p>
-          <a:endParaRPr lang="ru-RU"/>
-        </a:p>
-      </dgm:t>
-    </dgm:pt>
-    <dgm:pt modelId="{90F47B81-59E8-4CFC-A644-3F6948FB51A4}">
-      <dgm:prSet phldrT="[Текст]"/>
-      <dgm:spPr/>
-      <dgm:t>
-        <a:bodyPr/>
-        <a:lstStyle/>
-        <a:p>
-          <a:r>
-            <a:rPr lang="ru-RU" dirty="0"/>
-            <a:t>Что-то делаем</a:t>
-          </a:r>
-        </a:p>
-      </dgm:t>
-    </dgm:pt>
-    <dgm:pt modelId="{EEF64EEF-3BA0-40CE-A9C3-4A361941A090}" type="parTrans" cxnId="{DBACA85A-2F7D-4B61-ACB9-9CF453E890DE}">
-      <dgm:prSet/>
-      <dgm:spPr/>
-      <dgm:t>
-        <a:bodyPr/>
-        <a:lstStyle/>
-        <a:p>
-          <a:endParaRPr lang="ru-RU"/>
-        </a:p>
-      </dgm:t>
-    </dgm:pt>
-    <dgm:pt modelId="{7F2E802B-B5FE-4AC2-BC1D-EFC38E494236}" type="sibTrans" cxnId="{DBACA85A-2F7D-4B61-ACB9-9CF453E890DE}">
-      <dgm:prSet/>
-      <dgm:spPr/>
-      <dgm:t>
-        <a:bodyPr/>
-        <a:lstStyle/>
-        <a:p>
-          <a:endParaRPr lang="ru-RU"/>
-        </a:p>
-      </dgm:t>
-    </dgm:pt>
-    <dgm:pt modelId="{0F94AE7C-2216-4057-AADA-A6B4C7E0C751}">
-      <dgm:prSet phldrT="[Текст]"/>
-      <dgm:spPr/>
-      <dgm:t>
-        <a:bodyPr/>
-        <a:lstStyle/>
-        <a:p>
-          <a:r>
-            <a:rPr lang="ru-RU" dirty="0"/>
-            <a:t>Что-то делаем</a:t>
-          </a:r>
-        </a:p>
-      </dgm:t>
-    </dgm:pt>
-    <dgm:pt modelId="{EAA01054-64DC-49C8-BB5A-1CF26D7801AC}" type="parTrans" cxnId="{38A455EB-1815-48AC-A06C-CE59A4B91259}">
-      <dgm:prSet/>
-      <dgm:spPr/>
-      <dgm:t>
-        <a:bodyPr/>
-        <a:lstStyle/>
-        <a:p>
-          <a:endParaRPr lang="ru-RU"/>
-        </a:p>
-      </dgm:t>
-    </dgm:pt>
-    <dgm:pt modelId="{56E7BED8-8102-4B46-A5F4-51BA936E86A9}" type="sibTrans" cxnId="{38A455EB-1815-48AC-A06C-CE59A4B91259}">
-      <dgm:prSet/>
-      <dgm:spPr/>
-      <dgm:t>
-        <a:bodyPr/>
-        <a:lstStyle/>
-        <a:p>
-          <a:endParaRPr lang="ru-RU"/>
-        </a:p>
-      </dgm:t>
-    </dgm:pt>
-    <dgm:pt modelId="{FA875D33-6294-4415-8BF0-93F9C639C018}" type="pres">
-      <dgm:prSet presAssocID="{48E39E26-4498-4D66-9ACE-D147A05BBA18}" presName="linear" presStyleCnt="0">
-        <dgm:presLayoutVars>
-          <dgm:animLvl val="lvl"/>
-          <dgm:resizeHandles val="exact"/>
-        </dgm:presLayoutVars>
-      </dgm:prSet>
-      <dgm:spPr/>
-    </dgm:pt>
-    <dgm:pt modelId="{8A0D57C4-41B0-42B4-965F-0892EEC3EC24}" type="pres">
-      <dgm:prSet presAssocID="{B890F178-2207-4E77-941A-BA9290FC9135}" presName="parentText" presStyleLbl="node1" presStyleIdx="0" presStyleCnt="4">
-        <dgm:presLayoutVars>
-          <dgm:chMax val="0"/>
-          <dgm:bulletEnabled val="1"/>
-        </dgm:presLayoutVars>
-      </dgm:prSet>
-      <dgm:spPr/>
-    </dgm:pt>
-    <dgm:pt modelId="{3542FB99-3407-4F2D-9C93-035C8035B143}" type="pres">
-      <dgm:prSet presAssocID="{B890F178-2207-4E77-941A-BA9290FC9135}" presName="childText" presStyleLbl="revTx" presStyleIdx="0" presStyleCnt="4">
-        <dgm:presLayoutVars>
-          <dgm:bulletEnabled val="1"/>
-        </dgm:presLayoutVars>
-      </dgm:prSet>
-      <dgm:spPr/>
-    </dgm:pt>
-    <dgm:pt modelId="{5E1554EA-31D7-4820-A418-76BE800A2643}" type="pres">
-      <dgm:prSet presAssocID="{CBB83EAD-CF02-4DB1-9C37-A8A0F2124D78}" presName="parentText" presStyleLbl="node1" presStyleIdx="1" presStyleCnt="4">
-        <dgm:presLayoutVars>
-          <dgm:chMax val="0"/>
-          <dgm:bulletEnabled val="1"/>
-        </dgm:presLayoutVars>
-      </dgm:prSet>
-      <dgm:spPr/>
-    </dgm:pt>
-    <dgm:pt modelId="{01582F5B-AAE7-4A33-A120-6884B84CE253}" type="pres">
-      <dgm:prSet presAssocID="{CBB83EAD-CF02-4DB1-9C37-A8A0F2124D78}" presName="childText" presStyleLbl="revTx" presStyleIdx="1" presStyleCnt="4">
-        <dgm:presLayoutVars>
-          <dgm:bulletEnabled val="1"/>
-        </dgm:presLayoutVars>
-      </dgm:prSet>
-      <dgm:spPr/>
-    </dgm:pt>
-    <dgm:pt modelId="{855E81DD-AD3D-4E21-AA22-FAF1C29CEC76}" type="pres">
-      <dgm:prSet presAssocID="{177A6A29-B5CF-45FB-9989-8C6BC6E3368A}" presName="parentText" presStyleLbl="node1" presStyleIdx="2" presStyleCnt="4">
-        <dgm:presLayoutVars>
-          <dgm:chMax val="0"/>
-          <dgm:bulletEnabled val="1"/>
-        </dgm:presLayoutVars>
-      </dgm:prSet>
-      <dgm:spPr/>
-    </dgm:pt>
-    <dgm:pt modelId="{F62E65CF-C064-4E46-8A2A-ECFB31624F7F}" type="pres">
-      <dgm:prSet presAssocID="{177A6A29-B5CF-45FB-9989-8C6BC6E3368A}" presName="childText" presStyleLbl="revTx" presStyleIdx="2" presStyleCnt="4">
-        <dgm:presLayoutVars>
-          <dgm:bulletEnabled val="1"/>
-        </dgm:presLayoutVars>
-      </dgm:prSet>
-      <dgm:spPr/>
-    </dgm:pt>
-    <dgm:pt modelId="{D931C4D6-FE99-48F0-8614-A2DFC2C85A61}" type="pres">
-      <dgm:prSet presAssocID="{D2DBF182-73DE-4890-990C-47A7E2DD3D1C}" presName="parentText" presStyleLbl="node1" presStyleIdx="3" presStyleCnt="4">
-        <dgm:presLayoutVars>
-          <dgm:chMax val="0"/>
-          <dgm:bulletEnabled val="1"/>
-        </dgm:presLayoutVars>
-      </dgm:prSet>
-      <dgm:spPr/>
-    </dgm:pt>
-    <dgm:pt modelId="{E6220788-0FB0-4C54-975C-54A6DBFBD183}" type="pres">
-      <dgm:prSet presAssocID="{D2DBF182-73DE-4890-990C-47A7E2DD3D1C}" presName="childText" presStyleLbl="revTx" presStyleIdx="3" presStyleCnt="4">
-        <dgm:presLayoutVars>
-          <dgm:bulletEnabled val="1"/>
-        </dgm:presLayoutVars>
-      </dgm:prSet>
-      <dgm:spPr/>
-    </dgm:pt>
-  </dgm:ptLst>
-  <dgm:cxnLst>
-    <dgm:cxn modelId="{AAC11A0D-2A5B-4F2A-9EA0-26C63786B8B1}" type="presOf" srcId="{A95449E9-8760-4361-9459-04FCEEB1A875}" destId="{3542FB99-3407-4F2D-9C93-035C8035B143}" srcOrd="0" destOrd="1" presId="urn:microsoft.com/office/officeart/2005/8/layout/vList2"/>
-    <dgm:cxn modelId="{D0BCEC25-C965-44D7-B674-195079B7FBA4}" type="presOf" srcId="{CBB83EAD-CF02-4DB1-9C37-A8A0F2124D78}" destId="{5E1554EA-31D7-4820-A418-76BE800A2643}" srcOrd="0" destOrd="0" presId="urn:microsoft.com/office/officeart/2005/8/layout/vList2"/>
-    <dgm:cxn modelId="{8FB6602F-67DF-4A40-8948-D05186E598B4}" type="presOf" srcId="{D2DBF182-73DE-4890-990C-47A7E2DD3D1C}" destId="{D931C4D6-FE99-48F0-8614-A2DFC2C85A61}" srcOrd="0" destOrd="0" presId="urn:microsoft.com/office/officeart/2005/8/layout/vList2"/>
-    <dgm:cxn modelId="{CDFEA63F-2876-4610-86FB-3A6E692FCED2}" srcId="{177A6A29-B5CF-45FB-9989-8C6BC6E3368A}" destId="{7F3C21C0-0039-407A-8293-B92BBA6F369E}" srcOrd="0" destOrd="0" parTransId="{F9224E6B-E96C-47C1-8AC6-BC54B4398425}" sibTransId="{2DA181AA-1401-41FA-91F4-13B664F31F3B}"/>
-    <dgm:cxn modelId="{6A60AF5C-24F2-4E52-9C78-259D52E654A5}" type="presOf" srcId="{EE7CA6B5-C50F-401F-953E-C9C5E4AC03EA}" destId="{01582F5B-AAE7-4A33-A120-6884B84CE253}" srcOrd="0" destOrd="1" presId="urn:microsoft.com/office/officeart/2005/8/layout/vList2"/>
-    <dgm:cxn modelId="{192F495E-55CE-4C50-8EB5-2677D1C0DC7F}" type="presOf" srcId="{B890F178-2207-4E77-941A-BA9290FC9135}" destId="{8A0D57C4-41B0-42B4-965F-0892EEC3EC24}" srcOrd="0" destOrd="0" presId="urn:microsoft.com/office/officeart/2005/8/layout/vList2"/>
-    <dgm:cxn modelId="{4728576A-7E06-499D-9109-D62DCF83189F}" srcId="{48E39E26-4498-4D66-9ACE-D147A05BBA18}" destId="{CBB83EAD-CF02-4DB1-9C37-A8A0F2124D78}" srcOrd="1" destOrd="0" parTransId="{2351BF96-9D81-46F0-8819-2CD9C3FF03C4}" sibTransId="{16069F65-4515-4EA8-8EAC-2B651BA33EE1}"/>
-    <dgm:cxn modelId="{DBACA85A-2F7D-4B61-ACB9-9CF453E890DE}" srcId="{177A6A29-B5CF-45FB-9989-8C6BC6E3368A}" destId="{90F47B81-59E8-4CFC-A644-3F6948FB51A4}" srcOrd="1" destOrd="0" parTransId="{EEF64EEF-3BA0-40CE-A9C3-4A361941A090}" sibTransId="{7F2E802B-B5FE-4AC2-BC1D-EFC38E494236}"/>
-    <dgm:cxn modelId="{3630387F-ACA1-453E-81A1-604008138BAB}" type="presOf" srcId="{90F47B81-59E8-4CFC-A644-3F6948FB51A4}" destId="{F62E65CF-C064-4E46-8A2A-ECFB31624F7F}" srcOrd="0" destOrd="1" presId="urn:microsoft.com/office/officeart/2005/8/layout/vList2"/>
-    <dgm:cxn modelId="{A390957F-2246-49FE-8BC6-603A00E00CE2}" type="presOf" srcId="{48E39E26-4498-4D66-9ACE-D147A05BBA18}" destId="{FA875D33-6294-4415-8BF0-93F9C639C018}" srcOrd="0" destOrd="0" presId="urn:microsoft.com/office/officeart/2005/8/layout/vList2"/>
-    <dgm:cxn modelId="{816AB191-E055-49B5-9954-C68D23FBDE8E}" type="presOf" srcId="{C076E7CD-DE72-40A9-B02D-BB0144FFDDF4}" destId="{3542FB99-3407-4F2D-9C93-035C8035B143}" srcOrd="0" destOrd="0" presId="urn:microsoft.com/office/officeart/2005/8/layout/vList2"/>
-    <dgm:cxn modelId="{B6111C9D-5742-40E2-A429-EFAA79BD3281}" type="presOf" srcId="{177A6A29-B5CF-45FB-9989-8C6BC6E3368A}" destId="{855E81DD-AD3D-4E21-AA22-FAF1C29CEC76}" srcOrd="0" destOrd="0" presId="urn:microsoft.com/office/officeart/2005/8/layout/vList2"/>
-    <dgm:cxn modelId="{A976C9AA-36FB-4AB0-94C7-93EE90CD7D2D}" srcId="{D2DBF182-73DE-4890-990C-47A7E2DD3D1C}" destId="{DC3D0DD9-E455-435C-89FB-A6541E2D47E9}" srcOrd="0" destOrd="0" parTransId="{966C5567-0020-44F7-97C2-1A6179375B6B}" sibTransId="{D659FEC6-6DA6-4008-8F8D-8F19E98A91CF}"/>
-    <dgm:cxn modelId="{711C5AB1-BA62-4BB3-BD2D-40334E8E440D}" srcId="{B890F178-2207-4E77-941A-BA9290FC9135}" destId="{A95449E9-8760-4361-9459-04FCEEB1A875}" srcOrd="1" destOrd="0" parTransId="{B87F7129-0E54-4198-B056-928BF7D0CB40}" sibTransId="{E73B632B-BB4E-4E02-AE00-DB675980FDF7}"/>
-    <dgm:cxn modelId="{B18C44B3-53EC-4A69-8008-DAA1C99E4F43}" srcId="{48E39E26-4498-4D66-9ACE-D147A05BBA18}" destId="{177A6A29-B5CF-45FB-9989-8C6BC6E3368A}" srcOrd="2" destOrd="0" parTransId="{163D27F8-1867-4A18-9370-7F5A5E62C16D}" sibTransId="{AF36CDCC-EA78-4FC4-BF42-6847A696C3B7}"/>
-    <dgm:cxn modelId="{6A25BAB3-B8F3-46DC-AFAA-FF5AECACB4E9}" srcId="{48E39E26-4498-4D66-9ACE-D147A05BBA18}" destId="{D2DBF182-73DE-4890-990C-47A7E2DD3D1C}" srcOrd="3" destOrd="0" parTransId="{2D6ABC2F-289E-470F-950D-D6FAFBB615C7}" sibTransId="{B1DB4936-DDBB-4CB4-8995-1700BA9A0629}"/>
-    <dgm:cxn modelId="{B8E91CC3-2075-4B10-A8A8-3ED51828AAC5}" srcId="{CBB83EAD-CF02-4DB1-9C37-A8A0F2124D78}" destId="{EE7CA6B5-C50F-401F-953E-C9C5E4AC03EA}" srcOrd="1" destOrd="0" parTransId="{44069ECB-1EF0-494E-9F95-832FE84505E9}" sibTransId="{27B9AEC0-C063-45FB-9DD3-61621AE572CE}"/>
-    <dgm:cxn modelId="{291F65C8-2C95-44C2-B5B3-61AB2AF4C061}" type="presOf" srcId="{7F3C21C0-0039-407A-8293-B92BBA6F369E}" destId="{F62E65CF-C064-4E46-8A2A-ECFB31624F7F}" srcOrd="0" destOrd="0" presId="urn:microsoft.com/office/officeart/2005/8/layout/vList2"/>
-    <dgm:cxn modelId="{F05B04D2-90FB-44BD-88C1-FFE04BA6D884}" srcId="{48E39E26-4498-4D66-9ACE-D147A05BBA18}" destId="{B890F178-2207-4E77-941A-BA9290FC9135}" srcOrd="0" destOrd="0" parTransId="{12FB196E-507C-44AD-8284-AD02ABE0B653}" sibTransId="{2F05576B-D3E1-4CA2-BA6A-56121E80F8BA}"/>
-    <dgm:cxn modelId="{3501D7D2-638E-4D81-AC47-E9AF7A97C90A}" type="presOf" srcId="{DC2E4A70-4962-4810-AEB2-610360114E91}" destId="{01582F5B-AAE7-4A33-A120-6884B84CE253}" srcOrd="0" destOrd="0" presId="urn:microsoft.com/office/officeart/2005/8/layout/vList2"/>
-    <dgm:cxn modelId="{DD5F60DA-B649-4075-AB7F-D7920E639D9E}" type="presOf" srcId="{0F94AE7C-2216-4057-AADA-A6B4C7E0C751}" destId="{E6220788-0FB0-4C54-975C-54A6DBFBD183}" srcOrd="0" destOrd="1" presId="urn:microsoft.com/office/officeart/2005/8/layout/vList2"/>
-    <dgm:cxn modelId="{38A455EB-1815-48AC-A06C-CE59A4B91259}" srcId="{D2DBF182-73DE-4890-990C-47A7E2DD3D1C}" destId="{0F94AE7C-2216-4057-AADA-A6B4C7E0C751}" srcOrd="1" destOrd="0" parTransId="{EAA01054-64DC-49C8-BB5A-1CF26D7801AC}" sibTransId="{56E7BED8-8102-4B46-A5F4-51BA936E86A9}"/>
-    <dgm:cxn modelId="{4135D8EC-5968-4101-940B-AF13588704DA}" srcId="{B890F178-2207-4E77-941A-BA9290FC9135}" destId="{C076E7CD-DE72-40A9-B02D-BB0144FFDDF4}" srcOrd="0" destOrd="0" parTransId="{AC932AC5-7C10-405E-BB32-B9E25BF0A2B5}" sibTransId="{D2A83FA3-FBF2-4C6D-B4F1-DD6903B25802}"/>
-    <dgm:cxn modelId="{EC30E7F1-C4E5-42DD-BCA2-80B50C97041E}" type="presOf" srcId="{DC3D0DD9-E455-435C-89FB-A6541E2D47E9}" destId="{E6220788-0FB0-4C54-975C-54A6DBFBD183}" srcOrd="0" destOrd="0" presId="urn:microsoft.com/office/officeart/2005/8/layout/vList2"/>
-    <dgm:cxn modelId="{23596AF7-C408-45DC-9FEB-60E73E9BF08B}" srcId="{CBB83EAD-CF02-4DB1-9C37-A8A0F2124D78}" destId="{DC2E4A70-4962-4810-AEB2-610360114E91}" srcOrd="0" destOrd="0" parTransId="{D5515433-54A7-4AE0-89B0-DE14EBCD393D}" sibTransId="{CBE252F0-BDF2-4652-B4A5-E8E0A5BDCD9E}"/>
-    <dgm:cxn modelId="{16FBD6FF-F825-48BD-9BE7-BD9CB36CBA41}" type="presParOf" srcId="{FA875D33-6294-4415-8BF0-93F9C639C018}" destId="{8A0D57C4-41B0-42B4-965F-0892EEC3EC24}" srcOrd="0" destOrd="0" presId="urn:microsoft.com/office/officeart/2005/8/layout/vList2"/>
-    <dgm:cxn modelId="{4EBC5614-ADE0-4EEC-9B83-589752BE8676}" type="presParOf" srcId="{FA875D33-6294-4415-8BF0-93F9C639C018}" destId="{3542FB99-3407-4F2D-9C93-035C8035B143}" srcOrd="1" destOrd="0" presId="urn:microsoft.com/office/officeart/2005/8/layout/vList2"/>
-    <dgm:cxn modelId="{11B396B0-1DF2-48D1-A05B-B22453D834F5}" type="presParOf" srcId="{FA875D33-6294-4415-8BF0-93F9C639C018}" destId="{5E1554EA-31D7-4820-A418-76BE800A2643}" srcOrd="2" destOrd="0" presId="urn:microsoft.com/office/officeart/2005/8/layout/vList2"/>
-    <dgm:cxn modelId="{CCFCCE16-B8A5-4998-B395-5A0709C2DF74}" type="presParOf" srcId="{FA875D33-6294-4415-8BF0-93F9C639C018}" destId="{01582F5B-AAE7-4A33-A120-6884B84CE253}" srcOrd="3" destOrd="0" presId="urn:microsoft.com/office/officeart/2005/8/layout/vList2"/>
-    <dgm:cxn modelId="{09C00EC6-C3E8-4889-B9E1-CC73CF199279}" type="presParOf" srcId="{FA875D33-6294-4415-8BF0-93F9C639C018}" destId="{855E81DD-AD3D-4E21-AA22-FAF1C29CEC76}" srcOrd="4" destOrd="0" presId="urn:microsoft.com/office/officeart/2005/8/layout/vList2"/>
-    <dgm:cxn modelId="{D4E5B721-C825-49AA-97F9-32512A02FC07}" type="presParOf" srcId="{FA875D33-6294-4415-8BF0-93F9C639C018}" destId="{F62E65CF-C064-4E46-8A2A-ECFB31624F7F}" srcOrd="5" destOrd="0" presId="urn:microsoft.com/office/officeart/2005/8/layout/vList2"/>
-    <dgm:cxn modelId="{F2C18090-5316-4BF6-8D55-4B5319E41576}" type="presParOf" srcId="{FA875D33-6294-4415-8BF0-93F9C639C018}" destId="{D931C4D6-FE99-48F0-8614-A2DFC2C85A61}" srcOrd="6" destOrd="0" presId="urn:microsoft.com/office/officeart/2005/8/layout/vList2"/>
-    <dgm:cxn modelId="{29AEAB63-7CC9-4C10-B2DE-3FC9A5BDBB60}" type="presParOf" srcId="{FA875D33-6294-4415-8BF0-93F9C639C018}" destId="{E6220788-0FB0-4C54-975C-54A6DBFBD183}" srcOrd="7" destOrd="0" presId="urn:microsoft.com/office/officeart/2005/8/layout/vList2"/>
-  </dgm:cxnLst>
-  <dgm:bg/>
-  <dgm:whole/>
-  <dgm:extLst>
-    <a:ext uri="http://schemas.microsoft.com/office/drawing/2008/diagram">
-      <dsp:dataModelExt xmlns:dsp="http://schemas.microsoft.com/office/drawing/2008/diagram" relId="rId6" minVer="http://schemas.openxmlformats.org/drawingml/2006/diagram"/>
-    </a:ext>
-  </dgm:extLst>
-</dgm:dataModel>
-</file>
-
-<file path=ppt/diagrams/drawing1.xml><?xml version="1.0" encoding="utf-8"?>
-<dsp:drawing xmlns:dgm="http://schemas.openxmlformats.org/drawingml/2006/diagram" xmlns:dsp="http://schemas.microsoft.com/office/drawing/2008/diagram" xmlns:a="http://schemas.openxmlformats.org/drawingml/2006/main">
-  <dsp:spTree>
-    <dsp:nvGrpSpPr>
-      <dsp:cNvPr id="0" name=""/>
-      <dsp:cNvGrpSpPr/>
-    </dsp:nvGrpSpPr>
-    <dsp:grpSpPr/>
-    <dsp:sp modelId="{8A0D57C4-41B0-42B4-965F-0892EEC3EC24}">
-      <dsp:nvSpPr>
-        <dsp:cNvPr id="0" name=""/>
-        <dsp:cNvSpPr/>
-      </dsp:nvSpPr>
-      <dsp:spPr>
-        <a:xfrm>
-          <a:off x="0" y="35243"/>
-          <a:ext cx="10515599" cy="515970"/>
-        </a:xfrm>
-        <a:prstGeom prst="roundRect">
-          <a:avLst/>
-        </a:prstGeom>
-        <a:solidFill>
-          <a:schemeClr val="accent4"/>
-        </a:solidFill>
-        <a:ln w="25400" cap="flat" cmpd="sng" algn="ctr">
-          <a:solidFill>
-            <a:schemeClr val="lt1"/>
-          </a:solidFill>
-          <a:prstDash val="solid"/>
-          <a:miter lim="800000"/>
-        </a:ln>
-        <a:effectLst/>
-      </dsp:spPr>
-      <dsp:style>
-        <a:lnRef idx="3">
-          <a:schemeClr val="lt1"/>
-        </a:lnRef>
-        <a:fillRef idx="1">
-          <a:schemeClr val="accent4"/>
-        </a:fillRef>
-        <a:effectRef idx="1">
-          <a:schemeClr val="accent4"/>
-        </a:effectRef>
-        <a:fontRef idx="minor">
-          <a:schemeClr val="lt1"/>
-        </a:fontRef>
-      </dsp:style>
-      <dsp:txBody>
-        <a:bodyPr spcFirstLastPara="0" vert="horz" wrap="square" lIns="80010" tIns="80010" rIns="80010" bIns="80010" numCol="1" spcCol="1270" anchor="ctr" anchorCtr="0">
-          <a:noAutofit/>
-        </a:bodyPr>
-        <a:lstStyle/>
-        <a:p>
-          <a:pPr marL="0" lvl="0" indent="0" algn="l" defTabSz="933450">
-            <a:lnSpc>
-              <a:spcPct val="90000"/>
-            </a:lnSpc>
-            <a:spcBef>
-              <a:spcPct val="0"/>
-            </a:spcBef>
-            <a:spcAft>
-              <a:spcPct val="35000"/>
-            </a:spcAft>
-            <a:buNone/>
-          </a:pPr>
-          <a:r>
-            <a:rPr lang="ru-RU" sz="2100" kern="1200" dirty="0"/>
-            <a:t>Этап 1</a:t>
-          </a:r>
-        </a:p>
-      </dsp:txBody>
-      <dsp:txXfrm>
-        <a:off x="25188" y="60431"/>
-        <a:ext cx="10465223" cy="465594"/>
-      </dsp:txXfrm>
-    </dsp:sp>
-    <dsp:sp modelId="{3542FB99-3407-4F2D-9C93-035C8035B143}">
-      <dsp:nvSpPr>
-        <dsp:cNvPr id="0" name=""/>
-        <dsp:cNvSpPr/>
-      </dsp:nvSpPr>
-      <dsp:spPr>
-        <a:xfrm>
-          <a:off x="0" y="551213"/>
-          <a:ext cx="10515599" cy="554242"/>
-        </a:xfrm>
-        <a:prstGeom prst="rect">
-          <a:avLst/>
-        </a:prstGeom>
-        <a:noFill/>
-        <a:ln>
-          <a:noFill/>
-        </a:ln>
-        <a:effectLst/>
-      </dsp:spPr>
-      <dsp:style>
-        <a:lnRef idx="0">
-          <a:scrgbClr r="0" g="0" b="0"/>
-        </a:lnRef>
-        <a:fillRef idx="0">
-          <a:scrgbClr r="0" g="0" b="0"/>
-        </a:fillRef>
-        <a:effectRef idx="0">
-          <a:scrgbClr r="0" g="0" b="0"/>
-        </a:effectRef>
-        <a:fontRef idx="minor"/>
-      </dsp:style>
-      <dsp:txBody>
-        <a:bodyPr spcFirstLastPara="0" vert="horz" wrap="square" lIns="333870" tIns="26670" rIns="149352" bIns="26670" numCol="1" spcCol="1270" anchor="t" anchorCtr="0">
-          <a:noAutofit/>
-        </a:bodyPr>
-        <a:lstStyle/>
-        <a:p>
-          <a:pPr marL="171450" lvl="1" indent="-171450" algn="l" defTabSz="711200">
-            <a:lnSpc>
-              <a:spcPct val="90000"/>
-            </a:lnSpc>
-            <a:spcBef>
-              <a:spcPct val="0"/>
-            </a:spcBef>
-            <a:spcAft>
-              <a:spcPct val="20000"/>
-            </a:spcAft>
-            <a:buChar char="•"/>
-          </a:pPr>
-          <a:r>
-            <a:rPr lang="ru-RU" sz="1600" kern="1200" dirty="0"/>
-            <a:t>Что-то делаем</a:t>
-          </a:r>
-        </a:p>
-        <a:p>
-          <a:pPr marL="171450" lvl="1" indent="-171450" algn="l" defTabSz="711200">
-            <a:lnSpc>
-              <a:spcPct val="90000"/>
-            </a:lnSpc>
-            <a:spcBef>
-              <a:spcPct val="0"/>
-            </a:spcBef>
-            <a:spcAft>
-              <a:spcPct val="20000"/>
-            </a:spcAft>
-            <a:buChar char="•"/>
-          </a:pPr>
-          <a:r>
-            <a:rPr lang="ru-RU" sz="1600" kern="1200" dirty="0"/>
-            <a:t>Что-то делаем</a:t>
-          </a:r>
-        </a:p>
-      </dsp:txBody>
-      <dsp:txXfrm>
-        <a:off x="0" y="551213"/>
-        <a:ext cx="10515599" cy="554242"/>
-      </dsp:txXfrm>
-    </dsp:sp>
-    <dsp:sp modelId="{5E1554EA-31D7-4820-A418-76BE800A2643}">
-      <dsp:nvSpPr>
-        <dsp:cNvPr id="0" name=""/>
-        <dsp:cNvSpPr/>
-      </dsp:nvSpPr>
-      <dsp:spPr>
-        <a:xfrm>
-          <a:off x="0" y="1105456"/>
-          <a:ext cx="10515599" cy="515970"/>
-        </a:xfrm>
-        <a:prstGeom prst="roundRect">
-          <a:avLst/>
-        </a:prstGeom>
-        <a:solidFill>
-          <a:schemeClr val="accent4"/>
-        </a:solidFill>
-        <a:ln w="25400" cap="flat" cmpd="sng" algn="ctr">
-          <a:solidFill>
-            <a:schemeClr val="lt1"/>
-          </a:solidFill>
-          <a:prstDash val="solid"/>
-          <a:miter lim="800000"/>
-        </a:ln>
-        <a:effectLst/>
-      </dsp:spPr>
-      <dsp:style>
-        <a:lnRef idx="3">
-          <a:schemeClr val="lt1"/>
-        </a:lnRef>
-        <a:fillRef idx="1">
-          <a:schemeClr val="accent4"/>
-        </a:fillRef>
-        <a:effectRef idx="1">
-          <a:schemeClr val="accent4"/>
-        </a:effectRef>
-        <a:fontRef idx="minor">
-          <a:schemeClr val="lt1"/>
-        </a:fontRef>
-      </dsp:style>
-      <dsp:txBody>
-        <a:bodyPr spcFirstLastPara="0" vert="horz" wrap="square" lIns="80010" tIns="80010" rIns="80010" bIns="80010" numCol="1" spcCol="1270" anchor="ctr" anchorCtr="0">
-          <a:noAutofit/>
-        </a:bodyPr>
-        <a:lstStyle/>
-        <a:p>
-          <a:pPr marL="0" lvl="0" indent="0" algn="l" defTabSz="933450">
-            <a:lnSpc>
-              <a:spcPct val="90000"/>
-            </a:lnSpc>
-            <a:spcBef>
-              <a:spcPct val="0"/>
-            </a:spcBef>
-            <a:spcAft>
-              <a:spcPct val="35000"/>
-            </a:spcAft>
-            <a:buNone/>
-          </a:pPr>
-          <a:r>
-            <a:rPr lang="ru-RU" sz="2100" kern="1200" dirty="0"/>
-            <a:t>Этап 2</a:t>
-          </a:r>
-        </a:p>
-      </dsp:txBody>
-      <dsp:txXfrm>
-        <a:off x="25188" y="1130644"/>
-        <a:ext cx="10465223" cy="465594"/>
-      </dsp:txXfrm>
-    </dsp:sp>
-    <dsp:sp modelId="{01582F5B-AAE7-4A33-A120-6884B84CE253}">
-      <dsp:nvSpPr>
-        <dsp:cNvPr id="0" name=""/>
-        <dsp:cNvSpPr/>
-      </dsp:nvSpPr>
-      <dsp:spPr>
-        <a:xfrm>
-          <a:off x="0" y="1621426"/>
-          <a:ext cx="10515599" cy="554242"/>
-        </a:xfrm>
-        <a:prstGeom prst="rect">
-          <a:avLst/>
-        </a:prstGeom>
-        <a:noFill/>
-        <a:ln>
-          <a:noFill/>
-        </a:ln>
-        <a:effectLst/>
-      </dsp:spPr>
-      <dsp:style>
-        <a:lnRef idx="0">
-          <a:scrgbClr r="0" g="0" b="0"/>
-        </a:lnRef>
-        <a:fillRef idx="0">
-          <a:scrgbClr r="0" g="0" b="0"/>
-        </a:fillRef>
-        <a:effectRef idx="0">
-          <a:scrgbClr r="0" g="0" b="0"/>
-        </a:effectRef>
-        <a:fontRef idx="minor"/>
-      </dsp:style>
-      <dsp:txBody>
-        <a:bodyPr spcFirstLastPara="0" vert="horz" wrap="square" lIns="333870" tIns="26670" rIns="149352" bIns="26670" numCol="1" spcCol="1270" anchor="t" anchorCtr="0">
-          <a:noAutofit/>
-        </a:bodyPr>
-        <a:lstStyle/>
-        <a:p>
-          <a:pPr marL="171450" lvl="1" indent="-171450" algn="l" defTabSz="711200">
-            <a:lnSpc>
-              <a:spcPct val="90000"/>
-            </a:lnSpc>
-            <a:spcBef>
-              <a:spcPct val="0"/>
-            </a:spcBef>
-            <a:spcAft>
-              <a:spcPct val="20000"/>
-            </a:spcAft>
-            <a:buChar char="•"/>
-          </a:pPr>
-          <a:r>
-            <a:rPr lang="ru-RU" sz="1600" kern="1200" dirty="0"/>
-            <a:t>Что-то делаем</a:t>
-          </a:r>
-        </a:p>
-        <a:p>
-          <a:pPr marL="171450" lvl="1" indent="-171450" algn="l" defTabSz="711200">
-            <a:lnSpc>
-              <a:spcPct val="90000"/>
-            </a:lnSpc>
-            <a:spcBef>
-              <a:spcPct val="0"/>
-            </a:spcBef>
-            <a:spcAft>
-              <a:spcPct val="20000"/>
-            </a:spcAft>
-            <a:buChar char="•"/>
-          </a:pPr>
-          <a:r>
-            <a:rPr lang="ru-RU" sz="1600" kern="1200" dirty="0"/>
-            <a:t>Что-то делаем</a:t>
-          </a:r>
-        </a:p>
-      </dsp:txBody>
-      <dsp:txXfrm>
-        <a:off x="0" y="1621426"/>
-        <a:ext cx="10515599" cy="554242"/>
-      </dsp:txXfrm>
-    </dsp:sp>
-    <dsp:sp modelId="{855E81DD-AD3D-4E21-AA22-FAF1C29CEC76}">
-      <dsp:nvSpPr>
-        <dsp:cNvPr id="0" name=""/>
-        <dsp:cNvSpPr/>
-      </dsp:nvSpPr>
-      <dsp:spPr>
-        <a:xfrm>
-          <a:off x="0" y="2175669"/>
-          <a:ext cx="10515599" cy="515970"/>
-        </a:xfrm>
-        <a:prstGeom prst="roundRect">
-          <a:avLst/>
-        </a:prstGeom>
-        <a:solidFill>
-          <a:schemeClr val="accent4"/>
-        </a:solidFill>
-        <a:ln w="25400" cap="flat" cmpd="sng" algn="ctr">
-          <a:solidFill>
-            <a:schemeClr val="lt1"/>
-          </a:solidFill>
-          <a:prstDash val="solid"/>
-          <a:miter lim="800000"/>
-        </a:ln>
-        <a:effectLst/>
-      </dsp:spPr>
-      <dsp:style>
-        <a:lnRef idx="3">
-          <a:schemeClr val="lt1"/>
-        </a:lnRef>
-        <a:fillRef idx="1">
-          <a:schemeClr val="accent4"/>
-        </a:fillRef>
-        <a:effectRef idx="1">
-          <a:schemeClr val="accent4"/>
-        </a:effectRef>
-        <a:fontRef idx="minor">
-          <a:schemeClr val="lt1"/>
-        </a:fontRef>
-      </dsp:style>
-      <dsp:txBody>
-        <a:bodyPr spcFirstLastPara="0" vert="horz" wrap="square" lIns="80010" tIns="80010" rIns="80010" bIns="80010" numCol="1" spcCol="1270" anchor="ctr" anchorCtr="0">
-          <a:noAutofit/>
-        </a:bodyPr>
-        <a:lstStyle/>
-        <a:p>
-          <a:pPr marL="0" lvl="0" indent="0" algn="l" defTabSz="933450">
-            <a:lnSpc>
-              <a:spcPct val="90000"/>
-            </a:lnSpc>
-            <a:spcBef>
-              <a:spcPct val="0"/>
-            </a:spcBef>
-            <a:spcAft>
-              <a:spcPct val="35000"/>
-            </a:spcAft>
-            <a:buNone/>
-          </a:pPr>
-          <a:r>
-            <a:rPr lang="ru-RU" sz="2100" kern="1200" dirty="0"/>
-            <a:t>Этап 3</a:t>
-          </a:r>
-        </a:p>
-      </dsp:txBody>
-      <dsp:txXfrm>
-        <a:off x="25188" y="2200857"/>
-        <a:ext cx="10465223" cy="465594"/>
-      </dsp:txXfrm>
-    </dsp:sp>
-    <dsp:sp modelId="{F62E65CF-C064-4E46-8A2A-ECFB31624F7F}">
-      <dsp:nvSpPr>
-        <dsp:cNvPr id="0" name=""/>
-        <dsp:cNvSpPr/>
-      </dsp:nvSpPr>
-      <dsp:spPr>
-        <a:xfrm>
-          <a:off x="0" y="2691639"/>
-          <a:ext cx="10515599" cy="554242"/>
-        </a:xfrm>
-        <a:prstGeom prst="rect">
-          <a:avLst/>
-        </a:prstGeom>
-        <a:noFill/>
-        <a:ln>
-          <a:noFill/>
-        </a:ln>
-        <a:effectLst/>
-      </dsp:spPr>
-      <dsp:style>
-        <a:lnRef idx="0">
-          <a:scrgbClr r="0" g="0" b="0"/>
-        </a:lnRef>
-        <a:fillRef idx="0">
-          <a:scrgbClr r="0" g="0" b="0"/>
-        </a:fillRef>
-        <a:effectRef idx="0">
-          <a:scrgbClr r="0" g="0" b="0"/>
-        </a:effectRef>
-        <a:fontRef idx="minor"/>
-      </dsp:style>
-      <dsp:txBody>
-        <a:bodyPr spcFirstLastPara="0" vert="horz" wrap="square" lIns="333870" tIns="26670" rIns="149352" bIns="26670" numCol="1" spcCol="1270" anchor="t" anchorCtr="0">
-          <a:noAutofit/>
-        </a:bodyPr>
-        <a:lstStyle/>
-        <a:p>
-          <a:pPr marL="171450" lvl="1" indent="-171450" algn="l" defTabSz="711200">
-            <a:lnSpc>
-              <a:spcPct val="90000"/>
-            </a:lnSpc>
-            <a:spcBef>
-              <a:spcPct val="0"/>
-            </a:spcBef>
-            <a:spcAft>
-              <a:spcPct val="20000"/>
-            </a:spcAft>
-            <a:buChar char="•"/>
-          </a:pPr>
-          <a:r>
-            <a:rPr lang="ru-RU" sz="1600" kern="1200" dirty="0"/>
-            <a:t>Что-то делаем</a:t>
-          </a:r>
-        </a:p>
-        <a:p>
-          <a:pPr marL="171450" lvl="1" indent="-171450" algn="l" defTabSz="711200">
-            <a:lnSpc>
-              <a:spcPct val="90000"/>
-            </a:lnSpc>
-            <a:spcBef>
-              <a:spcPct val="0"/>
-            </a:spcBef>
-            <a:spcAft>
-              <a:spcPct val="20000"/>
-            </a:spcAft>
-            <a:buChar char="•"/>
-          </a:pPr>
-          <a:r>
-            <a:rPr lang="ru-RU" sz="1600" kern="1200" dirty="0"/>
-            <a:t>Что-то делаем</a:t>
-          </a:r>
-        </a:p>
-      </dsp:txBody>
-      <dsp:txXfrm>
-        <a:off x="0" y="2691639"/>
-        <a:ext cx="10515599" cy="554242"/>
-      </dsp:txXfrm>
-    </dsp:sp>
-    <dsp:sp modelId="{D931C4D6-FE99-48F0-8614-A2DFC2C85A61}">
-      <dsp:nvSpPr>
-        <dsp:cNvPr id="0" name=""/>
-        <dsp:cNvSpPr/>
-      </dsp:nvSpPr>
-      <dsp:spPr>
-        <a:xfrm>
-          <a:off x="0" y="3245881"/>
-          <a:ext cx="10515599" cy="515970"/>
-        </a:xfrm>
-        <a:prstGeom prst="roundRect">
-          <a:avLst/>
-        </a:prstGeom>
-        <a:solidFill>
-          <a:schemeClr val="accent4"/>
-        </a:solidFill>
-        <a:ln w="25400" cap="flat" cmpd="sng" algn="ctr">
-          <a:solidFill>
-            <a:schemeClr val="lt1"/>
-          </a:solidFill>
-          <a:prstDash val="solid"/>
-          <a:miter lim="800000"/>
-        </a:ln>
-        <a:effectLst/>
-      </dsp:spPr>
-      <dsp:style>
-        <a:lnRef idx="3">
-          <a:schemeClr val="lt1"/>
-        </a:lnRef>
-        <a:fillRef idx="1">
-          <a:schemeClr val="accent4"/>
-        </a:fillRef>
-        <a:effectRef idx="1">
-          <a:schemeClr val="accent4"/>
-        </a:effectRef>
-        <a:fontRef idx="minor">
-          <a:schemeClr val="lt1"/>
-        </a:fontRef>
-      </dsp:style>
-      <dsp:txBody>
-        <a:bodyPr spcFirstLastPara="0" vert="horz" wrap="square" lIns="80010" tIns="80010" rIns="80010" bIns="80010" numCol="1" spcCol="1270" anchor="ctr" anchorCtr="0">
-          <a:noAutofit/>
-        </a:bodyPr>
-        <a:lstStyle/>
-        <a:p>
-          <a:pPr marL="0" lvl="0" indent="0" algn="l" defTabSz="933450">
-            <a:lnSpc>
-              <a:spcPct val="90000"/>
-            </a:lnSpc>
-            <a:spcBef>
-              <a:spcPct val="0"/>
-            </a:spcBef>
-            <a:spcAft>
-              <a:spcPct val="35000"/>
-            </a:spcAft>
-            <a:buNone/>
-          </a:pPr>
-          <a:r>
-            <a:rPr lang="ru-RU" sz="2100" kern="1200" dirty="0"/>
-            <a:t>Этап 4</a:t>
-          </a:r>
-        </a:p>
-      </dsp:txBody>
-      <dsp:txXfrm>
-        <a:off x="25188" y="3271069"/>
-        <a:ext cx="10465223" cy="465594"/>
-      </dsp:txXfrm>
-    </dsp:sp>
-    <dsp:sp modelId="{E6220788-0FB0-4C54-975C-54A6DBFBD183}">
-      <dsp:nvSpPr>
-        <dsp:cNvPr id="0" name=""/>
-        <dsp:cNvSpPr/>
-      </dsp:nvSpPr>
-      <dsp:spPr>
-        <a:xfrm>
-          <a:off x="0" y="3761851"/>
-          <a:ext cx="10515599" cy="554242"/>
-        </a:xfrm>
-        <a:prstGeom prst="rect">
-          <a:avLst/>
-        </a:prstGeom>
-        <a:noFill/>
-        <a:ln>
-          <a:noFill/>
-        </a:ln>
-        <a:effectLst/>
-      </dsp:spPr>
-      <dsp:style>
-        <a:lnRef idx="0">
-          <a:scrgbClr r="0" g="0" b="0"/>
-        </a:lnRef>
-        <a:fillRef idx="0">
-          <a:scrgbClr r="0" g="0" b="0"/>
-        </a:fillRef>
-        <a:effectRef idx="0">
-          <a:scrgbClr r="0" g="0" b="0"/>
-        </a:effectRef>
-        <a:fontRef idx="minor"/>
-      </dsp:style>
-      <dsp:txBody>
-        <a:bodyPr spcFirstLastPara="0" vert="horz" wrap="square" lIns="333870" tIns="26670" rIns="149352" bIns="26670" numCol="1" spcCol="1270" anchor="t" anchorCtr="0">
-          <a:noAutofit/>
-        </a:bodyPr>
-        <a:lstStyle/>
-        <a:p>
-          <a:pPr marL="171450" lvl="1" indent="-171450" algn="l" defTabSz="711200">
-            <a:lnSpc>
-              <a:spcPct val="90000"/>
-            </a:lnSpc>
-            <a:spcBef>
-              <a:spcPct val="0"/>
-            </a:spcBef>
-            <a:spcAft>
-              <a:spcPct val="20000"/>
-            </a:spcAft>
-            <a:buChar char="•"/>
-          </a:pPr>
-          <a:r>
-            <a:rPr lang="ru-RU" sz="1600" kern="1200" dirty="0"/>
-            <a:t>Что-то делаем</a:t>
-          </a:r>
-        </a:p>
-        <a:p>
-          <a:pPr marL="171450" lvl="1" indent="-171450" algn="l" defTabSz="711200">
-            <a:lnSpc>
-              <a:spcPct val="90000"/>
-            </a:lnSpc>
-            <a:spcBef>
-              <a:spcPct val="0"/>
-            </a:spcBef>
-            <a:spcAft>
-              <a:spcPct val="20000"/>
-            </a:spcAft>
-            <a:buChar char="•"/>
-          </a:pPr>
-          <a:r>
-            <a:rPr lang="ru-RU" sz="1600" kern="1200" dirty="0"/>
-            <a:t>Что-то делаем</a:t>
-          </a:r>
-        </a:p>
-      </dsp:txBody>
-      <dsp:txXfrm>
-        <a:off x="0" y="3761851"/>
-        <a:ext cx="10515599" cy="554242"/>
-      </dsp:txXfrm>
-    </dsp:sp>
-  </dsp:spTree>
-</dsp:drawing>
-</file>
-
-<file path=ppt/diagrams/layout1.xml><?xml version="1.0" encoding="utf-8"?>
-<dgm:layoutDef xmlns:dgm="http://schemas.openxmlformats.org/drawingml/2006/diagram" xmlns:a="http://schemas.openxmlformats.org/drawingml/2006/main" uniqueId="urn:microsoft.com/office/officeart/2005/8/layout/vList2">
-  <dgm:title val=""/>
-  <dgm:desc val=""/>
-  <dgm:catLst>
-    <dgm:cat type="list" pri="3000"/>
-    <dgm:cat type="convert" pri="1000"/>
-  </dgm:catLst>
-  <dgm:sampData>
-    <dgm:dataModel>
-      <dgm:ptLst>
-        <dgm:pt modelId="0" type="doc"/>
-        <dgm:pt modelId="1">
-          <dgm:prSet phldr="1"/>
-        </dgm:pt>
-        <dgm:pt modelId="11">
-          <dgm:prSet phldr="1"/>
-        </dgm:pt>
-        <dgm:pt modelId="2">
-          <dgm:prSet phldr="1"/>
-        </dgm:pt>
-        <dgm:pt modelId="21">
-          <dgm:prSet phldr="1"/>
-        </dgm:pt>
-      </dgm:ptLst>
-      <dgm:cxnLst>
-        <dgm:cxn modelId="4" srcId="0" destId="1" srcOrd="0" destOrd="0"/>
-        <dgm:cxn modelId="5" srcId="0" destId="2" srcOrd="1" destOrd="0"/>
-        <dgm:cxn modelId="12" srcId="1" destId="11" srcOrd="0" destOrd="0"/>
-        <dgm:cxn modelId="23" srcId="2" destId="21" srcOrd="0" destOrd="0"/>
-      </dgm:cxnLst>
-      <dgm:bg/>
-      <dgm:whole/>
-    </dgm:dataModel>
-  </dgm:sampData>
-  <dgm:styleData>
-    <dgm:dataModel>
-      <dgm:ptLst>
-        <dgm:pt modelId="0" type="doc"/>
-        <dgm:pt modelId="1"/>
-        <dgm:pt modelId="2"/>
-      </dgm:ptLst>
-      <dgm:cxnLst>
-        <dgm:cxn modelId="3" srcId="0" destId="1" srcOrd="0" destOrd="0"/>
-        <dgm:cxn modelId="4" srcId="0" destId="2" srcOrd="1" destOrd="0"/>
-      </dgm:cxnLst>
-      <dgm:bg/>
-      <dgm:whole/>
-    </dgm:dataModel>
-  </dgm:styleData>
-  <dgm:clrData>
-    <dgm:dataModel>
-      <dgm:ptLst>
-        <dgm:pt modelId="0" type="doc"/>
-        <dgm:pt modelId="1"/>
-        <dgm:pt modelId="2"/>
-        <dgm:pt modelId="3"/>
-        <dgm:pt modelId="4"/>
-      </dgm:ptLst>
-      <dgm:cxnLst>
-        <dgm:cxn modelId="5" srcId="0" destId="1" srcOrd="0" destOrd="0"/>
-        <dgm:cxn modelId="6" srcId="0" destId="2" srcOrd="1" destOrd="0"/>
-        <dgm:cxn modelId="7" srcId="0" destId="3" srcOrd="2" destOrd="0"/>
-        <dgm:cxn modelId="8" srcId="0" destId="4" srcOrd="3" destOrd="0"/>
-      </dgm:cxnLst>
-      <dgm:bg/>
-      <dgm:whole/>
-    </dgm:dataModel>
-  </dgm:clrData>
-  <dgm:layoutNode name="linear">
-    <dgm:varLst>
-      <dgm:animLvl val="lvl"/>
-      <dgm:resizeHandles val="exact"/>
-    </dgm:varLst>
-    <dgm:alg type="lin">
-      <dgm:param type="linDir" val="fromT"/>
-      <dgm:param type="vertAlign" val="mid"/>
-    </dgm:alg>
-    <dgm:shape xmlns:r="http://schemas.openxmlformats.org/officeDocument/2006/relationships" r:blip="">
-      <dgm:adjLst/>
-    </dgm:shape>
-    <dgm:presOf/>
-    <dgm:constrLst>
-      <dgm:constr type="w" for="ch" forName="parentText" refType="w"/>
-      <dgm:constr type="h" for="ch" forName="parentText" refType="primFontSz" refFor="ch" refForName="parentText" fact="0.52"/>
-      <dgm:constr type="w" for="ch" forName="childText" refType="w"/>
-      <dgm:constr type="h" for="ch" forName="childText" refType="primFontSz" refFor="ch" refForName="parentText" fact="0.46"/>
-      <dgm:constr type="h" for="ch" forName="parentText" op="equ"/>
-      <dgm:constr type="primFontSz" for="ch" forName="parentText" op="equ" val="65"/>
-      <dgm:constr type="primFontSz" for="ch" forName="childText" refType="primFontSz" refFor="ch" refForName="parentText" op="equ"/>
-      <dgm:constr type="h" for="ch" forName="spacer" refType="primFontSz" refFor="ch" refForName="parentText" fact="0.08"/>
-    </dgm:constrLst>
-    <dgm:ruleLst>
-      <dgm:rule type="primFontSz" for="ch" forName="parentText" val="5" fact="NaN" max="NaN"/>
-    </dgm:ruleLst>
-    <dgm:forEach name="Name0" axis="ch" ptType="node">
-      <dgm:layoutNode name="parentText" styleLbl="node1">
-        <dgm:varLst>
-          <dgm:chMax val="0"/>
-          <dgm:bulletEnabled val="1"/>
-        </dgm:varLst>
-        <dgm:alg type="tx">
-          <dgm:param type="parTxLTRAlign" val="l"/>
-          <dgm:param type="parTxRTLAlign" val="r"/>
-        </dgm:alg>
-        <dgm:shape xmlns:r="http://schemas.openxmlformats.org/officeDocument/2006/relationships" type="roundRect" r:blip="">
-          <dgm:adjLst/>
-        </dgm:shape>
-        <dgm:presOf axis="self"/>
-        <dgm:constrLst>
-          <dgm:constr type="tMarg" refType="primFontSz" fact="0.3"/>
-          <dgm:constr type="bMarg" refType="primFontSz" fact="0.3"/>
-          <dgm:constr type="lMarg" refType="primFontSz" fact="0.3"/>
-          <dgm:constr type="rMarg" refType="primFontSz" fact="0.3"/>
-        </dgm:constrLst>
-        <dgm:ruleLst>
-          <dgm:rule type="h" val="INF" fact="NaN" max="NaN"/>
-        </dgm:ruleLst>
-      </dgm:layoutNode>
-      <dgm:choose name="Name1">
-        <dgm:if name="Name2" axis="ch" ptType="node" func="cnt" op="gte" val="1">
-          <dgm:layoutNode name="childText" styleLbl="revTx">
-            <dgm:varLst>
-              <dgm:bulletEnabled val="1"/>
-            </dgm:varLst>
-            <dgm:alg type="tx">
-              <dgm:param type="stBulletLvl" val="1"/>
-              <dgm:param type="lnSpAfChP" val="20"/>
-            </dgm:alg>
-            <dgm:shape xmlns:r="http://schemas.openxmlformats.org/officeDocument/2006/relationships" type="rect" r:blip="">
-              <dgm:adjLst/>
-            </dgm:shape>
-            <dgm:presOf axis="des" ptType="node"/>
-            <dgm:constrLst>
-              <dgm:constr type="tMarg" refType="primFontSz" fact="0.1"/>
-              <dgm:constr type="bMarg" refType="primFontSz" fact="0.1"/>
-              <dgm:constr type="lMarg" refType="w" fact="0.09"/>
-            </dgm:constrLst>
-            <dgm:ruleLst>
-              <dgm:rule type="h" val="INF" fact="NaN" max="NaN"/>
-            </dgm:ruleLst>
-          </dgm:layoutNode>
-        </dgm:if>
-        <dgm:else name="Name3">
-          <dgm:choose name="Name4">
-            <dgm:if name="Name5" axis="par ch" ptType="doc node" func="cnt" op="gte" val="2">
-              <dgm:forEach name="Name6" axis="followSib" ptType="sibTrans" cnt="1">
-                <dgm:layoutNode name="spacer">
-                  <dgm:alg type="sp"/>
-                  <dgm:shape xmlns:r="http://schemas.openxmlformats.org/officeDocument/2006/relationships" r:blip="">
-                    <dgm:adjLst/>
-                  </dgm:shape>
-                  <dgm:presOf/>
-                  <dgm:constrLst/>
-                  <dgm:ruleLst/>
-                </dgm:layoutNode>
-              </dgm:forEach>
-            </dgm:if>
-            <dgm:else name="Name7"/>
-          </dgm:choose>
-        </dgm:else>
-      </dgm:choose>
-    </dgm:forEach>
-  </dgm:layoutNode>
-</dgm:layoutDef>
-</file>
-
-<file path=ppt/diagrams/quickStyle1.xml><?xml version="1.0" encoding="utf-8"?>
-<dgm:styleDef xmlns:dgm="http://schemas.openxmlformats.org/drawingml/2006/diagram" xmlns:a="http://schemas.openxmlformats.org/drawingml/2006/main" uniqueId="urn:microsoft.com/office/officeart/2005/8/quickstyle/simple1">
-  <dgm:title val=""/>
-  <dgm:desc val=""/>
-  <dgm:catLst>
-    <dgm:cat type="simple" pri="10100"/>
-  </dgm:catLst>
-  <dgm:scene3d>
-    <a:camera prst="orthographicFront"/>
-    <a:lightRig rig="threePt" dir="t"/>
-  </dgm:scene3d>
-  <dgm:styleLbl name="node0">
-    <dgm:scene3d>
-      <a:camera prst="orthographicFront"/>
-      <a:lightRig rig="threePt" dir="t"/>
-    </dgm:scene3d>
-    <dgm:sp3d/>
-    <dgm:txPr/>
-    <dgm:style>
-      <a:lnRef idx="2">
-        <a:scrgbClr r="0" g="0" b="0"/>
-      </a:lnRef>
-      <a:fillRef idx="1">
-        <a:scrgbClr r="0" g="0" b="0"/>
-      </a:fillRef>
-      <a:effectRef idx="0">
-        <a:scrgbClr r="0" g="0" b="0"/>
-      </a:effectRef>
-      <a:fontRef idx="minor">
-        <a:schemeClr val="lt1"/>
-      </a:fontRef>
-    </dgm:style>
-  </dgm:styleLbl>
-  <dgm:styleLbl name="lnNode1">
-    <dgm:scene3d>
-      <a:camera prst="orthographicFront"/>
-      <a:lightRig rig="threePt" dir="t"/>
-    </dgm:scene3d>
-    <dgm:sp3d/>
-    <dgm:txPr/>
-    <dgm:style>
-      <a:lnRef idx="2">
-        <a:scrgbClr r="0" g="0" b="0"/>
-      </a:lnRef>
-      <a:fillRef idx="1">
-        <a:scrgbClr r="0" g="0" b="0"/>
-      </a:fillRef>
-      <a:effectRef idx="0">
-        <a:scrgbClr r="0" g="0" b="0"/>
-      </a:effectRef>
-      <a:fontRef idx="minor">
-        <a:schemeClr val="lt1"/>
-      </a:fontRef>
-    </dgm:style>
-  </dgm:styleLbl>
-  <dgm:styleLbl name="vennNode1">
-    <dgm:scene3d>
-      <a:camera prst="orthographicFront"/>
-      <a:lightRig rig="threePt" dir="t"/>
-    </dgm:scene3d>
-    <dgm:sp3d/>
-    <dgm:txPr/>
-    <dgm:style>
-      <a:lnRef idx="2">
-        <a:scrgbClr r="0" g="0" b="0"/>
-      </a:lnRef>
-      <a:fillRef idx="1">
-        <a:scrgbClr r="0" g="0" b="0"/>
-      </a:fillRef>
-      <a:effectRef idx="0">
-        <a:scrgbClr r="0" g="0" b="0"/>
-      </a:effectRef>
-      <a:fontRef idx="minor">
-        <a:schemeClr val="tx1"/>
-      </a:fontRef>
-    </dgm:style>
-  </dgm:styleLbl>
-  <dgm:styleLbl name="alignNode1">
-    <dgm:scene3d>
-      <a:camera prst="orthographicFront"/>
-      <a:lightRig rig="threePt" dir="t"/>
-    </dgm:scene3d>
-    <dgm:sp3d/>
-    <dgm:txPr/>
-    <dgm:style>
-      <a:lnRef idx="2">
-        <a:scrgbClr r="0" g="0" b="0"/>
-      </a:lnRef>
-      <a:fillRef idx="1">
-        <a:scrgbClr r="0" g="0" b="0"/>
-      </a:fillRef>
-      <a:effectRef idx="0">
-        <a:scrgbClr r="0" g="0" b="0"/>
-      </a:effectRef>
-      <a:fontRef idx="minor">
-        <a:schemeClr val="lt1"/>
-      </a:fontRef>
-    </dgm:style>
-  </dgm:styleLbl>
-  <dgm:styleLbl name="node1">
-    <dgm:scene3d>
-      <a:camera prst="orthographicFront"/>
-      <a:lightRig rig="threePt" dir="t"/>
-    </dgm:scene3d>
-    <dgm:sp3d/>
-    <dgm:txPr/>
-    <dgm:style>
-      <a:lnRef idx="2">
-        <a:scrgbClr r="0" g="0" b="0"/>
-      </a:lnRef>
-      <a:fillRef idx="1">
-        <a:scrgbClr r="0" g="0" b="0"/>
-      </a:fillRef>
-      <a:effectRef idx="0">
-        <a:scrgbClr r="0" g="0" b="0"/>
-      </a:effectRef>
-      <a:fontRef idx="minor">
-        <a:schemeClr val="lt1"/>
-      </a:fontRef>
-    </dgm:style>
-  </dgm:styleLbl>
-  <dgm:styleLbl name="node2">
-    <dgm:scene3d>
-      <a:camera prst="orthographicFront"/>
-      <a:lightRig rig="threePt" dir="t"/>
-    </dgm:scene3d>
-    <dgm:sp3d/>
-    <dgm:txPr/>
-    <dgm:style>
-      <a:lnRef idx="2">
-        <a:scrgbClr r="0" g="0" b="0"/>
-      </a:lnRef>
-      <a:fillRef idx="1">
-        <a:scrgbClr r="0" g="0" b="0"/>
-      </a:fillRef>
-      <a:effectRef idx="0">
-        <a:scrgbClr r="0" g="0" b="0"/>
-      </a:effectRef>
-      <a:fontRef idx="minor">
-        <a:schemeClr val="lt1"/>
-      </a:fontRef>
-    </dgm:style>
-  </dgm:styleLbl>
-  <dgm:styleLbl name="node3">
-    <dgm:scene3d>
-      <a:camera prst="orthographicFront"/>
-      <a:lightRig rig="threePt" dir="t"/>
-    </dgm:scene3d>
-    <dgm:sp3d/>
-    <dgm:txPr/>
-    <dgm:style>
-      <a:lnRef idx="2">
-        <a:scrgbClr r="0" g="0" b="0"/>
-      </a:lnRef>
-      <a:fillRef idx="1">
-        <a:scrgbClr r="0" g="0" b="0"/>
-      </a:fillRef>
-      <a:effectRef idx="0">
-        <a:scrgbClr r="0" g="0" b="0"/>
-      </a:effectRef>
-      <a:fontRef idx="minor">
-        <a:schemeClr val="lt1"/>
-      </a:fontRef>
-    </dgm:style>
-  </dgm:styleLbl>
-  <dgm:styleLbl name="node4">
-    <dgm:scene3d>
-      <a:camera prst="orthographicFront"/>
-      <a:lightRig rig="threePt" dir="t"/>
-    </dgm:scene3d>
-    <dgm:sp3d/>
-    <dgm:txPr/>
-    <dgm:style>
-      <a:lnRef idx="2">
-        <a:scrgbClr r="0" g="0" b="0"/>
-      </a:lnRef>
-      <a:fillRef idx="1">
-        <a:scrgbClr r="0" g="0" b="0"/>
-      </a:fillRef>
-      <a:effectRef idx="0">
-        <a:scrgbClr r="0" g="0" b="0"/>
-      </a:effectRef>
-      <a:fontRef idx="minor">
-        <a:schemeClr val="lt1"/>
-      </a:fontRef>
-    </dgm:style>
-  </dgm:styleLbl>
-  <dgm:styleLbl name="fgImgPlace1">
-    <dgm:scene3d>
-      <a:camera prst="orthographicFront"/>
-      <a:lightRig rig="threePt" dir="t"/>
-    </dgm:scene3d>
-    <dgm:sp3d/>
-    <dgm:txPr/>
-    <dgm:style>
-      <a:lnRef idx="2">
-        <a:scrgbClr r="0" g="0" b="0"/>
-      </a:lnRef>
-      <a:fillRef idx="1">
-        <a:scrgbClr r="0" g="0" b="0"/>
-      </a:fillRef>
-      <a:effectRef idx="0">
-        <a:scrgbClr r="0" g="0" b="0"/>
-      </a:effectRef>
-      <a:fontRef idx="minor"/>
-    </dgm:style>
-  </dgm:styleLbl>
-  <dgm:styleLbl name="alignImgPlace1">
-    <dgm:scene3d>
-      <a:camera prst="orthographicFront"/>
-      <a:lightRig rig="threePt" dir="t"/>
-    </dgm:scene3d>
-    <dgm:sp3d/>
-    <dgm:txPr/>
-    <dgm:style>
-      <a:lnRef idx="2">
-        <a:scrgbClr r="0" g="0" b="0"/>
-      </a:lnRef>
-      <a:fillRef idx="1">
-        <a:scrgbClr r="0" g="0" b="0"/>
-      </a:fillRef>
-      <a:effectRef idx="0">
-        <a:scrgbClr r="0" g="0" b="0"/>
-      </a:effectRef>
-      <a:fontRef idx="minor"/>
-    </dgm:style>
-  </dgm:styleLbl>
-  <dgm:styleLbl name="bgImgPlace1">
-    <dgm:scene3d>
-      <a:camera prst="orthographicFront"/>
-      <a:lightRig rig="threePt" dir="t"/>
-    </dgm:scene3d>
-    <dgm:sp3d/>
-    <dgm:txPr/>
-    <dgm:style>
-      <a:lnRef idx="2">
-        <a:scrgbClr r="0" g="0" b="0"/>
-      </a:lnRef>
-      <a:fillRef idx="1">
-        <a:scrgbClr r="0" g="0" b="0"/>
-      </a:fillRef>
-      <a:effectRef idx="0">
-        <a:scrgbClr r="0" g="0" b="0"/>
-      </a:effectRef>
-      <a:fontRef idx="minor"/>
-    </dgm:style>
-  </dgm:styleLbl>
-  <dgm:styleLbl name="sibTrans2D1">
-    <dgm:scene3d>
-      <a:camera prst="orthographicFront"/>
-      <a:lightRig rig="threePt" dir="t"/>
-    </dgm:scene3d>
-    <dgm:sp3d/>
-    <dgm:txPr/>
-    <dgm:style>
-      <a:lnRef idx="0">
-        <a:scrgbClr r="0" g="0" b="0"/>
-      </a:lnRef>
-      <a:fillRef idx="1">
-        <a:scrgbClr r="0" g="0" b="0"/>
-      </a:fillRef>
-      <a:effectRef idx="0">
-        <a:scrgbClr r="0" g="0" b="0"/>
-      </a:effectRef>
-      <a:fontRef idx="minor">
-        <a:schemeClr val="lt1"/>
-      </a:fontRef>
-    </dgm:style>
-  </dgm:styleLbl>
-  <dgm:styleLbl name="fgSibTrans2D1">
-    <dgm:scene3d>
-      <a:camera prst="orthographicFront"/>
-      <a:lightRig rig="threePt" dir="t"/>
-    </dgm:scene3d>
-    <dgm:sp3d/>
-    <dgm:txPr/>
-    <dgm:style>
-      <a:lnRef idx="0">
-        <a:scrgbClr r="0" g="0" b="0"/>
-      </a:lnRef>
-      <a:fillRef idx="1">
-        <a:scrgbClr r="0" g="0" b="0"/>
-      </a:fillRef>
-      <a:effectRef idx="0">
-        <a:scrgbClr r="0" g="0" b="0"/>
-      </a:effectRef>
-      <a:fontRef idx="minor">
-        <a:schemeClr val="lt1"/>
-      </a:fontRef>
-    </dgm:style>
-  </dgm:styleLbl>
-  <dgm:styleLbl name="bgSibTrans2D1">
-    <dgm:scene3d>
-      <a:camera prst="orthographicFront"/>
-      <a:lightRig rig="threePt" dir="t"/>
-    </dgm:scene3d>
-    <dgm:sp3d/>
-    <dgm:txPr/>
-    <dgm:style>
-      <a:lnRef idx="0">
-        <a:scrgbClr r="0" g="0" b="0"/>
-      </a:lnRef>
-      <a:fillRef idx="1">
-        <a:scrgbClr r="0" g="0" b="0"/>
-      </a:fillRef>
-      <a:effectRef idx="0">
-        <a:scrgbClr r="0" g="0" b="0"/>
-      </a:effectRef>
-      <a:fontRef idx="minor">
-        <a:schemeClr val="lt1"/>
-      </a:fontRef>
-    </dgm:style>
-  </dgm:styleLbl>
-  <dgm:styleLbl name="sibTrans1D1">
-    <dgm:scene3d>
-      <a:camera prst="orthographicFront"/>
-      <a:lightRig rig="threePt" dir="t"/>
-    </dgm:scene3d>
-    <dgm:sp3d/>
-    <dgm:txPr/>
-    <dgm:style>
-      <a:lnRef idx="1">
-        <a:scrgbClr r="0" g="0" b="0"/>
-      </a:lnRef>
-      <a:fillRef idx="0">
-        <a:scrgbClr r="0" g="0" b="0"/>
-      </a:fillRef>
-      <a:effectRef idx="0">
-        <a:scrgbClr r="0" g="0" b="0"/>
-      </a:effectRef>
-      <a:fontRef idx="minor"/>
-    </dgm:style>
-  </dgm:styleLbl>
-  <dgm:styleLbl name="callout">
-    <dgm:scene3d>
-      <a:camera prst="orthographicFront"/>
-      <a:lightRig rig="threePt" dir="t"/>
-    </dgm:scene3d>
-    <dgm:sp3d/>
-    <dgm:txPr/>
-    <dgm:style>
-      <a:lnRef idx="2">
-        <a:scrgbClr r="0" g="0" b="0"/>
-      </a:lnRef>
-      <a:fillRef idx="1">
-        <a:scrgbClr r="0" g="0" b="0"/>
-      </a:fillRef>
-      <a:effectRef idx="0">
-        <a:scrgbClr r="0" g="0" b="0"/>
-      </a:effectRef>
-      <a:fontRef idx="minor"/>
-    </dgm:style>
-  </dgm:styleLbl>
-  <dgm:styleLbl name="asst0">
-    <dgm:scene3d>
-      <a:camera prst="orthographicFront"/>
-      <a:lightRig rig="threePt" dir="t"/>
-    </dgm:scene3d>
-    <dgm:sp3d/>
-    <dgm:txPr/>
-    <dgm:style>
-      <a:lnRef idx="2">
-        <a:scrgbClr r="0" g="0" b="0"/>
-      </a:lnRef>
-      <a:fillRef idx="1">
-        <a:scrgbClr r="0" g="0" b="0"/>
-      </a:fillRef>
-      <a:effectRef idx="0">
-        <a:scrgbClr r="0" g="0" b="0"/>
-      </a:effectRef>
-      <a:fontRef idx="minor">
-        <a:schemeClr val="lt1"/>
-      </a:fontRef>
-    </dgm:style>
-  </dgm:styleLbl>
-  <dgm:styleLbl name="asst1">
-    <dgm:scene3d>
-      <a:camera prst="orthographicFront"/>
-      <a:lightRig rig="threePt" dir="t"/>
-    </dgm:scene3d>
-    <dgm:sp3d/>
-    <dgm:txPr/>
-    <dgm:style>
-      <a:lnRef idx="2">
-        <a:scrgbClr r="0" g="0" b="0"/>
-      </a:lnRef>
-      <a:fillRef idx="1">
-        <a:scrgbClr r="0" g="0" b="0"/>
-      </a:fillRef>
-      <a:effectRef idx="0">
-        <a:scrgbClr r="0" g="0" b="0"/>
-      </a:effectRef>
-      <a:fontRef idx="minor">
-        <a:schemeClr val="lt1"/>
-      </a:fontRef>
-    </dgm:style>
-  </dgm:styleLbl>
-  <dgm:styleLbl name="asst2">
-    <dgm:scene3d>
-      <a:camera prst="orthographicFront"/>
-      <a:lightRig rig="threePt" dir="t"/>
-    </dgm:scene3d>
-    <dgm:sp3d/>
-    <dgm:txPr/>
-    <dgm:style>
-      <a:lnRef idx="2">
-        <a:scrgbClr r="0" g="0" b="0"/>
-      </a:lnRef>
-      <a:fillRef idx="1">
-        <a:scrgbClr r="0" g="0" b="0"/>
-      </a:fillRef>
-      <a:effectRef idx="0">
-        <a:scrgbClr r="0" g="0" b="0"/>
-      </a:effectRef>
-      <a:fontRef idx="minor">
-        <a:schemeClr val="lt1"/>
-      </a:fontRef>
-    </dgm:style>
-  </dgm:styleLbl>
-  <dgm:styleLbl name="asst3">
-    <dgm:scene3d>
-      <a:camera prst="orthographicFront"/>
-      <a:lightRig rig="threePt" dir="t"/>
-    </dgm:scene3d>
-    <dgm:sp3d/>
-    <dgm:txPr/>
-    <dgm:style>
-      <a:lnRef idx="2">
-        <a:scrgbClr r="0" g="0" b="0"/>
-      </a:lnRef>
-      <a:fillRef idx="1">
-        <a:scrgbClr r="0" g="0" b="0"/>
-      </a:fillRef>
-      <a:effectRef idx="0">
-        <a:scrgbClr r="0" g="0" b="0"/>
-      </a:effectRef>
-      <a:fontRef idx="minor">
-        <a:schemeClr val="lt1"/>
-      </a:fontRef>
-    </dgm:style>
-  </dgm:styleLbl>
-  <dgm:styleLbl name="asst4">
-    <dgm:scene3d>
-      <a:camera prst="orthographicFront"/>
-      <a:lightRig rig="threePt" dir="t"/>
-    </dgm:scene3d>
-    <dgm:sp3d/>
-    <dgm:txPr/>
-    <dgm:style>
-      <a:lnRef idx="2">
-        <a:scrgbClr r="0" g="0" b="0"/>
-      </a:lnRef>
-      <a:fillRef idx="1">
-        <a:scrgbClr r="0" g="0" b="0"/>
-      </a:fillRef>
-      <a:effectRef idx="0">
-        <a:scrgbClr r="0" g="0" b="0"/>
-      </a:effectRef>
-      <a:fontRef idx="minor">
-        <a:schemeClr val="lt1"/>
-      </a:fontRef>
-    </dgm:style>
-  </dgm:styleLbl>
-  <dgm:styleLbl name="parChTrans2D1">
-    <dgm:scene3d>
-      <a:camera prst="orthographicFront"/>
-      <a:lightRig rig="threePt" dir="t"/>
-    </dgm:scene3d>
-    <dgm:sp3d/>
-    <dgm:txPr/>
-    <dgm:style>
-      <a:lnRef idx="2">
-        <a:scrgbClr r="0" g="0" b="0"/>
-      </a:lnRef>
-      <a:fillRef idx="1">
-        <a:scrgbClr r="0" g="0" b="0"/>
-      </a:fillRef>
-      <a:effectRef idx="0">
-        <a:scrgbClr r="0" g="0" b="0"/>
-      </a:effectRef>
-      <a:fontRef idx="minor">
-        <a:schemeClr val="lt1"/>
-      </a:fontRef>
-    </dgm:style>
-  </dgm:styleLbl>
-  <dgm:styleLbl name="parChTrans2D2">
-    <dgm:scene3d>
-      <a:camera prst="orthographicFront"/>
-      <a:lightRig rig="threePt" dir="t"/>
-    </dgm:scene3d>
-    <dgm:sp3d/>
-    <dgm:txPr/>
-    <dgm:style>
-      <a:lnRef idx="2">
-        <a:scrgbClr r="0" g="0" b="0"/>
-      </a:lnRef>
-      <a:fillRef idx="1">
-        <a:scrgbClr r="0" g="0" b="0"/>
-      </a:fillRef>
-      <a:effectRef idx="0">
-        <a:scrgbClr r="0" g="0" b="0"/>
-      </a:effectRef>
-      <a:fontRef idx="minor">
-        <a:schemeClr val="lt1"/>
-      </a:fontRef>
-    </dgm:style>
-  </dgm:styleLbl>
-  <dgm:styleLbl name="parChTrans2D3">
-    <dgm:scene3d>
-      <a:camera prst="orthographicFront"/>
-      <a:lightRig rig="threePt" dir="t"/>
-    </dgm:scene3d>
-    <dgm:sp3d/>
-    <dgm:txPr/>
-    <dgm:style>
-      <a:lnRef idx="2">
-        <a:scrgbClr r="0" g="0" b="0"/>
-      </a:lnRef>
-      <a:fillRef idx="1">
-        <a:scrgbClr r="0" g="0" b="0"/>
-      </a:fillRef>
-      <a:effectRef idx="0">
-        <a:scrgbClr r="0" g="0" b="0"/>
-      </a:effectRef>
-      <a:fontRef idx="minor">
-        <a:schemeClr val="lt1"/>
-      </a:fontRef>
-    </dgm:style>
-  </dgm:styleLbl>
-  <dgm:styleLbl name="parChTrans2D4">
-    <dgm:scene3d>
-      <a:camera prst="orthographicFront"/>
-      <a:lightRig rig="threePt" dir="t"/>
-    </dgm:scene3d>
-    <dgm:sp3d/>
-    <dgm:txPr/>
-    <dgm:style>
-      <a:lnRef idx="2">
-        <a:scrgbClr r="0" g="0" b="0"/>
-      </a:lnRef>
-      <a:fillRef idx="1">
-        <a:scrgbClr r="0" g="0" b="0"/>
-      </a:fillRef>
-      <a:effectRef idx="0">
-        <a:scrgbClr r="0" g="0" b="0"/>
-      </a:effectRef>
-      <a:fontRef idx="minor">
-        <a:schemeClr val="lt1"/>
-      </a:fontRef>
-    </dgm:style>
-  </dgm:styleLbl>
-  <dgm:styleLbl name="parChTrans1D1">
-    <dgm:scene3d>
-      <a:camera prst="orthographicFront"/>
-      <a:lightRig rig="threePt" dir="t"/>
-    </dgm:scene3d>
-    <dgm:sp3d/>
-    <dgm:txPr/>
-    <dgm:style>
-      <a:lnRef idx="2">
-        <a:scrgbClr r="0" g="0" b="0"/>
-      </a:lnRef>
-      <a:fillRef idx="0">
-        <a:scrgbClr r="0" g="0" b="0"/>
-      </a:fillRef>
-      <a:effectRef idx="0">
-        <a:scrgbClr r="0" g="0" b="0"/>
-      </a:effectRef>
-      <a:fontRef idx="minor"/>
-    </dgm:style>
-  </dgm:styleLbl>
-  <dgm:styleLbl name="parChTrans1D2">
-    <dgm:scene3d>
-      <a:camera prst="orthographicFront"/>
-      <a:lightRig rig="threePt" dir="t"/>
-    </dgm:scene3d>
-    <dgm:sp3d/>
-    <dgm:txPr/>
-    <dgm:style>
-      <a:lnRef idx="2">
-        <a:scrgbClr r="0" g="0" b="0"/>
-      </a:lnRef>
-      <a:fillRef idx="0">
-        <a:scrgbClr r="0" g="0" b="0"/>
-      </a:fillRef>
-      <a:effectRef idx="0">
-        <a:scrgbClr r="0" g="0" b="0"/>
-      </a:effectRef>
-      <a:fontRef idx="minor"/>
-    </dgm:style>
-  </dgm:styleLbl>
-  <dgm:styleLbl name="parChTrans1D3">
-    <dgm:scene3d>
-      <a:camera prst="orthographicFront"/>
-      <a:lightRig rig="threePt" dir="t"/>
-    </dgm:scene3d>
-    <dgm:sp3d/>
-    <dgm:txPr/>
-    <dgm:style>
-      <a:lnRef idx="2">
-        <a:scrgbClr r="0" g="0" b="0"/>
-      </a:lnRef>
-      <a:fillRef idx="0">
-        <a:scrgbClr r="0" g="0" b="0"/>
-      </a:fillRef>
-      <a:effectRef idx="0">
-        <a:scrgbClr r="0" g="0" b="0"/>
-      </a:effectRef>
-      <a:fontRef idx="minor"/>
-    </dgm:style>
-  </dgm:styleLbl>
-  <dgm:styleLbl name="parChTrans1D4">
-    <dgm:scene3d>
-      <a:camera prst="orthographicFront"/>
-      <a:lightRig rig="threePt" dir="t"/>
-    </dgm:scene3d>
-    <dgm:sp3d/>
-    <dgm:txPr/>
-    <dgm:style>
-      <a:lnRef idx="2">
-        <a:scrgbClr r="0" g="0" b="0"/>
-      </a:lnRef>
-      <a:fillRef idx="0">
-        <a:scrgbClr r="0" g="0" b="0"/>
-      </a:fillRef>
-      <a:effectRef idx="0">
-        <a:scrgbClr r="0" g="0" b="0"/>
-      </a:effectRef>
-      <a:fontRef idx="minor"/>
-    </dgm:style>
-  </dgm:styleLbl>
-  <dgm:styleLbl name="fgAcc1">
-    <dgm:scene3d>
-      <a:camera prst="orthographicFront"/>
-      <a:lightRig rig="threePt" dir="t"/>
-    </dgm:scene3d>
-    <dgm:sp3d/>
-    <dgm:txPr/>
-    <dgm:style>
-      <a:lnRef idx="2">
-        <a:scrgbClr r="0" g="0" b="0"/>
-      </a:lnRef>
-      <a:fillRef idx="1">
-        <a:scrgbClr r="0" g="0" b="0"/>
-      </a:fillRef>
-      <a:effectRef idx="0">
-        <a:scrgbClr r="0" g="0" b="0"/>
-      </a:effectRef>
-      <a:fontRef idx="minor"/>
-    </dgm:style>
-  </dgm:styleLbl>
-  <dgm:styleLbl name="conFgAcc1">
-    <dgm:scene3d>
-      <a:camera prst="orthographicFront"/>
-      <a:lightRig rig="threePt" dir="t"/>
-    </dgm:scene3d>
-    <dgm:sp3d/>
-    <dgm:txPr/>
-    <dgm:style>
-      <a:lnRef idx="2">
-        <a:scrgbClr r="0" g="0" b="0"/>
-      </a:lnRef>
-      <a:fillRef idx="1">
-        <a:scrgbClr r="0" g="0" b="0"/>
-      </a:fillRef>
-      <a:effectRef idx="0">
-        <a:scrgbClr r="0" g="0" b="0"/>
-      </a:effectRef>
-      <a:fontRef idx="minor"/>
-    </dgm:style>
-  </dgm:styleLbl>
-  <dgm:styleLbl name="alignAcc1">
-    <dgm:scene3d>
-      <a:camera prst="orthographicFront"/>
-      <a:lightRig rig="threePt" dir="t"/>
-    </dgm:scene3d>
-    <dgm:sp3d/>
-    <dgm:txPr/>
-    <dgm:style>
-      <a:lnRef idx="2">
-        <a:scrgbClr r="0" g="0" b="0"/>
-      </a:lnRef>
-      <a:fillRef idx="1">
-        <a:scrgbClr r="0" g="0" b="0"/>
-      </a:fillRef>
-      <a:effectRef idx="0">
-        <a:scrgbClr r="0" g="0" b="0"/>
-      </a:effectRef>
-      <a:fontRef idx="minor"/>
-    </dgm:style>
-  </dgm:styleLbl>
-  <dgm:styleLbl name="trAlignAcc1">
-    <dgm:scene3d>
-      <a:camera prst="orthographicFront"/>
-      <a:lightRig rig="threePt" dir="t"/>
-    </dgm:scene3d>
-    <dgm:sp3d/>
-    <dgm:txPr/>
-    <dgm:style>
-      <a:lnRef idx="1">
-        <a:scrgbClr r="0" g="0" b="0"/>
-      </a:lnRef>
-      <a:fillRef idx="1">
-        <a:scrgbClr r="0" g="0" b="0"/>
-      </a:fillRef>
-      <a:effectRef idx="0">
-        <a:scrgbClr r="0" g="0" b="0"/>
-      </a:effectRef>
-      <a:fontRef idx="minor"/>
-    </dgm:style>
-  </dgm:styleLbl>
-  <dgm:styleLbl name="bgAcc1">
-    <dgm:scene3d>
-      <a:camera prst="orthographicFront"/>
-      <a:lightRig rig="threePt" dir="t"/>
-    </dgm:scene3d>
-    <dgm:sp3d/>
-    <dgm:txPr/>
-    <dgm:style>
-      <a:lnRef idx="2">
-        <a:scrgbClr r="0" g="0" b="0"/>
-      </a:lnRef>
-      <a:fillRef idx="1">
-        <a:scrgbClr r="0" g="0" b="0"/>
-      </a:fillRef>
-      <a:effectRef idx="0">
-        <a:scrgbClr r="0" g="0" b="0"/>
-      </a:effectRef>
-      <a:fontRef idx="minor"/>
-    </dgm:style>
-  </dgm:styleLbl>
-  <dgm:styleLbl name="solidFgAcc1">
-    <dgm:scene3d>
-      <a:camera prst="orthographicFront"/>
-      <a:lightRig rig="threePt" dir="t"/>
-    </dgm:scene3d>
-    <dgm:sp3d/>
-    <dgm:txPr/>
-    <dgm:style>
-      <a:lnRef idx="2">
-        <a:scrgbClr r="0" g="0" b="0"/>
-      </a:lnRef>
-      <a:fillRef idx="1">
-        <a:scrgbClr r="0" g="0" b="0"/>
-      </a:fillRef>
-      <a:effectRef idx="0">
-        <a:scrgbClr r="0" g="0" b="0"/>
-      </a:effectRef>
-      <a:fontRef idx="minor"/>
-    </dgm:style>
-  </dgm:styleLbl>
-  <dgm:styleLbl name="solidAlignAcc1">
-    <dgm:scene3d>
-      <a:camera prst="orthographicFront"/>
-      <a:lightRig rig="threePt" dir="t"/>
-    </dgm:scene3d>
-    <dgm:sp3d/>
-    <dgm:txPr/>
-    <dgm:style>
-      <a:lnRef idx="2">
-        <a:scrgbClr r="0" g="0" b="0"/>
-      </a:lnRef>
-      <a:fillRef idx="1">
-        <a:scrgbClr r="0" g="0" b="0"/>
-      </a:fillRef>
-      <a:effectRef idx="0">
-        <a:scrgbClr r="0" g="0" b="0"/>
-      </a:effectRef>
-      <a:fontRef idx="minor"/>
-    </dgm:style>
-  </dgm:styleLbl>
-  <dgm:styleLbl name="solidBgAcc1">
-    <dgm:scene3d>
-      <a:camera prst="orthographicFront"/>
-      <a:lightRig rig="threePt" dir="t"/>
-    </dgm:scene3d>
-    <dgm:sp3d/>
-    <dgm:txPr/>
-    <dgm:style>
-      <a:lnRef idx="2">
-        <a:scrgbClr r="0" g="0" b="0"/>
-      </a:lnRef>
-      <a:fillRef idx="1">
-        <a:scrgbClr r="0" g="0" b="0"/>
-      </a:fillRef>
-      <a:effectRef idx="0">
-        <a:scrgbClr r="0" g="0" b="0"/>
-      </a:effectRef>
-      <a:fontRef idx="minor"/>
-    </dgm:style>
-  </dgm:styleLbl>
-  <dgm:styleLbl name="fgAccFollowNode1">
-    <dgm:scene3d>
-      <a:camera prst="orthographicFront"/>
-      <a:lightRig rig="threePt" dir="t"/>
-    </dgm:scene3d>
-    <dgm:sp3d/>
-    <dgm:txPr/>
-    <dgm:style>
-      <a:lnRef idx="2">
-        <a:scrgbClr r="0" g="0" b="0"/>
-      </a:lnRef>
-      <a:fillRef idx="1">
-        <a:scrgbClr r="0" g="0" b="0"/>
-      </a:fillRef>
-      <a:effectRef idx="0">
-        <a:scrgbClr r="0" g="0" b="0"/>
-      </a:effectRef>
-      <a:fontRef idx="minor"/>
-    </dgm:style>
-  </dgm:styleLbl>
-  <dgm:styleLbl name="alignAccFollowNode1">
-    <dgm:scene3d>
-      <a:camera prst="orthographicFront"/>
-      <a:lightRig rig="threePt" dir="t"/>
-    </dgm:scene3d>
-    <dgm:sp3d/>
-    <dgm:txPr/>
-    <dgm:style>
-      <a:lnRef idx="2">
-        <a:scrgbClr r="0" g="0" b="0"/>
-      </a:lnRef>
-      <a:fillRef idx="1">
-        <a:scrgbClr r="0" g="0" b="0"/>
-      </a:fillRef>
-      <a:effectRef idx="0">
-        <a:scrgbClr r="0" g="0" b="0"/>
-      </a:effectRef>
-      <a:fontRef idx="minor"/>
-    </dgm:style>
-  </dgm:styleLbl>
-  <dgm:styleLbl name="bgAccFollowNode1">
-    <dgm:scene3d>
-      <a:camera prst="orthographicFront"/>
-      <a:lightRig rig="threePt" dir="t"/>
-    </dgm:scene3d>
-    <dgm:sp3d/>
-    <dgm:txPr/>
-    <dgm:style>
-      <a:lnRef idx="2">
-        <a:scrgbClr r="0" g="0" b="0"/>
-      </a:lnRef>
-      <a:fillRef idx="1">
-        <a:scrgbClr r="0" g="0" b="0"/>
-      </a:fillRef>
-      <a:effectRef idx="0">
-        <a:scrgbClr r="0" g="0" b="0"/>
-      </a:effectRef>
-      <a:fontRef idx="minor"/>
-    </dgm:style>
-  </dgm:styleLbl>
-  <dgm:styleLbl name="fgAcc0">
-    <dgm:scene3d>
-      <a:camera prst="orthographicFront"/>
-      <a:lightRig rig="threePt" dir="t"/>
-    </dgm:scene3d>
-    <dgm:sp3d/>
-    <dgm:txPr/>
-    <dgm:style>
-      <a:lnRef idx="2">
-        <a:scrgbClr r="0" g="0" b="0"/>
-      </a:lnRef>
-      <a:fillRef idx="1">
-        <a:scrgbClr r="0" g="0" b="0"/>
-      </a:fillRef>
-      <a:effectRef idx="0">
-        <a:scrgbClr r="0" g="0" b="0"/>
-      </a:effectRef>
-      <a:fontRef idx="minor"/>
-    </dgm:style>
-  </dgm:styleLbl>
-  <dgm:styleLbl name="fgAcc2">
-    <dgm:scene3d>
-      <a:camera prst="orthographicFront"/>
-      <a:lightRig rig="threePt" dir="t"/>
-    </dgm:scene3d>
-    <dgm:sp3d/>
-    <dgm:txPr/>
-    <dgm:style>
-      <a:lnRef idx="2">
-        <a:scrgbClr r="0" g="0" b="0"/>
-      </a:lnRef>
-      <a:fillRef idx="1">
-        <a:scrgbClr r="0" g="0" b="0"/>
-      </a:fillRef>
-      <a:effectRef idx="0">
-        <a:scrgbClr r="0" g="0" b="0"/>
-      </a:effectRef>
-      <a:fontRef idx="minor"/>
-    </dgm:style>
-  </dgm:styleLbl>
-  <dgm:styleLbl name="fgAcc3">
-    <dgm:scene3d>
-      <a:camera prst="orthographicFront"/>
-      <a:lightRig rig="threePt" dir="t"/>
-    </dgm:scene3d>
-    <dgm:sp3d/>
-    <dgm:txPr/>
-    <dgm:style>
-      <a:lnRef idx="2">
-        <a:scrgbClr r="0" g="0" b="0"/>
-      </a:lnRef>
-      <a:fillRef idx="1">
-        <a:scrgbClr r="0" g="0" b="0"/>
-      </a:fillRef>
-      <a:effectRef idx="0">
-        <a:scrgbClr r="0" g="0" b="0"/>
-      </a:effectRef>
-      <a:fontRef idx="minor"/>
-    </dgm:style>
-  </dgm:styleLbl>
-  <dgm:styleLbl name="fgAcc4">
-    <dgm:scene3d>
-      <a:camera prst="orthographicFront"/>
-      <a:lightRig rig="threePt" dir="t"/>
-    </dgm:scene3d>
-    <dgm:sp3d/>
-    <dgm:txPr/>
-    <dgm:style>
-      <a:lnRef idx="2">
-        <a:scrgbClr r="0" g="0" b="0"/>
-      </a:lnRef>
-      <a:fillRef idx="1">
-        <a:scrgbClr r="0" g="0" b="0"/>
-      </a:fillRef>
-      <a:effectRef idx="0">
-        <a:scrgbClr r="0" g="0" b="0"/>
-      </a:effectRef>
-      <a:fontRef idx="minor"/>
-    </dgm:style>
-  </dgm:styleLbl>
-  <dgm:styleLbl name="bgShp">
-    <dgm:scene3d>
-      <a:camera prst="orthographicFront"/>
-      <a:lightRig rig="threePt" dir="t"/>
-    </dgm:scene3d>
-    <dgm:sp3d/>
-    <dgm:txPr/>
-    <dgm:style>
-      <a:lnRef idx="0">
-        <a:scrgbClr r="0" g="0" b="0"/>
-      </a:lnRef>
-      <a:fillRef idx="1">
-        <a:scrgbClr r="0" g="0" b="0"/>
-      </a:fillRef>
-      <a:effectRef idx="0">
-        <a:scrgbClr r="0" g="0" b="0"/>
-      </a:effectRef>
-      <a:fontRef idx="minor"/>
-    </dgm:style>
-  </dgm:styleLbl>
-  <dgm:styleLbl name="dkBgShp">
-    <dgm:scene3d>
-      <a:camera prst="orthographicFront"/>
-      <a:lightRig rig="threePt" dir="t"/>
-    </dgm:scene3d>
-    <dgm:sp3d/>
-    <dgm:txPr/>
-    <dgm:style>
-      <a:lnRef idx="0">
-        <a:scrgbClr r="0" g="0" b="0"/>
-      </a:lnRef>
-      <a:fillRef idx="1">
-        <a:scrgbClr r="0" g="0" b="0"/>
-      </a:fillRef>
-      <a:effectRef idx="0">
-        <a:scrgbClr r="0" g="0" b="0"/>
-      </a:effectRef>
-      <a:fontRef idx="minor"/>
-    </dgm:style>
-  </dgm:styleLbl>
-  <dgm:styleLbl name="trBgShp">
-    <dgm:scene3d>
-      <a:camera prst="orthographicFront"/>
-      <a:lightRig rig="threePt" dir="t"/>
-    </dgm:scene3d>
-    <dgm:sp3d/>
-    <dgm:txPr/>
-    <dgm:style>
-      <a:lnRef idx="0">
-        <a:scrgbClr r="0" g="0" b="0"/>
-      </a:lnRef>
-      <a:fillRef idx="1">
-        <a:scrgbClr r="0" g="0" b="0"/>
-      </a:fillRef>
-      <a:effectRef idx="0">
-        <a:scrgbClr r="0" g="0" b="0"/>
-      </a:effectRef>
-      <a:fontRef idx="minor"/>
-    </dgm:style>
-  </dgm:styleLbl>
-  <dgm:styleLbl name="fgShp">
-    <dgm:scene3d>
-      <a:camera prst="orthographicFront"/>
-      <a:lightRig rig="threePt" dir="t"/>
-    </dgm:scene3d>
-    <dgm:sp3d/>
-    <dgm:txPr/>
-    <dgm:style>
-      <a:lnRef idx="2">
-        <a:scrgbClr r="0" g="0" b="0"/>
-      </a:lnRef>
-      <a:fillRef idx="1">
-        <a:scrgbClr r="0" g="0" b="0"/>
-      </a:fillRef>
-      <a:effectRef idx="0">
-        <a:scrgbClr r="0" g="0" b="0"/>
-      </a:effectRef>
-      <a:fontRef idx="minor"/>
-    </dgm:style>
-  </dgm:styleLbl>
-  <dgm:styleLbl name="revTx">
-    <dgm:scene3d>
-      <a:camera prst="orthographicFront"/>
-      <a:lightRig rig="threePt" dir="t"/>
-    </dgm:scene3d>
-    <dgm:sp3d/>
-    <dgm:txPr/>
-    <dgm:style>
-      <a:lnRef idx="0">
-        <a:scrgbClr r="0" g="0" b="0"/>
-      </a:lnRef>
-      <a:fillRef idx="0">
-        <a:scrgbClr r="0" g="0" b="0"/>
-      </a:fillRef>
-      <a:effectRef idx="0">
-        <a:scrgbClr r="0" g="0" b="0"/>
-      </a:effectRef>
-      <a:fontRef idx="minor"/>
-    </dgm:style>
-  </dgm:styleLbl>
-</dgm:styleDef>
-</file>
-
 <file path=ppt/slideLayouts/slideLayout1.xml><?xml version="1.0" encoding="utf-8"?>
 <p:sldLayout xmlns:a="http://schemas.openxmlformats.org/drawingml/2006/main" xmlns:r="http://schemas.openxmlformats.org/officeDocument/2006/relationships" xmlns:p="http://schemas.openxmlformats.org/presentationml/2006/main" type="title" preserve="1">
   <p:cSld name="Титульный слайд">
@@ -3442,7 +268,7 @@
           <a:p>
             <a:fld id="{9D89060A-4EA2-42E6-B79A-9F1E311C12CC}" type="datetimeFigureOut">
               <a:rPr lang="ru-RU" smtClean="0"/>
-              <a:t>04.04.2026</a:t>
+              <a:t>13.05.2026</a:t>
             </a:fld>
             <a:endParaRPr lang="ru-RU"/>
           </a:p>
@@ -3640,7 +466,7 @@
           <a:p>
             <a:fld id="{9D89060A-4EA2-42E6-B79A-9F1E311C12CC}" type="datetimeFigureOut">
               <a:rPr lang="ru-RU" smtClean="0"/>
-              <a:t>04.04.2026</a:t>
+              <a:t>13.05.2026</a:t>
             </a:fld>
             <a:endParaRPr lang="ru-RU"/>
           </a:p>
@@ -3848,7 +674,7 @@
           <a:p>
             <a:fld id="{9D89060A-4EA2-42E6-B79A-9F1E311C12CC}" type="datetimeFigureOut">
               <a:rPr lang="ru-RU" smtClean="0"/>
-              <a:t>04.04.2026</a:t>
+              <a:t>13.05.2026</a:t>
             </a:fld>
             <a:endParaRPr lang="ru-RU"/>
           </a:p>
@@ -4046,7 +872,7 @@
           <a:p>
             <a:fld id="{9D89060A-4EA2-42E6-B79A-9F1E311C12CC}" type="datetimeFigureOut">
               <a:rPr lang="ru-RU" smtClean="0"/>
-              <a:t>04.04.2026</a:t>
+              <a:t>13.05.2026</a:t>
             </a:fld>
             <a:endParaRPr lang="ru-RU"/>
           </a:p>
@@ -4321,7 +1147,7 @@
           <a:p>
             <a:fld id="{9D89060A-4EA2-42E6-B79A-9F1E311C12CC}" type="datetimeFigureOut">
               <a:rPr lang="ru-RU" smtClean="0"/>
-              <a:t>04.04.2026</a:t>
+              <a:t>13.05.2026</a:t>
             </a:fld>
             <a:endParaRPr lang="ru-RU"/>
           </a:p>
@@ -4586,7 +1412,7 @@
           <a:p>
             <a:fld id="{9D89060A-4EA2-42E6-B79A-9F1E311C12CC}" type="datetimeFigureOut">
               <a:rPr lang="ru-RU" smtClean="0"/>
-              <a:t>04.04.2026</a:t>
+              <a:t>13.05.2026</a:t>
             </a:fld>
             <a:endParaRPr lang="ru-RU"/>
           </a:p>
@@ -4998,7 +1824,7 @@
           <a:p>
             <a:fld id="{9D89060A-4EA2-42E6-B79A-9F1E311C12CC}" type="datetimeFigureOut">
               <a:rPr lang="ru-RU" smtClean="0"/>
-              <a:t>04.04.2026</a:t>
+              <a:t>13.05.2026</a:t>
             </a:fld>
             <a:endParaRPr lang="ru-RU"/>
           </a:p>
@@ -5139,7 +1965,7 @@
           <a:p>
             <a:fld id="{9D89060A-4EA2-42E6-B79A-9F1E311C12CC}" type="datetimeFigureOut">
               <a:rPr lang="ru-RU" smtClean="0"/>
-              <a:t>04.04.2026</a:t>
+              <a:t>13.05.2026</a:t>
             </a:fld>
             <a:endParaRPr lang="ru-RU"/>
           </a:p>
@@ -5252,7 +2078,7 @@
           <a:p>
             <a:fld id="{9D89060A-4EA2-42E6-B79A-9F1E311C12CC}" type="datetimeFigureOut">
               <a:rPr lang="ru-RU" smtClean="0"/>
-              <a:t>04.04.2026</a:t>
+              <a:t>13.05.2026</a:t>
             </a:fld>
             <a:endParaRPr lang="ru-RU"/>
           </a:p>
@@ -5563,7 +2389,7 @@
           <a:p>
             <a:fld id="{9D89060A-4EA2-42E6-B79A-9F1E311C12CC}" type="datetimeFigureOut">
               <a:rPr lang="ru-RU" smtClean="0"/>
-              <a:t>04.04.2026</a:t>
+              <a:t>13.05.2026</a:t>
             </a:fld>
             <a:endParaRPr lang="ru-RU"/>
           </a:p>
@@ -5851,7 +2677,7 @@
           <a:p>
             <a:fld id="{9D89060A-4EA2-42E6-B79A-9F1E311C12CC}" type="datetimeFigureOut">
               <a:rPr lang="ru-RU" smtClean="0"/>
-              <a:t>04.04.2026</a:t>
+              <a:t>13.05.2026</a:t>
             </a:fld>
             <a:endParaRPr lang="ru-RU"/>
           </a:p>
@@ -6092,7 +2918,7 @@
           <a:p>
             <a:fld id="{9D89060A-4EA2-42E6-B79A-9F1E311C12CC}" type="datetimeFigureOut">
               <a:rPr lang="ru-RU" smtClean="0"/>
-              <a:t>04.04.2026</a:t>
+              <a:t>13.05.2026</a:t>
             </a:fld>
             <a:endParaRPr lang="ru-RU"/>
           </a:p>
@@ -6527,7 +3353,7 @@
         </p:nvSpPr>
         <p:spPr>
           <a:xfrm>
-            <a:off x="1524000" y="2481077"/>
+            <a:off x="1524000" y="1635660"/>
             <a:ext cx="9144000" cy="937585"/>
           </a:xfrm>
         </p:spPr>
@@ -6562,7 +3388,7 @@
         </p:nvSpPr>
         <p:spPr>
           <a:xfrm>
-            <a:off x="710084" y="3602038"/>
+            <a:off x="1976909" y="4964928"/>
             <a:ext cx="5385916" cy="3255962"/>
           </a:xfrm>
         </p:spPr>
@@ -6574,309 +3400,42 @@
           <a:p>
             <a:pPr algn="l"/>
             <a:endParaRPr lang="en-US" sz="2000" dirty="0"/>
-            <a:r>
-              <a:rPr lang="ru-RU" sz="2000" dirty="0"/>
-              <a:t>Проект выполнил:</a:t>
-            </a:r>
           </a:p>
           <a:p>
             <a:pPr algn="l"/>
             <a:endParaRPr lang="en-US" sz="2000" dirty="0"/>
-            <a:r>
-              <a:rPr lang="ru-RU" sz="2000" dirty="0"/>
-              <a:t>Дейленко Андрей</a:t>
-            </a:r>
           </a:p>
           <a:p>
             <a:pPr algn="l"/>
             <a:endParaRPr lang="en-US" sz="2000" dirty="0"/>
-            <a:r>
-              <a:rPr lang="ru-RU" sz="2000" dirty="0"/>
-              <a:t/>
-            </a:r>
           </a:p>
           <a:p>
             <a:pPr algn="l"/>
             <a:endParaRPr lang="en-US" sz="2000" dirty="0"/>
-            <a:r>
-              <a:rPr lang="ru-RU" sz="2000" dirty="0"/>
-              <a:t>Яндекс Лицей</a:t>
-            </a:r>
           </a:p>
           <a:p>
             <a:pPr algn="l"/>
             <a:endParaRPr lang="en-US" sz="2000" dirty="0"/>
-            <a:r>
-              <a:rPr lang="ru-RU" sz="2000" dirty="0"/>
-              <a:t>Группа №_  ·  Год 2</a:t>
-            </a:r>
-          </a:p>
-        </p:txBody>
-      </p:sp>
-      <p:pic>
-        <p:nvPicPr>
-          <p:cNvPr id="4" name="Рисунок 3">
-            <a:extLst>
-              <a:ext uri="{FF2B5EF4-FFF2-40B4-BE49-F238E27FC236}">
-                <a16:creationId xmlns:a16="http://schemas.microsoft.com/office/drawing/2014/main" id="{B71562E5-83F9-DC2F-036F-A75EB3628889}"/>
-              </a:ext>
-            </a:extLst>
-          </p:cNvPr>
-          <p:cNvPicPr>
-            <a:picLocks noChangeAspect="1"/>
-          </p:cNvPicPr>
+          </a:p>
+        </p:txBody>
+      </p:sp>
+      <p:sp>
+        <p:nvSpPr>
+          <p:cNvPr id="6" name="Подзаголовок 2">
+            <a:extLst>
+              <a:ext uri="{FF2B5EF4-FFF2-40B4-BE49-F238E27FC236}">
+                <a16:creationId xmlns:a16="http://schemas.microsoft.com/office/drawing/2014/main" id="{6D510570-CFE7-2380-2E62-C3F5FFB94E5B}"/>
+              </a:ext>
+            </a:extLst>
+          </p:cNvPr>
+          <p:cNvSpPr txBox="1">
+            <a:spLocks/>
+          </p:cNvSpPr>
           <p:nvPr/>
-        </p:nvPicPr>
-        <p:blipFill>
-          <a:blip r:embed="rId2">
-            <a:extLst>
-              <a:ext uri="{96DAC541-7B7A-43D3-8B79-37D633B846F1}">
-                <asvg:svgBlip xmlns:asvg="http://schemas.microsoft.com/office/drawing/2016/SVG/main" r:embed="rId3"/>
-              </a:ext>
-            </a:extLst>
-          </a:blip>
-          <a:stretch>
-            <a:fillRect/>
-          </a:stretch>
-        </p:blipFill>
+        </p:nvSpPr>
         <p:spPr>
           <a:xfrm>
-            <a:off x="10586661" y="0"/>
-            <a:ext cx="1605339" cy="1134677"/>
-          </a:xfrm>
-          <a:prstGeom prst="rect">
-            <a:avLst/>
-          </a:prstGeom>
-        </p:spPr>
-      </p:pic>
-      <p:sp>
-        <p:nvSpPr>
-          <p:cNvPr id="5" name="Подзаголовок 2">
-            <a:extLst>
-              <a:ext uri="{FF2B5EF4-FFF2-40B4-BE49-F238E27FC236}">
-                <a16:creationId xmlns:a16="http://schemas.microsoft.com/office/drawing/2014/main" id="{DECD6D2A-97E6-3744-CA49-FE20F0E38411}"/>
-              </a:ext>
-            </a:extLst>
-          </p:cNvPr>
-          <p:cNvSpPr txBox="1">
-            <a:spLocks/>
-          </p:cNvSpPr>
-          <p:nvPr/>
-        </p:nvSpPr>
-        <p:spPr>
-          <a:xfrm>
-            <a:off x="1562518" y="173038"/>
-            <a:ext cx="9066963" cy="1134677"/>
-          </a:xfrm>
-          <a:prstGeom prst="rect">
-            <a:avLst/>
-          </a:prstGeom>
-        </p:spPr>
-        <p:txBody>
-          <a:bodyPr vert="horz" lIns="91440" tIns="45720" rIns="91440" bIns="45720" rtlCol="0">
-            <a:normAutofit lnSpcReduction="10000"/>
-          </a:bodyPr>
-          <a:lstStyle>
-            <a:lvl1pPr marL="0" indent="0" algn="ctr" defTabSz="914400" rtl="0" eaLnBrk="1" latinLnBrk="0" hangingPunct="1">
-              <a:lnSpc>
-                <a:spcPct val="90000"/>
-              </a:lnSpc>
-              <a:spcBef>
-                <a:spcPts val="1000"/>
-              </a:spcBef>
-              <a:buFont typeface="Arial" panose="020B0604020202020204" pitchFamily="34" charset="0"/>
-              <a:buNone/>
-              <a:defRPr sz="2400" kern="1200">
-                <a:solidFill>
-                  <a:schemeClr val="tx1"/>
-                </a:solidFill>
-                <a:latin typeface="+mn-lt"/>
-                <a:ea typeface="+mn-ea"/>
-                <a:cs typeface="+mn-cs"/>
-              </a:defRPr>
-            </a:lvl1pPr>
-            <a:lvl2pPr marL="457200" indent="0" algn="ctr" defTabSz="914400" rtl="0" eaLnBrk="1" latinLnBrk="0" hangingPunct="1">
-              <a:lnSpc>
-                <a:spcPct val="90000"/>
-              </a:lnSpc>
-              <a:spcBef>
-                <a:spcPts val="500"/>
-              </a:spcBef>
-              <a:buFont typeface="Arial" panose="020B0604020202020204" pitchFamily="34" charset="0"/>
-              <a:buNone/>
-              <a:defRPr sz="2000" kern="1200">
-                <a:solidFill>
-                  <a:schemeClr val="tx1"/>
-                </a:solidFill>
-                <a:latin typeface="+mn-lt"/>
-                <a:ea typeface="+mn-ea"/>
-                <a:cs typeface="+mn-cs"/>
-              </a:defRPr>
-            </a:lvl2pPr>
-            <a:lvl3pPr marL="914400" indent="0" algn="ctr" defTabSz="914400" rtl="0" eaLnBrk="1" latinLnBrk="0" hangingPunct="1">
-              <a:lnSpc>
-                <a:spcPct val="90000"/>
-              </a:lnSpc>
-              <a:spcBef>
-                <a:spcPts val="500"/>
-              </a:spcBef>
-              <a:buFont typeface="Arial" panose="020B0604020202020204" pitchFamily="34" charset="0"/>
-              <a:buNone/>
-              <a:defRPr sz="1800" kern="1200">
-                <a:solidFill>
-                  <a:schemeClr val="tx1"/>
-                </a:solidFill>
-                <a:latin typeface="+mn-lt"/>
-                <a:ea typeface="+mn-ea"/>
-                <a:cs typeface="+mn-cs"/>
-              </a:defRPr>
-            </a:lvl3pPr>
-            <a:lvl4pPr marL="1371600" indent="0" algn="ctr" defTabSz="914400" rtl="0" eaLnBrk="1" latinLnBrk="0" hangingPunct="1">
-              <a:lnSpc>
-                <a:spcPct val="90000"/>
-              </a:lnSpc>
-              <a:spcBef>
-                <a:spcPts val="500"/>
-              </a:spcBef>
-              <a:buFont typeface="Arial" panose="020B0604020202020204" pitchFamily="34" charset="0"/>
-              <a:buNone/>
-              <a:defRPr sz="1600" kern="1200">
-                <a:solidFill>
-                  <a:schemeClr val="tx1"/>
-                </a:solidFill>
-                <a:latin typeface="+mn-lt"/>
-                <a:ea typeface="+mn-ea"/>
-                <a:cs typeface="+mn-cs"/>
-              </a:defRPr>
-            </a:lvl4pPr>
-            <a:lvl5pPr marL="1828800" indent="0" algn="ctr" defTabSz="914400" rtl="0" eaLnBrk="1" latinLnBrk="0" hangingPunct="1">
-              <a:lnSpc>
-                <a:spcPct val="90000"/>
-              </a:lnSpc>
-              <a:spcBef>
-                <a:spcPts val="500"/>
-              </a:spcBef>
-              <a:buFont typeface="Arial" panose="020B0604020202020204" pitchFamily="34" charset="0"/>
-              <a:buNone/>
-              <a:defRPr sz="1600" kern="1200">
-                <a:solidFill>
-                  <a:schemeClr val="tx1"/>
-                </a:solidFill>
-                <a:latin typeface="+mn-lt"/>
-                <a:ea typeface="+mn-ea"/>
-                <a:cs typeface="+mn-cs"/>
-              </a:defRPr>
-            </a:lvl5pPr>
-            <a:lvl6pPr marL="2286000" indent="0" algn="ctr" defTabSz="914400" rtl="0" eaLnBrk="1" latinLnBrk="0" hangingPunct="1">
-              <a:lnSpc>
-                <a:spcPct val="90000"/>
-              </a:lnSpc>
-              <a:spcBef>
-                <a:spcPts val="500"/>
-              </a:spcBef>
-              <a:buFont typeface="Arial" panose="020B0604020202020204" pitchFamily="34" charset="0"/>
-              <a:buNone/>
-              <a:defRPr sz="1600" kern="1200">
-                <a:solidFill>
-                  <a:schemeClr val="tx1"/>
-                </a:solidFill>
-                <a:latin typeface="+mn-lt"/>
-                <a:ea typeface="+mn-ea"/>
-                <a:cs typeface="+mn-cs"/>
-              </a:defRPr>
-            </a:lvl6pPr>
-            <a:lvl7pPr marL="2743200" indent="0" algn="ctr" defTabSz="914400" rtl="0" eaLnBrk="1" latinLnBrk="0" hangingPunct="1">
-              <a:lnSpc>
-                <a:spcPct val="90000"/>
-              </a:lnSpc>
-              <a:spcBef>
-                <a:spcPts val="500"/>
-              </a:spcBef>
-              <a:buFont typeface="Arial" panose="020B0604020202020204" pitchFamily="34" charset="0"/>
-              <a:buNone/>
-              <a:defRPr sz="1600" kern="1200">
-                <a:solidFill>
-                  <a:schemeClr val="tx1"/>
-                </a:solidFill>
-                <a:latin typeface="+mn-lt"/>
-                <a:ea typeface="+mn-ea"/>
-                <a:cs typeface="+mn-cs"/>
-              </a:defRPr>
-            </a:lvl7pPr>
-            <a:lvl8pPr marL="3200400" indent="0" algn="ctr" defTabSz="914400" rtl="0" eaLnBrk="1" latinLnBrk="0" hangingPunct="1">
-              <a:lnSpc>
-                <a:spcPct val="90000"/>
-              </a:lnSpc>
-              <a:spcBef>
-                <a:spcPts val="500"/>
-              </a:spcBef>
-              <a:buFont typeface="Arial" panose="020B0604020202020204" pitchFamily="34" charset="0"/>
-              <a:buNone/>
-              <a:defRPr sz="1600" kern="1200">
-                <a:solidFill>
-                  <a:schemeClr val="tx1"/>
-                </a:solidFill>
-                <a:latin typeface="+mn-lt"/>
-                <a:ea typeface="+mn-ea"/>
-                <a:cs typeface="+mn-cs"/>
-              </a:defRPr>
-            </a:lvl8pPr>
-            <a:lvl9pPr marL="3657600" indent="0" algn="ctr" defTabSz="914400" rtl="0" eaLnBrk="1" latinLnBrk="0" hangingPunct="1">
-              <a:lnSpc>
-                <a:spcPct val="90000"/>
-              </a:lnSpc>
-              <a:spcBef>
-                <a:spcPts val="500"/>
-              </a:spcBef>
-              <a:buFont typeface="Arial" panose="020B0604020202020204" pitchFamily="34" charset="0"/>
-              <a:buNone/>
-              <a:defRPr sz="1600" kern="1200">
-                <a:solidFill>
-                  <a:schemeClr val="tx1"/>
-                </a:solidFill>
-                <a:latin typeface="+mn-lt"/>
-                <a:ea typeface="+mn-ea"/>
-                <a:cs typeface="+mn-cs"/>
-              </a:defRPr>
-            </a:lvl9pPr>
-          </a:lstStyle>
-          <a:p>
-            <a:r>
-              <a:rPr lang="ru-RU" sz="2000" dirty="0"/>
-              <a:t>Федеральное государственное бюджетное образовательное учреждение</a:t>
-            </a:r>
-          </a:p>
-          <a:p>
-            <a:r>
-              <a:rPr lang="ru-RU" sz="2000" dirty="0"/>
-              <a:t>высшего образования «МИРЭА – Российский технологический университет»</a:t>
-            </a:r>
-          </a:p>
-          <a:p>
-            <a:r>
-              <a:rPr lang="ru-RU" sz="2000" dirty="0"/>
-              <a:t>Детский технопарк «Альтаир»</a:t>
-            </a:r>
-          </a:p>
-        </p:txBody>
-      </p:sp>
-      <p:sp>
-        <p:nvSpPr>
-          <p:cNvPr id="6" name="Подзаголовок 2">
-            <a:extLst>
-              <a:ext uri="{FF2B5EF4-FFF2-40B4-BE49-F238E27FC236}">
-                <a16:creationId xmlns:a16="http://schemas.microsoft.com/office/drawing/2014/main" id="{6D510570-CFE7-2380-2E62-C3F5FFB94E5B}"/>
-              </a:ext>
-            </a:extLst>
-          </p:cNvPr>
-          <p:cNvSpPr txBox="1">
-            <a:spLocks/>
-          </p:cNvSpPr>
-          <p:nvPr/>
-        </p:nvSpPr>
-        <p:spPr>
-          <a:xfrm>
-            <a:off x="6096000" y="3429000"/>
+            <a:off x="6353175" y="4191000"/>
             <a:ext cx="5385916" cy="3255962"/>
           </a:xfrm>
           <a:prstGeom prst="rect">
@@ -7180,42 +3739,66 @@
           </a:p>
         </p:txBody>
       </p:sp>
-      <p:pic>
-        <p:nvPicPr>
-          <p:cNvPr id="10" name="Рисунок 9" descr="Изображение выглядит как эмблема, герб, символ, корона&#10;&#10;Контент, сгенерированный ИИ, может содержать ошибки.">
-            <a:extLst>
-              <a:ext uri="{FF2B5EF4-FFF2-40B4-BE49-F238E27FC236}">
-                <a16:creationId xmlns:a16="http://schemas.microsoft.com/office/drawing/2014/main" id="{8F2F5513-10EB-3349-07AB-23B3F4E16E0C}"/>
-              </a:ext>
-            </a:extLst>
-          </p:cNvPr>
-          <p:cNvPicPr>
-            <a:picLocks noChangeAspect="1"/>
-          </p:cNvPicPr>
+      <p:sp>
+        <p:nvSpPr>
+          <p:cNvPr id="9" name="TextBox 8">
+            <a:extLst>
+              <a:ext uri="{FF2B5EF4-FFF2-40B4-BE49-F238E27FC236}">
+                <a16:creationId xmlns:a16="http://schemas.microsoft.com/office/drawing/2014/main" id="{C3E378FD-5F57-D219-7EFB-3202636358CC}"/>
+              </a:ext>
+            </a:extLst>
+          </p:cNvPr>
+          <p:cNvSpPr txBox="1"/>
           <p:nvPr/>
-        </p:nvPicPr>
-        <p:blipFill>
-          <a:blip r:embed="rId4">
-            <a:extLst>
-              <a:ext uri="{28A0092B-C50C-407E-A947-70E740481C1C}">
-                <a14:useLocalDpi xmlns:a14="http://schemas.microsoft.com/office/drawing/2010/main" val="0"/>
-              </a:ext>
-            </a:extLst>
-          </a:blip>
-          <a:stretch>
-            <a:fillRect/>
-          </a:stretch>
-        </p:blipFill>
+        </p:nvSpPr>
         <p:spPr>
           <a:xfrm>
-            <a:off x="145701" y="127273"/>
-            <a:ext cx="1026389" cy="1134677"/>
+            <a:off x="257175" y="3905250"/>
+            <a:ext cx="5128741" cy="1754326"/>
           </a:xfrm>
           <a:prstGeom prst="rect">
             <a:avLst/>
           </a:prstGeom>
+          <a:noFill/>
         </p:spPr>
-      </p:pic>
+        <p:txBody>
+          <a:bodyPr wrap="square" rtlCol="0">
+            <a:spAutoFit/>
+          </a:bodyPr>
+          <a:lstStyle/>
+          <a:p>
+            <a:r>
+              <a:rPr lang="ru-RU" dirty="0"/>
+              <a:t>Деуленко Андрей Анатольевич </a:t>
+            </a:r>
+          </a:p>
+          <a:p>
+            <a:r>
+              <a:rPr lang="ru-RU" dirty="0"/>
+              <a:t>Морозенко Максим Андреевич</a:t>
+            </a:r>
+          </a:p>
+          <a:p>
+            <a:r>
+              <a:rPr lang="ru-RU" dirty="0"/>
+              <a:t>9 класс</a:t>
+            </a:r>
+          </a:p>
+          <a:p>
+            <a:endParaRPr lang="ru-RU" dirty="0"/>
+          </a:p>
+          <a:p>
+            <a:endParaRPr lang="ru-RU" dirty="0"/>
+          </a:p>
+          <a:p>
+            <a:r>
+              <a:rPr lang="ru-RU" dirty="0"/>
+              <a:t>2 год 2 группа</a:t>
+            </a:r>
+            <a:endParaRPr lang="en-US" dirty="0"/>
+          </a:p>
+        </p:txBody>
+      </p:sp>
     </p:spTree>
     <p:extLst>
       <p:ext uri="{BB962C8B-B14F-4D97-AF65-F5344CB8AC3E}">
@@ -7251,406 +3834,6 @@
           <p:cNvPr id="2" name="Заголовок 1">
             <a:extLst>
               <a:ext uri="{FF2B5EF4-FFF2-40B4-BE49-F238E27FC236}">
-                <a16:creationId xmlns:a16="http://schemas.microsoft.com/office/drawing/2014/main" id="{D3104DED-D14F-253E-A336-716915EA4B1F}"/>
-              </a:ext>
-            </a:extLst>
-          </p:cNvPr>
-          <p:cNvSpPr>
-            <a:spLocks noGrp="1"/>
-          </p:cNvSpPr>
-          <p:nvPr>
-            <p:ph type="title"/>
-          </p:nvPr>
-        </p:nvSpPr>
-        <p:spPr/>
-        <p:txBody>
-          <a:bodyPr/>
-          <a:lstStyle/>
-          <a:p>
-            <a:r>
-              <a:rPr lang="ru-RU" dirty="0"/>
-              <a:t>Список использованных источников</a:t>
-            </a:r>
-          </a:p>
-        </p:txBody>
-      </p:sp>
-      <p:sp>
-        <p:nvSpPr>
-          <p:cNvPr id="3" name="Объект 2">
-            <a:extLst>
-              <a:ext uri="{FF2B5EF4-FFF2-40B4-BE49-F238E27FC236}">
-                <a16:creationId xmlns:a16="http://schemas.microsoft.com/office/drawing/2014/main" id="{D0810240-7F2C-895C-477C-F7EF1886331A}"/>
-              </a:ext>
-            </a:extLst>
-          </p:cNvPr>
-          <p:cNvSpPr>
-            <a:spLocks noGrp="1"/>
-          </p:cNvSpPr>
-          <p:nvPr>
-            <p:ph idx="1"/>
-          </p:nvPr>
-        </p:nvSpPr>
-        <p:spPr>
-          <a:xfrm>
-            <a:off x="838200" y="1835673"/>
-            <a:ext cx="10515600" cy="4351338"/>
-          </a:xfrm>
-        </p:spPr>
-        <p:txBody>
-          <a:bodyPr>
-            <a:normAutofit/>
-          </a:bodyPr>
-          <a:lstStyle/>
-          <a:p>
-            <a:pPr marL="0" indent="0" algn="just">
-              <a:lnSpc>
-                <a:spcPct val="150000"/>
-              </a:lnSpc>
-              <a:buNone/>
-            </a:pPr>
-            <a:r>
-              <a:rPr lang="ru-RU" sz="2000" i="1" dirty="0"/>
-              <a:t>1.  Flask Documentation — flask.palletsprojects.com</a:t>
-            </a:r>
-          </a:p>
-          <a:p>
-            <a:pPr marL="0" indent="0" algn="just">
-              <a:lnSpc>
-                <a:spcPct val="150000"/>
-              </a:lnSpc>
-              <a:buNone/>
-            </a:pPr>
-            <a:r>
-              <a:rPr lang="ru-RU" sz="2000" i="1" dirty="0"/>
-              <a:t>2.  Flask-SocketIO — flask-socketio.readthedocs.io</a:t>
-            </a:r>
-          </a:p>
-          <a:p>
-            <a:pPr marL="0" indent="0" algn="just">
-              <a:lnSpc>
-                <a:spcPct val="150000"/>
-              </a:lnSpc>
-              <a:buNone/>
-            </a:pPr>
-            <a:r>
-              <a:rPr lang="ru-RU" sz="2000" i="1" dirty="0"/>
-              <a:t>3.  SQLAlchemy ORM — docs.sqlalchemy.org</a:t>
-            </a:r>
-          </a:p>
-          <a:p>
-            <a:pPr marL="0" indent="0" algn="just">
-              <a:lnSpc>
-                <a:spcPct val="150000"/>
-              </a:lnSpc>
-              <a:buNone/>
-            </a:pPr>
-            <a:r>
-              <a:rPr lang="ru-RU" sz="2000" i="1" dirty="0"/>
-              <a:t>4.  OWASP Top 10 (2021) — owasp.org/Top10</a:t>
-            </a:r>
-          </a:p>
-          <a:p>
-            <a:pPr marL="0" indent="0" algn="just">
-              <a:lnSpc>
-                <a:spcPct val="150000"/>
-              </a:lnSpc>
-              <a:buNone/>
-            </a:pPr>
-            <a:r>
-              <a:rPr lang="ru-RU" sz="2000" i="1" dirty="0"/>
-              <a:t>5.  Flask-WTF / CSRF — flask-wtf.readthedocs.io</a:t>
-            </a:r>
-          </a:p>
-          <a:p>
-            <a:pPr marL="0" indent="0" algn="just">
-              <a:lnSpc>
-                <a:spcPct val="150000"/>
-              </a:lnSpc>
-              <a:buNone/>
-            </a:pPr>
-            <a:r>
-              <a:rPr lang="ru-RU" sz="2000" i="1" dirty="0"/>
-              <a:t>6.  Werkzeug Security — werkzeug.palletsprojects.com</a:t>
-            </a:r>
-          </a:p>
-          <a:p>
-            <a:pPr marL="0" indent="0" algn="just">
-              <a:lnSpc>
-                <a:spcPct val="150000"/>
-              </a:lnSpc>
-              <a:buNone/>
-            </a:pPr>
-            <a:r>
-              <a:rPr lang="ru-RU" sz="2000" i="1" dirty="0"/>
-              <a:t>7.  MDN: Content-Security-Policy — developer.mozilla.org</a:t>
-            </a:r>
-          </a:p>
-          <a:p>
-            <a:pPr marL="0" indent="0" algn="just">
-              <a:lnSpc>
-                <a:spcPct val="150000"/>
-              </a:lnSpc>
-              <a:buNone/>
-            </a:pPr>
-            <a:r>
-              <a:rPr lang="ru-RU" sz="2000" i="1" dirty="0"/>
-              <a:t>8.  Python Secrets — docs.python.org/3/library/secrets.html</a:t>
-            </a:r>
-          </a:p>
-        </p:txBody>
-      </p:sp>
-      <p:sp>
-        <p:nvSpPr>
-          <p:cNvPr id="4" name="Google Shape;91;p32">
-            <a:extLst>
-              <a:ext uri="{FF2B5EF4-FFF2-40B4-BE49-F238E27FC236}">
-                <a16:creationId xmlns:a16="http://schemas.microsoft.com/office/drawing/2014/main" id="{75188BF8-F1E2-885B-4D51-3AE651D59456}"/>
-              </a:ext>
-            </a:extLst>
-          </p:cNvPr>
-          <p:cNvSpPr/>
-          <p:nvPr/>
-        </p:nvSpPr>
-        <p:spPr>
-          <a:xfrm>
-            <a:off x="10559347" y="0"/>
-            <a:ext cx="1048512" cy="354806"/>
-          </a:xfrm>
-          <a:prstGeom prst="rect">
-            <a:avLst/>
-          </a:prstGeom>
-          <a:ln>
-            <a:headEnd type="none" w="sm" len="sm"/>
-            <a:tailEnd type="none" w="sm" len="sm"/>
-          </a:ln>
-        </p:spPr>
-        <p:style>
-          <a:lnRef idx="1">
-            <a:schemeClr val="accent4"/>
-          </a:lnRef>
-          <a:fillRef idx="3">
-            <a:schemeClr val="accent4"/>
-          </a:fillRef>
-          <a:effectRef idx="2">
-            <a:schemeClr val="accent4"/>
-          </a:effectRef>
-          <a:fontRef idx="minor">
-            <a:schemeClr val="lt1"/>
-          </a:fontRef>
-        </p:style>
-        <p:txBody>
-          <a:bodyPr spcFirstLastPara="1" wrap="square" lIns="91425" tIns="45700" rIns="91425" bIns="45700" anchor="ctr" anchorCtr="0">
-            <a:noAutofit/>
-          </a:bodyPr>
-          <a:lstStyle/>
-          <a:p>
-            <a:pPr marL="0" marR="0" lvl="0" indent="0" algn="ctr" rtl="0">
-              <a:lnSpc>
-                <a:spcPct val="100000"/>
-              </a:lnSpc>
-              <a:spcBef>
-                <a:spcPts val="0"/>
-              </a:spcBef>
-              <a:spcAft>
-                <a:spcPts val="0"/>
-              </a:spcAft>
-              <a:buClr>
-                <a:srgbClr val="000000"/>
-              </a:buClr>
-              <a:buSzPts val="1800"/>
-              <a:buFont typeface="Arial"/>
-              <a:buNone/>
-            </a:pPr>
-            <a:endParaRPr sz="1800" b="0" i="0" u="none" strike="noStrike" cap="none" dirty="0">
-              <a:solidFill>
-                <a:schemeClr val="lt1"/>
-              </a:solidFill>
-              <a:latin typeface="Calibri"/>
-              <a:ea typeface="Calibri"/>
-              <a:cs typeface="Calibri"/>
-              <a:sym typeface="Calibri"/>
-            </a:endParaRPr>
-          </a:p>
-        </p:txBody>
-      </p:sp>
-      <p:sp>
-        <p:nvSpPr>
-          <p:cNvPr id="5" name="Google Shape;92;p32">
-            <a:extLst>
-              <a:ext uri="{FF2B5EF4-FFF2-40B4-BE49-F238E27FC236}">
-                <a16:creationId xmlns:a16="http://schemas.microsoft.com/office/drawing/2014/main" id="{07EAC0BF-AE43-35B6-46DA-A97923295634}"/>
-              </a:ext>
-            </a:extLst>
-          </p:cNvPr>
-          <p:cNvSpPr txBox="1">
-            <a:spLocks/>
-          </p:cNvSpPr>
-          <p:nvPr/>
-        </p:nvSpPr>
-        <p:spPr>
-          <a:xfrm>
-            <a:off x="10559347" y="29972"/>
-            <a:ext cx="1048511" cy="274828"/>
-          </a:xfrm>
-          <a:prstGeom prst="rect">
-            <a:avLst/>
-          </a:prstGeom>
-          <a:noFill/>
-          <a:ln>
-            <a:noFill/>
-          </a:ln>
-        </p:spPr>
-        <p:txBody>
-          <a:bodyPr spcFirstLastPara="1" vert="horz" wrap="square" lIns="91425" tIns="45700" rIns="91425" bIns="45700" rtlCol="0" anchor="ctr" anchorCtr="0">
-            <a:noAutofit/>
-          </a:bodyPr>
-          <a:lstStyle>
-            <a:defPPr>
-              <a:defRPr lang="ru-RU"/>
-            </a:defPPr>
-            <a:lvl1pPr marL="0" algn="r" defTabSz="913284" rtl="0" eaLnBrk="1" latinLnBrk="0" hangingPunct="1">
-              <a:defRPr sz="2400" kern="1200">
-                <a:solidFill>
-                  <a:schemeClr val="tx1">
-                    <a:tint val="75000"/>
-                  </a:schemeClr>
-                </a:solidFill>
-                <a:latin typeface="+mn-lt"/>
-                <a:ea typeface="+mn-ea"/>
-                <a:cs typeface="+mn-cs"/>
-              </a:defRPr>
-            </a:lvl1pPr>
-            <a:lvl2pPr marL="456641" algn="l" defTabSz="913284" rtl="0" eaLnBrk="1" latinLnBrk="0" hangingPunct="1">
-              <a:defRPr sz="1800" kern="1200">
-                <a:solidFill>
-                  <a:schemeClr val="tx1"/>
-                </a:solidFill>
-                <a:latin typeface="+mn-lt"/>
-                <a:ea typeface="+mn-ea"/>
-                <a:cs typeface="+mn-cs"/>
-              </a:defRPr>
-            </a:lvl2pPr>
-            <a:lvl3pPr marL="913284" algn="l" defTabSz="913284" rtl="0" eaLnBrk="1" latinLnBrk="0" hangingPunct="1">
-              <a:defRPr sz="1800" kern="1200">
-                <a:solidFill>
-                  <a:schemeClr val="tx1"/>
-                </a:solidFill>
-                <a:latin typeface="+mn-lt"/>
-                <a:ea typeface="+mn-ea"/>
-                <a:cs typeface="+mn-cs"/>
-              </a:defRPr>
-            </a:lvl3pPr>
-            <a:lvl4pPr marL="1369927" algn="l" defTabSz="913284" rtl="0" eaLnBrk="1" latinLnBrk="0" hangingPunct="1">
-              <a:defRPr sz="1800" kern="1200">
-                <a:solidFill>
-                  <a:schemeClr val="tx1"/>
-                </a:solidFill>
-                <a:latin typeface="+mn-lt"/>
-                <a:ea typeface="+mn-ea"/>
-                <a:cs typeface="+mn-cs"/>
-              </a:defRPr>
-            </a:lvl4pPr>
-            <a:lvl5pPr marL="1826572" algn="l" defTabSz="913284" rtl="0" eaLnBrk="1" latinLnBrk="0" hangingPunct="1">
-              <a:defRPr sz="1800" kern="1200">
-                <a:solidFill>
-                  <a:schemeClr val="tx1"/>
-                </a:solidFill>
-                <a:latin typeface="+mn-lt"/>
-                <a:ea typeface="+mn-ea"/>
-                <a:cs typeface="+mn-cs"/>
-              </a:defRPr>
-            </a:lvl5pPr>
-            <a:lvl6pPr marL="2283212" algn="l" defTabSz="913284" rtl="0" eaLnBrk="1" latinLnBrk="0" hangingPunct="1">
-              <a:defRPr sz="1800" kern="1200">
-                <a:solidFill>
-                  <a:schemeClr val="tx1"/>
-                </a:solidFill>
-                <a:latin typeface="+mn-lt"/>
-                <a:ea typeface="+mn-ea"/>
-                <a:cs typeface="+mn-cs"/>
-              </a:defRPr>
-            </a:lvl6pPr>
-            <a:lvl7pPr marL="2739853" algn="l" defTabSz="913284" rtl="0" eaLnBrk="1" latinLnBrk="0" hangingPunct="1">
-              <a:defRPr sz="1800" kern="1200">
-                <a:solidFill>
-                  <a:schemeClr val="tx1"/>
-                </a:solidFill>
-                <a:latin typeface="+mn-lt"/>
-                <a:ea typeface="+mn-ea"/>
-                <a:cs typeface="+mn-cs"/>
-              </a:defRPr>
-            </a:lvl7pPr>
-            <a:lvl8pPr marL="3196496" algn="l" defTabSz="913284" rtl="0" eaLnBrk="1" latinLnBrk="0" hangingPunct="1">
-              <a:defRPr sz="1800" kern="1200">
-                <a:solidFill>
-                  <a:schemeClr val="tx1"/>
-                </a:solidFill>
-                <a:latin typeface="+mn-lt"/>
-                <a:ea typeface="+mn-ea"/>
-                <a:cs typeface="+mn-cs"/>
-              </a:defRPr>
-            </a:lvl8pPr>
-            <a:lvl9pPr marL="3653137" algn="l" defTabSz="913284" rtl="0" eaLnBrk="1" latinLnBrk="0" hangingPunct="1">
-              <a:defRPr sz="1800" kern="1200">
-                <a:solidFill>
-                  <a:schemeClr val="tx1"/>
-                </a:solidFill>
-                <a:latin typeface="+mn-lt"/>
-                <a:ea typeface="+mn-ea"/>
-                <a:cs typeface="+mn-cs"/>
-              </a:defRPr>
-            </a:lvl9pPr>
-          </a:lstStyle>
-          <a:p>
-            <a:pPr algn="ctr">
-              <a:buSzPts val="3600"/>
-            </a:pPr>
-            <a:r>
-              <a:rPr lang="ru-RU" sz="1800" b="1" dirty="0">
-                <a:solidFill>
-                  <a:schemeClr val="lt2"/>
-                </a:solidFill>
-              </a:rPr>
-              <a:t>10 / 11</a:t>
-            </a:r>
-          </a:p>
-        </p:txBody>
-      </p:sp>
-    </p:spTree>
-    <p:extLst>
-      <p:ext uri="{BB962C8B-B14F-4D97-AF65-F5344CB8AC3E}">
-        <p14:creationId xmlns:p14="http://schemas.microsoft.com/office/powerpoint/2010/main" val="2945751244"/>
-      </p:ext>
-    </p:extLst>
-  </p:cSld>
-  <p:clrMapOvr>
-    <a:masterClrMapping/>
-  </p:clrMapOvr>
-</p:sld>
-</file>
-
-<file path=ppt/slides/slide11.xml><?xml version="1.0" encoding="utf-8"?>
-<p:sld xmlns:a="http://schemas.openxmlformats.org/drawingml/2006/main" xmlns:r="http://schemas.openxmlformats.org/officeDocument/2006/relationships" xmlns:p="http://schemas.openxmlformats.org/presentationml/2006/main">
-  <p:cSld>
-    <p:spTree>
-      <p:nvGrpSpPr>
-        <p:cNvPr id="1" name=""/>
-        <p:cNvGrpSpPr/>
-        <p:nvPr/>
-      </p:nvGrpSpPr>
-      <p:grpSpPr>
-        <a:xfrm>
-          <a:off x="0" y="0"/>
-          <a:ext cx="0" cy="0"/>
-          <a:chOff x="0" y="0"/>
-          <a:chExt cx="0" cy="0"/>
-        </a:xfrm>
-      </p:grpSpPr>
-      <p:sp>
-        <p:nvSpPr>
-          <p:cNvPr id="2" name="Заголовок 1">
-            <a:extLst>
-              <a:ext uri="{FF2B5EF4-FFF2-40B4-BE49-F238E27FC236}">
                 <a16:creationId xmlns:a16="http://schemas.microsoft.com/office/drawing/2014/main" id="{8D239C9A-3A08-F635-5EE5-209A8F7D9748}"/>
               </a:ext>
             </a:extLst>
@@ -7702,7 +3885,9 @@
           </a:xfrm>
         </p:spPr>
         <p:txBody>
-          <a:bodyPr/>
+          <a:bodyPr>
+            <a:normAutofit fontScale="70000" lnSpcReduction="20000"/>
+          </a:bodyPr>
           <a:lstStyle/>
           <a:p>
             <a:pPr algn="l"/>
@@ -7710,20 +3895,19 @@
               <a:rPr lang="ru-RU" dirty="0"/>
               <a:t>Почта:</a:t>
             </a:r>
+            <a:endParaRPr lang="en-US" dirty="0"/>
           </a:p>
           <a:p>
             <a:pPr algn="l"/>
             <a:r>
-              <a:rPr lang="ru-RU" dirty="0"/>
-              <a:t>andrejdeulenko@gmail.com</a:t>
-            </a:r>
+              <a:rPr lang="en-US" dirty="0"/>
+              <a:t>terrentii@vk.com</a:t>
+            </a:r>
+            <a:endParaRPr lang="ru-RU" dirty="0"/>
           </a:p>
           <a:p>
             <a:pPr algn="l"/>
-            <a:r>
-              <a:rPr lang="ru-RU" dirty="0"/>
-              <a:t/>
-            </a:r>
+            <a:endParaRPr lang="ru-RU" dirty="0"/>
           </a:p>
           <a:p>
             <a:pPr algn="l"/>
@@ -7741,10 +3925,7 @@
           </a:p>
           <a:p>
             <a:pPr algn="l"/>
-            <a:r>
-              <a:rPr lang="ru-RU" dirty="0"/>
-              <a:t/>
-            </a:r>
+            <a:endParaRPr lang="ru-RU" dirty="0"/>
           </a:p>
           <a:p>
             <a:pPr algn="l"/>
@@ -7757,47 +3938,16 @@
             <a:pPr algn="l"/>
             <a:r>
               <a:rPr lang="ru-RU" dirty="0"/>
-              <a:t>  git clone  -&gt;  python app.py  -&gt;  localhost:5000</a:t>
-            </a:r>
-          </a:p>
-        </p:txBody>
-      </p:sp>
-      <p:pic>
-        <p:nvPicPr>
-          <p:cNvPr id="4" name="Рисунок 3">
-            <a:extLst>
-              <a:ext uri="{FF2B5EF4-FFF2-40B4-BE49-F238E27FC236}">
-                <a16:creationId xmlns:a16="http://schemas.microsoft.com/office/drawing/2014/main" id="{60A8E024-EA53-3A64-71BD-0C8A85857C4D}"/>
-              </a:ext>
-            </a:extLst>
-          </p:cNvPr>
-          <p:cNvPicPr>
-            <a:picLocks noChangeAspect="1"/>
-          </p:cNvPicPr>
-          <p:nvPr/>
-        </p:nvPicPr>
-        <p:blipFill>
-          <a:blip r:embed="rId3">
-            <a:extLst>
-              <a:ext uri="{96DAC541-7B7A-43D3-8B79-37D633B846F1}">
-                <asvg:svgBlip xmlns:asvg="http://schemas.microsoft.com/office/drawing/2016/SVG/main" r:embed="rId4"/>
-              </a:ext>
-            </a:extLst>
-          </a:blip>
-          <a:stretch>
-            <a:fillRect/>
-          </a:stretch>
-        </p:blipFill>
-        <p:spPr>
-          <a:xfrm>
-            <a:off x="4506936" y="59032"/>
-            <a:ext cx="3178128" cy="2246347"/>
-          </a:xfrm>
-          <a:prstGeom prst="rect">
-            <a:avLst/>
-          </a:prstGeom>
-        </p:spPr>
-      </p:pic>
+              <a:t>  </a:t>
+            </a:r>
+            <a:r>
+              <a:rPr lang="en-US" dirty="0"/>
+              <a:t>https://soufos.ru/</a:t>
+            </a:r>
+            <a:endParaRPr lang="ru-RU" dirty="0"/>
+          </a:p>
+        </p:txBody>
+      </p:sp>
     </p:spTree>
     <p:extLst>
       <p:ext uri="{BB962C8B-B14F-4D97-AF65-F5344CB8AC3E}">
@@ -7921,10 +4071,7 @@
               </a:lnSpc>
               <a:buNone/>
             </a:pPr>
-            <a:r>
-              <a:rPr lang="ru-RU" sz="2000" dirty="0"/>
-              <a:t/>
-            </a:r>
+            <a:endParaRPr lang="ru-RU" sz="2000" dirty="0"/>
           </a:p>
           <a:p>
             <a:pPr marL="0" indent="452438" algn="just">
@@ -8251,7 +4398,7 @@
         </p:spPr>
         <p:txBody>
           <a:bodyPr>
-            <a:normAutofit/>
+            <a:normAutofit fontScale="85000" lnSpcReduction="10000"/>
           </a:bodyPr>
           <a:lstStyle/>
           <a:p>
@@ -8285,10 +4432,7 @@
               </a:lnSpc>
               <a:buNone/>
             </a:pPr>
-            <a:r>
-              <a:rPr lang="ru-RU" sz="2000" b="1" dirty="0"/>
-              <a:t/>
-            </a:r>
+            <a:endParaRPr lang="ru-RU" sz="2000" b="1" dirty="0"/>
           </a:p>
           <a:p>
             <a:pPr marL="0" indent="0">
@@ -8634,114 +4778,7 @@
           <a:p>
             <a:r>
               <a:rPr lang="ru-RU" dirty="0"/>
-              <a:t>Используемое ПО</a:t>
-            </a:r>
-          </a:p>
-        </p:txBody>
-      </p:sp>
-      <p:sp>
-        <p:nvSpPr>
-          <p:cNvPr id="3" name="Объект 2">
-            <a:extLst>
-              <a:ext uri="{FF2B5EF4-FFF2-40B4-BE49-F238E27FC236}">
-                <a16:creationId xmlns:a16="http://schemas.microsoft.com/office/drawing/2014/main" id="{D0810240-7F2C-895C-477C-F7EF1886331A}"/>
-              </a:ext>
-            </a:extLst>
-          </p:cNvPr>
-          <p:cNvSpPr>
-            <a:spLocks noGrp="1"/>
-          </p:cNvSpPr>
-          <p:nvPr>
-            <p:ph idx="1"/>
-          </p:nvPr>
-        </p:nvSpPr>
-        <p:spPr>
-          <a:xfrm>
-            <a:off x="838200" y="1835673"/>
-            <a:ext cx="5040086" cy="4351338"/>
-          </a:xfrm>
-        </p:spPr>
-        <p:txBody>
-          <a:bodyPr>
-            <a:normAutofit/>
-          </a:bodyPr>
-          <a:lstStyle/>
-          <a:p>
-            <a:pPr marL="0" indent="0">
-              <a:lnSpc>
-                <a:spcPct val="150000"/>
-              </a:lnSpc>
-              <a:buNone/>
-            </a:pPr>
-            <a:endParaRPr lang="ru-RU" sz="2000" b="1" dirty="0"/>
-            <a:r>
-              <a:rPr lang="ru-RU" sz="2000" b="1" dirty="0"/>
-              <a:t>Бэкенд:</a:t>
-            </a:r>
-          </a:p>
-          <a:p>
-            <a:pPr marL="0" indent="0">
-              <a:lnSpc>
-                <a:spcPct val="150000"/>
-              </a:lnSpc>
-              <a:buNone/>
-            </a:pPr>
-            <a:endParaRPr lang="ru-RU" sz="2000" b="1" dirty="0"/>
-            <a:r>
-              <a:rPr lang="ru-RU" sz="2000" b="1" dirty="0"/>
-              <a:t>  Python 3.13  ·  Flask  ·  Flask-SocketIO</a:t>
-            </a:r>
-          </a:p>
-          <a:p>
-            <a:pPr marL="0" indent="0">
-              <a:lnSpc>
-                <a:spcPct val="150000"/>
-              </a:lnSpc>
-              <a:buNone/>
-            </a:pPr>
-            <a:endParaRPr lang="ru-RU" sz="2000" b="1" dirty="0"/>
-            <a:r>
-              <a:rPr lang="ru-RU" sz="2000" b="1" dirty="0"/>
-              <a:t>  SQLAlchemy  ·  Flask-WTF  ·  Flask-Login  ·  Werkzeug</a:t>
-            </a:r>
-          </a:p>
-          <a:p>
-            <a:pPr marL="0" indent="0">
-              <a:lnSpc>
-                <a:spcPct val="150000"/>
-              </a:lnSpc>
-              <a:buNone/>
-            </a:pPr>
-            <a:endParaRPr lang="ru-RU" sz="2000" b="1" dirty="0"/>
-            <a:r>
-              <a:rPr lang="ru-RU" sz="2000" b="1" dirty="0"/>
-              <a:t/>
-            </a:r>
-          </a:p>
-          <a:p>
-            <a:pPr marL="0" indent="0">
-              <a:lnSpc>
-                <a:spcPct val="150000"/>
-              </a:lnSpc>
-              <a:buNone/>
-            </a:pPr>
-            <a:endParaRPr lang="ru-RU" sz="2000" b="1" dirty="0"/>
-            <a:r>
-              <a:rPr lang="ru-RU" sz="2000" b="1" dirty="0"/>
-              <a:t>Сервер:</a:t>
-            </a:r>
-          </a:p>
-          <a:p>
-            <a:pPr marL="0" indent="0">
-              <a:lnSpc>
-                <a:spcPct val="150000"/>
-              </a:lnSpc>
-              <a:buNone/>
-            </a:pPr>
-            <a:endParaRPr lang="ru-RU" sz="2000" b="1" dirty="0"/>
-            <a:r>
-              <a:rPr lang="ru-RU" sz="2000" b="1" dirty="0"/>
-              <a:t>  Eventlet  ·  Gunicorn  ·  Flask-Session</a:t>
+              <a:t>Архитектура</a:t>
             </a:r>
           </a:p>
         </p:txBody>
@@ -8958,362 +4995,228 @@
                   <a:schemeClr val="lt2"/>
                 </a:solidFill>
               </a:rPr>
-              <a:t>4 / 11</a:t>
-            </a:r>
-          </a:p>
-        </p:txBody>
-      </p:sp>
-      <p:sp>
-        <p:nvSpPr>
-          <p:cNvPr id="6" name="Объект 2">
-            <a:extLst>
-              <a:ext uri="{FF2B5EF4-FFF2-40B4-BE49-F238E27FC236}">
-                <a16:creationId xmlns:a16="http://schemas.microsoft.com/office/drawing/2014/main" id="{E4068C59-8FC4-AE27-D6F7-7A89DC193BF2}"/>
-              </a:ext>
-            </a:extLst>
-          </p:cNvPr>
-          <p:cNvSpPr txBox="1">
-            <a:spLocks/>
-          </p:cNvSpPr>
+              <a:t>5 / 11</a:t>
+            </a:r>
+          </a:p>
+        </p:txBody>
+      </p:sp>
+      <p:sp>
+        <p:nvSpPr>
+          <p:cNvPr id="8" name="TextBox 7"/>
+          <p:cNvSpPr txBox="1"/>
           <p:nvPr/>
         </p:nvSpPr>
         <p:spPr>
           <a:xfrm>
-            <a:off x="6313714" y="1835673"/>
-            <a:ext cx="5040086" cy="4351338"/>
+            <a:off x="838200" y="1837943"/>
+            <a:ext cx="10515600" cy="3416320"/>
           </a:xfrm>
           <a:prstGeom prst="rect">
             <a:avLst/>
           </a:prstGeom>
+          <a:noFill/>
         </p:spPr>
         <p:txBody>
-          <a:bodyPr vert="horz" lIns="91440" tIns="45720" rIns="91440" bIns="45720" rtlCol="0">
-            <a:normAutofit/>
+          <a:bodyPr wrap="square">
+            <a:spAutoFit/>
           </a:bodyPr>
-          <a:lstStyle>
-            <a:lvl1pPr marL="228600" indent="-228600" algn="l" defTabSz="914400" rtl="0" eaLnBrk="1" latinLnBrk="0" hangingPunct="1">
-              <a:lnSpc>
-                <a:spcPct val="90000"/>
-              </a:lnSpc>
-              <a:spcBef>
-                <a:spcPts val="1000"/>
-              </a:spcBef>
-              <a:buFont typeface="Arial" panose="020B0604020202020204" pitchFamily="34" charset="0"/>
-              <a:buChar char="•"/>
-              <a:defRPr sz="2800" kern="1200">
-                <a:solidFill>
-                  <a:schemeClr val="tx1"/>
-                </a:solidFill>
-                <a:latin typeface="+mn-lt"/>
-                <a:ea typeface="+mn-ea"/>
-                <a:cs typeface="+mn-cs"/>
-              </a:defRPr>
-            </a:lvl1pPr>
-            <a:lvl2pPr marL="685800" indent="-228600" algn="l" defTabSz="914400" rtl="0" eaLnBrk="1" latinLnBrk="0" hangingPunct="1">
-              <a:lnSpc>
-                <a:spcPct val="90000"/>
-              </a:lnSpc>
-              <a:spcBef>
-                <a:spcPts val="500"/>
-              </a:spcBef>
-              <a:buFont typeface="Arial" panose="020B0604020202020204" pitchFamily="34" charset="0"/>
-              <a:buChar char="•"/>
-              <a:defRPr sz="2400" kern="1200">
-                <a:solidFill>
-                  <a:schemeClr val="tx1"/>
-                </a:solidFill>
-                <a:latin typeface="+mn-lt"/>
-                <a:ea typeface="+mn-ea"/>
-                <a:cs typeface="+mn-cs"/>
-              </a:defRPr>
-            </a:lvl2pPr>
-            <a:lvl3pPr marL="1143000" indent="-228600" algn="l" defTabSz="914400" rtl="0" eaLnBrk="1" latinLnBrk="0" hangingPunct="1">
-              <a:lnSpc>
-                <a:spcPct val="90000"/>
-              </a:lnSpc>
-              <a:spcBef>
-                <a:spcPts val="500"/>
-              </a:spcBef>
-              <a:buFont typeface="Arial" panose="020B0604020202020204" pitchFamily="34" charset="0"/>
-              <a:buChar char="•"/>
-              <a:defRPr sz="2000" kern="1200">
-                <a:solidFill>
-                  <a:schemeClr val="tx1"/>
-                </a:solidFill>
-                <a:latin typeface="+mn-lt"/>
-                <a:ea typeface="+mn-ea"/>
-                <a:cs typeface="+mn-cs"/>
-              </a:defRPr>
-            </a:lvl3pPr>
-            <a:lvl4pPr marL="1600200" indent="-228600" algn="l" defTabSz="914400" rtl="0" eaLnBrk="1" latinLnBrk="0" hangingPunct="1">
-              <a:lnSpc>
-                <a:spcPct val="90000"/>
-              </a:lnSpc>
-              <a:spcBef>
-                <a:spcPts val="500"/>
-              </a:spcBef>
-              <a:buFont typeface="Arial" panose="020B0604020202020204" pitchFamily="34" charset="0"/>
-              <a:buChar char="•"/>
-              <a:defRPr sz="1800" kern="1200">
-                <a:solidFill>
-                  <a:schemeClr val="tx1"/>
-                </a:solidFill>
-                <a:latin typeface="+mn-lt"/>
-                <a:ea typeface="+mn-ea"/>
-                <a:cs typeface="+mn-cs"/>
-              </a:defRPr>
-            </a:lvl4pPr>
-            <a:lvl5pPr marL="2057400" indent="-228600" algn="l" defTabSz="914400" rtl="0" eaLnBrk="1" latinLnBrk="0" hangingPunct="1">
-              <a:lnSpc>
-                <a:spcPct val="90000"/>
-              </a:lnSpc>
-              <a:spcBef>
-                <a:spcPts val="500"/>
-              </a:spcBef>
-              <a:buFont typeface="Arial" panose="020B0604020202020204" pitchFamily="34" charset="0"/>
-              <a:buChar char="•"/>
-              <a:defRPr sz="1800" kern="1200">
-                <a:solidFill>
-                  <a:schemeClr val="tx1"/>
-                </a:solidFill>
-                <a:latin typeface="+mn-lt"/>
-                <a:ea typeface="+mn-ea"/>
-                <a:cs typeface="+mn-cs"/>
-              </a:defRPr>
-            </a:lvl5pPr>
-            <a:lvl6pPr marL="2514600" indent="-228600" algn="l" defTabSz="914400" rtl="0" eaLnBrk="1" latinLnBrk="0" hangingPunct="1">
-              <a:lnSpc>
-                <a:spcPct val="90000"/>
-              </a:lnSpc>
-              <a:spcBef>
-                <a:spcPts val="500"/>
-              </a:spcBef>
-              <a:buFont typeface="Arial" panose="020B0604020202020204" pitchFamily="34" charset="0"/>
-              <a:buChar char="•"/>
-              <a:defRPr sz="1800" kern="1200">
-                <a:solidFill>
-                  <a:schemeClr val="tx1"/>
-                </a:solidFill>
-                <a:latin typeface="+mn-lt"/>
-                <a:ea typeface="+mn-ea"/>
-                <a:cs typeface="+mn-cs"/>
-              </a:defRPr>
-            </a:lvl6pPr>
-            <a:lvl7pPr marL="2971800" indent="-228600" algn="l" defTabSz="914400" rtl="0" eaLnBrk="1" latinLnBrk="0" hangingPunct="1">
-              <a:lnSpc>
-                <a:spcPct val="90000"/>
-              </a:lnSpc>
-              <a:spcBef>
-                <a:spcPts val="500"/>
-              </a:spcBef>
-              <a:buFont typeface="Arial" panose="020B0604020202020204" pitchFamily="34" charset="0"/>
-              <a:buChar char="•"/>
-              <a:defRPr sz="1800" kern="1200">
-                <a:solidFill>
-                  <a:schemeClr val="tx1"/>
-                </a:solidFill>
-                <a:latin typeface="+mn-lt"/>
-                <a:ea typeface="+mn-ea"/>
-                <a:cs typeface="+mn-cs"/>
-              </a:defRPr>
-            </a:lvl7pPr>
-            <a:lvl8pPr marL="3429000" indent="-228600" algn="l" defTabSz="914400" rtl="0" eaLnBrk="1" latinLnBrk="0" hangingPunct="1">
-              <a:lnSpc>
-                <a:spcPct val="90000"/>
-              </a:lnSpc>
-              <a:spcBef>
-                <a:spcPts val="500"/>
-              </a:spcBef>
-              <a:buFont typeface="Arial" panose="020B0604020202020204" pitchFamily="34" charset="0"/>
-              <a:buChar char="•"/>
-              <a:defRPr sz="1800" kern="1200">
-                <a:solidFill>
-                  <a:schemeClr val="tx1"/>
-                </a:solidFill>
-                <a:latin typeface="+mn-lt"/>
-                <a:ea typeface="+mn-ea"/>
-                <a:cs typeface="+mn-cs"/>
-              </a:defRPr>
-            </a:lvl8pPr>
-            <a:lvl9pPr marL="3886200" indent="-228600" algn="l" defTabSz="914400" rtl="0" eaLnBrk="1" latinLnBrk="0" hangingPunct="1">
-              <a:lnSpc>
-                <a:spcPct val="90000"/>
-              </a:lnSpc>
-              <a:spcBef>
-                <a:spcPts val="500"/>
-              </a:spcBef>
-              <a:buFont typeface="Arial" panose="020B0604020202020204" pitchFamily="34" charset="0"/>
-              <a:buChar char="•"/>
-              <a:defRPr sz="1800" kern="1200">
-                <a:solidFill>
-                  <a:schemeClr val="tx1"/>
-                </a:solidFill>
-                <a:latin typeface="+mn-lt"/>
-                <a:ea typeface="+mn-ea"/>
-                <a:cs typeface="+mn-cs"/>
-              </a:defRPr>
-            </a:lvl9pPr>
-          </a:lstStyle>
-          <a:p>
-            <a:pPr marL="0" indent="0">
-              <a:lnSpc>
-                <a:spcPct val="150000"/>
-              </a:lnSpc>
-              <a:buNone/>
-            </a:pPr>
-            <a:endParaRPr lang="ru-RU" sz="2000" b="1" dirty="0"/>
-            <a:r>
-              <a:rPr lang="ru-RU" sz="2000" b="1" dirty="0"/>
-              <a:t>Фронтенд:</a:t>
-            </a:r>
-          </a:p>
-          <a:p>
-            <a:pPr marL="0" indent="0">
-              <a:lnSpc>
-                <a:spcPct val="150000"/>
-              </a:lnSpc>
-              <a:buNone/>
-            </a:pPr>
-            <a:endParaRPr lang="ru-RU" sz="2000" b="1" dirty="0"/>
-            <a:r>
-              <a:rPr lang="ru-RU" sz="2000" b="1" dirty="0"/>
-              <a:t>  Jinja2  ·  Socket.IO JS  ·  Highlight.js</a:t>
-            </a:r>
-          </a:p>
-          <a:p>
-            <a:pPr marL="0" indent="0">
-              <a:lnSpc>
-                <a:spcPct val="150000"/>
-              </a:lnSpc>
-              <a:buNone/>
-            </a:pPr>
-            <a:endParaRPr lang="ru-RU" sz="2000" b="1" dirty="0"/>
-            <a:r>
-              <a:rPr lang="ru-RU" sz="2000" b="1" dirty="0"/>
-              <a:t>  Vanilla CSS (МЫС Design System)</a:t>
-            </a:r>
-          </a:p>
-          <a:p>
-            <a:pPr marL="0" indent="0">
-              <a:lnSpc>
-                <a:spcPct val="150000"/>
-              </a:lnSpc>
-              <a:buNone/>
-            </a:pPr>
-            <a:endParaRPr lang="ru-RU" sz="2000" b="1" dirty="0"/>
-            <a:r>
-              <a:rPr lang="ru-RU" sz="2000" b="1" dirty="0"/>
-              <a:t/>
-            </a:r>
-          </a:p>
-          <a:p>
-            <a:pPr marL="0" indent="0">
-              <a:lnSpc>
-                <a:spcPct val="150000"/>
-              </a:lnSpc>
-              <a:buNone/>
-            </a:pPr>
-            <a:endParaRPr lang="ru-RU" sz="2000" b="1" dirty="0"/>
-            <a:r>
-              <a:rPr lang="ru-RU" sz="2000" b="1" dirty="0"/>
-              <a:t>Инструменты:</a:t>
-            </a:r>
-          </a:p>
-          <a:p>
-            <a:pPr marL="0" indent="0">
-              <a:lnSpc>
-                <a:spcPct val="150000"/>
-              </a:lnSpc>
-              <a:buNone/>
-            </a:pPr>
-            <a:endParaRPr lang="ru-RU" sz="2000" b="1" dirty="0"/>
-            <a:r>
-              <a:rPr lang="ru-RU" sz="2000" b="1" dirty="0"/>
-              <a:t>  VS Code  ·  Git / GitHub  ·  SQLite</a:t>
-            </a:r>
-          </a:p>
-        </p:txBody>
-      </p:sp>
-      <p:cxnSp>
-        <p:nvCxnSpPr>
-          <p:cNvPr id="8" name="Прямая соединительная линия 7">
-            <a:extLst>
-              <a:ext uri="{FF2B5EF4-FFF2-40B4-BE49-F238E27FC236}">
-                <a16:creationId xmlns:a16="http://schemas.microsoft.com/office/drawing/2014/main" id="{07C70468-4B53-C692-D702-6DA921629237}"/>
-              </a:ext>
-            </a:extLst>
-          </p:cNvPr>
-          <p:cNvCxnSpPr>
-            <a:stCxn id="2" idx="2"/>
-          </p:cNvCxnSpPr>
-          <p:nvPr/>
-        </p:nvCxnSpPr>
-        <p:spPr>
-          <a:xfrm>
-            <a:off x="6096000" y="1690688"/>
-            <a:ext cx="0" cy="5167312"/>
-          </a:xfrm>
-          <a:prstGeom prst="line">
-            <a:avLst/>
-          </a:prstGeom>
-        </p:spPr>
-        <p:style>
-          <a:lnRef idx="2">
-            <a:schemeClr val="dk1"/>
-          </a:lnRef>
-          <a:fillRef idx="0">
-            <a:schemeClr val="dk1"/>
-          </a:fillRef>
-          <a:effectRef idx="1">
-            <a:schemeClr val="dk1"/>
-          </a:effectRef>
-          <a:fontRef idx="minor">
-            <a:schemeClr val="tx1"/>
-          </a:fontRef>
-        </p:style>
-      </p:cxnSp>
-      <p:cxnSp>
-        <p:nvCxnSpPr>
-          <p:cNvPr id="10" name="Прямая соединительная линия 9">
-            <a:extLst>
-              <a:ext uri="{FF2B5EF4-FFF2-40B4-BE49-F238E27FC236}">
-                <a16:creationId xmlns:a16="http://schemas.microsoft.com/office/drawing/2014/main" id="{0BE82D7B-BD3F-D7F4-50B3-A63A900E2F1A}"/>
-              </a:ext>
-            </a:extLst>
-          </p:cNvPr>
-          <p:cNvCxnSpPr>
-            <a:cxnSpLocks/>
-          </p:cNvCxnSpPr>
-          <p:nvPr/>
-        </p:nvCxnSpPr>
-        <p:spPr>
-          <a:xfrm>
-            <a:off x="0" y="1690688"/>
-            <a:ext cx="12192000" cy="0"/>
-          </a:xfrm>
-          <a:prstGeom prst="line">
-            <a:avLst/>
-          </a:prstGeom>
-        </p:spPr>
-        <p:style>
-          <a:lnRef idx="2">
-            <a:schemeClr val="dk1"/>
-          </a:lnRef>
-          <a:fillRef idx="0">
-            <a:schemeClr val="dk1"/>
-          </a:fillRef>
-          <a:effectRef idx="1">
-            <a:schemeClr val="dk1"/>
-          </a:effectRef>
-          <a:fontRef idx="minor">
-            <a:schemeClr val="tx1"/>
-          </a:fontRef>
-        </p:style>
-      </p:cxnSp>
+          <a:lstStyle/>
+          <a:p>
+            <a:r>
+              <a:rPr dirty="0" err="1"/>
+              <a:t>Три</a:t>
+            </a:r>
+            <a:r>
+              <a:rPr dirty="0"/>
+              <a:t> Blueprint-а:</a:t>
+            </a:r>
+          </a:p>
+          <a:p>
+            <a:r>
+              <a:rPr dirty="0"/>
+              <a:t>   auth      — </a:t>
+            </a:r>
+            <a:r>
+              <a:rPr dirty="0" err="1"/>
+              <a:t>регистрация</a:t>
+            </a:r>
+            <a:r>
+              <a:rPr dirty="0"/>
+              <a:t>, </a:t>
+            </a:r>
+            <a:r>
+              <a:rPr dirty="0" err="1"/>
+              <a:t>вход</a:t>
+            </a:r>
+            <a:r>
+              <a:rPr dirty="0"/>
+              <a:t>, </a:t>
+            </a:r>
+            <a:r>
+              <a:rPr dirty="0" err="1"/>
+              <a:t>выход</a:t>
+            </a:r>
+            <a:endParaRPr dirty="0"/>
+          </a:p>
+          <a:p>
+            <a:r>
+              <a:rPr dirty="0"/>
+              <a:t>   rooms    — </a:t>
+            </a:r>
+            <a:r>
+              <a:rPr dirty="0" err="1"/>
+              <a:t>комнаты</a:t>
+            </a:r>
+            <a:r>
+              <a:rPr dirty="0"/>
+              <a:t>, </a:t>
+            </a:r>
+            <a:r>
+              <a:rPr dirty="0" err="1"/>
+              <a:t>сообщения</a:t>
+            </a:r>
+            <a:r>
+              <a:rPr dirty="0"/>
+              <a:t>, </a:t>
+            </a:r>
+            <a:r>
+              <a:rPr dirty="0" err="1"/>
+              <a:t>медиафайлы</a:t>
+            </a:r>
+            <a:endParaRPr dirty="0"/>
+          </a:p>
+          <a:p>
+            <a:r>
+              <a:rPr dirty="0"/>
+              <a:t>   </a:t>
+            </a:r>
+            <a:r>
+              <a:rPr dirty="0" err="1"/>
+              <a:t>api</a:t>
+            </a:r>
+            <a:r>
+              <a:rPr dirty="0"/>
+              <a:t>         — REST API с </a:t>
+            </a:r>
+            <a:r>
+              <a:rPr dirty="0" err="1"/>
+              <a:t>ключами</a:t>
+            </a:r>
+            <a:r>
+              <a:rPr dirty="0"/>
+              <a:t> </a:t>
+            </a:r>
+            <a:r>
+              <a:rPr dirty="0" err="1"/>
+              <a:t>для</a:t>
+            </a:r>
+            <a:r>
+              <a:rPr dirty="0"/>
+              <a:t> </a:t>
+            </a:r>
+            <a:r>
+              <a:rPr dirty="0" err="1"/>
+              <a:t>ботов</a:t>
+            </a:r>
+            <a:endParaRPr dirty="0"/>
+          </a:p>
+          <a:p>
+            <a:endParaRPr dirty="0"/>
+          </a:p>
+          <a:p>
+            <a:r>
+              <a:rPr dirty="0"/>
+              <a:t>Real-time: WebSocket (Socket.IO)  +  HTTP-polling </a:t>
+            </a:r>
+            <a:r>
+              <a:rPr u="sng" dirty="0"/>
+              <a:t>fallback</a:t>
+            </a:r>
+            <a:r>
+              <a:rPr dirty="0"/>
+              <a:t> </a:t>
+            </a:r>
+            <a:r>
+              <a:rPr dirty="0" err="1"/>
+              <a:t>каждые</a:t>
+            </a:r>
+            <a:r>
+              <a:rPr dirty="0"/>
+              <a:t> 3 с</a:t>
+            </a:r>
+            <a:endParaRPr lang="ru-RU" dirty="0"/>
+          </a:p>
+          <a:p>
+            <a:endParaRPr dirty="0"/>
+          </a:p>
+          <a:p>
+            <a:r>
+              <a:rPr dirty="0" err="1"/>
+              <a:t>Хранение</a:t>
+            </a:r>
+            <a:r>
+              <a:rPr dirty="0"/>
+              <a:t>: SQLite </a:t>
+            </a:r>
+            <a:r>
+              <a:rPr dirty="0" err="1"/>
+              <a:t>через</a:t>
+            </a:r>
+            <a:r>
+              <a:rPr dirty="0"/>
+              <a:t> </a:t>
+            </a:r>
+            <a:r>
+              <a:rPr dirty="0" err="1"/>
+              <a:t>SQLAlchemy</a:t>
+            </a:r>
+            <a:r>
+              <a:rPr dirty="0"/>
+              <a:t> ORM</a:t>
+            </a:r>
+            <a:endParaRPr lang="ru-RU" dirty="0"/>
+          </a:p>
+          <a:p>
+            <a:endParaRPr dirty="0"/>
+          </a:p>
+          <a:p>
+            <a:r>
+              <a:rPr dirty="0" err="1"/>
+              <a:t>Сессии</a:t>
+            </a:r>
+            <a:r>
+              <a:rPr dirty="0"/>
+              <a:t>: server-side filesystem (Flask-Session)</a:t>
+            </a:r>
+            <a:endParaRPr lang="ru-RU" dirty="0"/>
+          </a:p>
+          <a:p>
+            <a:endParaRPr dirty="0"/>
+          </a:p>
+          <a:p>
+            <a:r>
+              <a:rPr dirty="0" err="1"/>
+              <a:t>Медиа</a:t>
+            </a:r>
+            <a:r>
+              <a:rPr dirty="0"/>
+              <a:t>: UUID-</a:t>
+            </a:r>
+            <a:r>
+              <a:rPr dirty="0" err="1"/>
+              <a:t>префикс</a:t>
+            </a:r>
+            <a:r>
+              <a:rPr dirty="0"/>
+              <a:t> + whitelist MIME → rooms/&lt;id&gt;/media/</a:t>
+            </a:r>
+          </a:p>
+        </p:txBody>
+      </p:sp>
     </p:spTree>
     <p:extLst>
       <p:ext uri="{BB962C8B-B14F-4D97-AF65-F5344CB8AC3E}">
-        <p14:creationId xmlns:p14="http://schemas.microsoft.com/office/powerpoint/2010/main" val="3000163676"/>
+        <p14:creationId xmlns:p14="http://schemas.microsoft.com/office/powerpoint/2010/main" val="1983467976"/>
       </p:ext>
     </p:extLst>
   </p:cSld>
@@ -9363,48 +5266,166 @@
           <a:p>
             <a:r>
               <a:rPr lang="ru-RU" dirty="0"/>
-              <a:t>Архитектура</a:t>
-            </a:r>
-          </a:p>
-        </p:txBody>
-      </p:sp>
-      <p:graphicFrame>
-        <p:nvGraphicFramePr>
-          <p:cNvPr id="7" name="Объект 6">
-            <a:extLst>
-              <a:ext uri="{FF2B5EF4-FFF2-40B4-BE49-F238E27FC236}">
-                <a16:creationId xmlns:a16="http://schemas.microsoft.com/office/drawing/2014/main" id="{B42BDED4-9BBC-20D2-660C-CE01F4A547BA}"/>
-              </a:ext>
-            </a:extLst>
-          </p:cNvPr>
-          <p:cNvGraphicFramePr>
-            <a:graphicFrameLocks noGrp="1"/>
-          </p:cNvGraphicFramePr>
+              <a:t>Функционал</a:t>
+            </a:r>
+          </a:p>
+        </p:txBody>
+      </p:sp>
+      <p:sp>
+        <p:nvSpPr>
+          <p:cNvPr id="3" name="Объект 2">
+            <a:extLst>
+              <a:ext uri="{FF2B5EF4-FFF2-40B4-BE49-F238E27FC236}">
+                <a16:creationId xmlns:a16="http://schemas.microsoft.com/office/drawing/2014/main" id="{D0810240-7F2C-895C-477C-F7EF1886331A}"/>
+              </a:ext>
+            </a:extLst>
+          </p:cNvPr>
+          <p:cNvSpPr>
+            <a:spLocks noGrp="1"/>
+          </p:cNvSpPr>
           <p:nvPr>
             <p:ph idx="1"/>
-            <p:extLst>
-              <p:ext uri="{D42A27DB-BD31-4B8C-83A1-F6EECF244321}">
-                <p14:modId xmlns:p14="http://schemas.microsoft.com/office/powerpoint/2010/main" val="2002389032"/>
-              </p:ext>
-            </p:extLst>
-          </p:nvPr>
-        </p:nvGraphicFramePr>
-        <p:xfrm>
-          <a:off x="838199" y="1835673"/>
-          <a:ext cx="10515599" cy="4351338"/>
-        </p:xfrm>
-        <a:graphic>
-          <a:graphicData uri="http://schemas.openxmlformats.org/drawingml/2006/diagram">
-            <dgm:relIds xmlns:dgm="http://schemas.openxmlformats.org/drawingml/2006/diagram" xmlns:r="http://schemas.openxmlformats.org/officeDocument/2006/relationships" r:dm="rId2" r:lo="rId3" r:qs="rId4" r:cs="rId5"/>
-          </a:graphicData>
-        </a:graphic>
-      </p:graphicFrame>
-      <p:sp>
-        <p:nvSpPr>
-          <p:cNvPr id="4" name="Google Shape;91;p32">
-            <a:extLst>
-              <a:ext uri="{FF2B5EF4-FFF2-40B4-BE49-F238E27FC236}">
-                <a16:creationId xmlns:a16="http://schemas.microsoft.com/office/drawing/2014/main" id="{75188BF8-F1E2-885B-4D51-3AE651D59456}"/>
+          </p:nvPr>
+        </p:nvSpPr>
+        <p:spPr>
+          <a:xfrm>
+            <a:off x="838200" y="1835673"/>
+            <a:ext cx="10515600" cy="4351338"/>
+          </a:xfrm>
+        </p:spPr>
+        <p:txBody>
+          <a:bodyPr>
+            <a:normAutofit fontScale="70000" lnSpcReduction="20000"/>
+          </a:bodyPr>
+          <a:lstStyle/>
+          <a:p>
+            <a:pPr marL="0" indent="0" algn="just">
+              <a:lnSpc>
+                <a:spcPct val="150000"/>
+              </a:lnSpc>
+              <a:buNone/>
+            </a:pPr>
+            <a:r>
+              <a:rPr lang="ru-RU" sz="2000" i="1" dirty="0"/>
+              <a:t>Анонимный вход — без регистрации, авто-ID: Anon1, Anon2 …</a:t>
+            </a:r>
+          </a:p>
+          <a:p>
+            <a:pPr marL="0" indent="0" algn="just">
+              <a:lnSpc>
+                <a:spcPct val="150000"/>
+              </a:lnSpc>
+              <a:buNone/>
+            </a:pPr>
+            <a:r>
+              <a:rPr lang="ru-RU" sz="2000" i="1" dirty="0"/>
+              <a:t>Открытые / закрытые комнаты с ролями (Прародитель / Участник)</a:t>
+            </a:r>
+          </a:p>
+          <a:p>
+            <a:pPr marL="0" indent="0" algn="just">
+              <a:lnSpc>
+                <a:spcPct val="150000"/>
+              </a:lnSpc>
+              <a:buNone/>
+            </a:pPr>
+            <a:r>
+              <a:rPr lang="ru-RU" sz="2000" i="1" dirty="0"/>
+              <a:t>Личная комната «Избранное» для каждого аккаунта</a:t>
+            </a:r>
+          </a:p>
+          <a:p>
+            <a:pPr marL="0" indent="0" algn="just">
+              <a:lnSpc>
+                <a:spcPct val="150000"/>
+              </a:lnSpc>
+              <a:buNone/>
+            </a:pPr>
+            <a:r>
+              <a:rPr lang="ru-RU" sz="2000" i="1" dirty="0"/>
+              <a:t>Real-time чат: WebSocket с fallback на polling</a:t>
+            </a:r>
+          </a:p>
+          <a:p>
+            <a:pPr marL="0" indent="0" algn="just">
+              <a:lnSpc>
+                <a:spcPct val="150000"/>
+              </a:lnSpc>
+              <a:buNone/>
+            </a:pPr>
+            <a:r>
+              <a:rPr lang="ru-RU" sz="2000" i="1" dirty="0"/>
+              <a:t>Загрузка файлов до 5 ГБ (изображения, видео, документы)</a:t>
+            </a:r>
+          </a:p>
+          <a:p>
+            <a:pPr marL="0" indent="0" algn="just">
+              <a:lnSpc>
+                <a:spcPct val="150000"/>
+              </a:lnSpc>
+              <a:buNone/>
+            </a:pPr>
+            <a:r>
+              <a:rPr lang="ru-RU" sz="2000" i="1" dirty="0"/>
+              <a:t>Редактирование и удаление своих сообщений</a:t>
+            </a:r>
+          </a:p>
+          <a:p>
+            <a:pPr marL="0" indent="0" algn="just">
+              <a:lnSpc>
+                <a:spcPct val="150000"/>
+              </a:lnSpc>
+              <a:buNone/>
+            </a:pPr>
+            <a:r>
+              <a:rPr lang="ru-RU" sz="2000" i="1" dirty="0"/>
+              <a:t>Ответы на сообщения (reply)</a:t>
+            </a:r>
+          </a:p>
+          <a:p>
+            <a:pPr marL="0" indent="0" algn="just">
+              <a:lnSpc>
+                <a:spcPct val="150000"/>
+              </a:lnSpc>
+              <a:buNone/>
+            </a:pPr>
+            <a:r>
+              <a:rPr lang="ru-RU" sz="2000" i="1" dirty="0"/>
+              <a:t>REST API с ключами для ботов</a:t>
+            </a:r>
+          </a:p>
+          <a:p>
+            <a:pPr marL="0" indent="0" algn="just">
+              <a:lnSpc>
+                <a:spcPct val="150000"/>
+              </a:lnSpc>
+              <a:buNone/>
+            </a:pPr>
+            <a:r>
+              <a:rPr lang="ru-RU" sz="2000" i="1" dirty="0"/>
+              <a:t>Тёмная / светлая тема без мигания при загрузке</a:t>
+            </a:r>
+          </a:p>
+          <a:p>
+            <a:pPr marL="0" indent="0" algn="just">
+              <a:lnSpc>
+                <a:spcPct val="150000"/>
+              </a:lnSpc>
+              <a:buNone/>
+            </a:pPr>
+            <a:r>
+              <a:rPr lang="ru-RU" sz="2000" i="1" dirty="0"/>
+              <a:t>Push-уведомления через Service Worker</a:t>
+            </a:r>
+          </a:p>
+        </p:txBody>
+      </p:sp>
+      <p:sp>
+        <p:nvSpPr>
+          <p:cNvPr id="7" name="Google Shape;91;p32">
+            <a:extLst>
+              <a:ext uri="{FF2B5EF4-FFF2-40B4-BE49-F238E27FC236}">
+                <a16:creationId xmlns:a16="http://schemas.microsoft.com/office/drawing/2014/main" id="{D9A9185A-CA8B-796F-7265-26922E58FA53}"/>
               </a:ext>
             </a:extLst>
           </p:cNvPr>
@@ -9475,10 +5496,10 @@
       </p:sp>
       <p:sp>
         <p:nvSpPr>
-          <p:cNvPr id="5" name="Google Shape;92;p32">
-            <a:extLst>
-              <a:ext uri="{FF2B5EF4-FFF2-40B4-BE49-F238E27FC236}">
-                <a16:creationId xmlns:a16="http://schemas.microsoft.com/office/drawing/2014/main" id="{07EAC0BF-AE43-35B6-46DA-A97923295634}"/>
+          <p:cNvPr id="8" name="Google Shape;92;p32">
+            <a:extLst>
+              <a:ext uri="{FF2B5EF4-FFF2-40B4-BE49-F238E27FC236}">
+                <a16:creationId xmlns:a16="http://schemas.microsoft.com/office/drawing/2014/main" id="{33E0BDFA-652A-405A-ACED-7FB9D2BD8F9B}"/>
               </a:ext>
             </a:extLst>
           </p:cNvPr>
@@ -9611,75 +5632,7 @@
                   <a:schemeClr val="lt2"/>
                 </a:solidFill>
               </a:rPr>
-              <a:t>5 / 11</a:t>
-            </a:r>
-          </a:p>
-        </p:txBody>
-      </p:sp>
-      <p:sp>
-        <p:nvSpPr>
-          <p:cNvPr id="8" name="TextBox 7"/>
-          <p:cNvSpPr txBox="1"/>
-          <p:nvPr/>
-        </p:nvSpPr>
-        <p:spPr>
-          <a:xfrm>
-            <a:off x="841248" y="1837943"/>
-            <a:ext cx="10515600" cy="4352544"/>
-          </a:xfrm>
-          <a:prstGeom prst="rect">
-            <a:avLst/>
-          </a:prstGeom>
-          <a:noFill/>
-        </p:spPr>
-        <p:txBody>
-          <a:bodyPr wrap="square">
-            <a:spAutoFit/>
-          </a:bodyPr>
-          <a:lstStyle/>
-          <a:p>
-            <a:r>
-              <a:t>Три Blueprint-а:</a:t>
-            </a:r>
-          </a:p>
-          <a:p>
-            <a:r>
-              <a:t>   auth      — регистрация, вход, выход</a:t>
-            </a:r>
-          </a:p>
-          <a:p>
-            <a:r>
-              <a:t>   rooms    — комнаты, сообщения, медиафайлы</a:t>
-            </a:r>
-          </a:p>
-          <a:p>
-            <a:r>
-              <a:t>   api         — REST API с ключами для ботов</a:t>
-            </a:r>
-          </a:p>
-          <a:p>
-            <a:r>
-              <a:t/>
-            </a:r>
-          </a:p>
-          <a:p>
-            <a:r>
-              <a:t>Real-time: WebSocket (Socket.IO)  +  HTTP-polling fallback каждые 3 с</a:t>
-            </a:r>
-          </a:p>
-          <a:p>
-            <a:r>
-              <a:t>Хранение: SQLite через SQLAlchemy ORM</a:t>
-            </a:r>
-          </a:p>
-          <a:p>
-            <a:r>
-              <a:t>Сессии: server-side filesystem (Flask-Session)</a:t>
-            </a:r>
-          </a:p>
-          <a:p>
-            <a:r>
-              <a:t>Медиа: UUID-префикс + whitelist MIME → rooms/&lt;id&gt;/media/</a:t>
+              <a:t>6 / 11</a:t>
             </a:r>
           </a:p>
         </p:txBody>
@@ -9687,7 +5640,7 @@
     </p:spTree>
     <p:extLst>
       <p:ext uri="{BB962C8B-B14F-4D97-AF65-F5344CB8AC3E}">
-        <p14:creationId xmlns:p14="http://schemas.microsoft.com/office/powerpoint/2010/main" val="1983467976"/>
+        <p14:creationId xmlns:p14="http://schemas.microsoft.com/office/powerpoint/2010/main" val="4190888240"/>
       </p:ext>
     </p:extLst>
   </p:cSld>
@@ -9716,6 +5669,286 @@
       </p:grpSpPr>
       <p:sp>
         <p:nvSpPr>
+          <p:cNvPr id="2" name="Title 1"/>
+          <p:cNvSpPr>
+            <a:spLocks noGrp="1"/>
+          </p:cNvSpPr>
+          <p:nvPr>
+            <p:ph type="title"/>
+          </p:nvPr>
+        </p:nvSpPr>
+        <p:spPr/>
+        <p:txBody>
+          <a:bodyPr/>
+          <a:lstStyle/>
+          <a:p>
+            <a:r>
+              <a:rPr dirty="0" err="1"/>
+              <a:t>Безопасность</a:t>
+            </a:r>
+            <a:endParaRPr dirty="0"/>
+          </a:p>
+        </p:txBody>
+      </p:sp>
+      <p:sp>
+        <p:nvSpPr>
+          <p:cNvPr id="3" name="Content Placeholder 2"/>
+          <p:cNvSpPr>
+            <a:spLocks noGrp="1"/>
+          </p:cNvSpPr>
+          <p:nvPr>
+            <p:ph idx="1"/>
+          </p:nvPr>
+        </p:nvSpPr>
+        <p:spPr/>
+        <p:txBody>
+          <a:bodyPr>
+            <a:normAutofit fontScale="55000" lnSpcReduction="20000"/>
+          </a:bodyPr>
+          <a:lstStyle/>
+          <a:p>
+            <a:r>
+              <a:t>Аутентификация и сессии:</a:t>
+            </a:r>
+          </a:p>
+          <a:p>
+            <a:r>
+              <a:t>  HMAC-подписанные анонимные cookie (генерируются только сервером)</a:t>
+            </a:r>
+          </a:p>
+          <a:p>
+            <a:r>
+              <a:t>  Защита от Session Fixation — регенерация ID при каждом входе</a:t>
+            </a:r>
+          </a:p>
+          <a:p>
+            <a:r>
+              <a:t>  Хеширование паролей — PBKDF2-SHA256 (Werkzeug)</a:t>
+            </a:r>
+          </a:p>
+          <a:p>
+            <a:r>
+              <a:t>  Rate-limit входа: 5 попыток / 10 минут с одного IP</a:t>
+            </a:r>
+          </a:p>
+          <a:p>
+            <a:endParaRPr/>
+          </a:p>
+          <a:p>
+            <a:r>
+              <a:t>CSRF и файлы:</a:t>
+            </a:r>
+          </a:p>
+          <a:p>
+            <a:r>
+              <a:t>  CSRF-токены на всех формах и API-эндпоинтах</a:t>
+            </a:r>
+          </a:p>
+          <a:p>
+            <a:r>
+              <a:t>  Whitelist MIME-типов + привязка к расширению файла</a:t>
+            </a:r>
+          </a:p>
+          <a:p>
+            <a:r>
+              <a:t>  Content-Disposition: attachment для не-медиа файлов</a:t>
+            </a:r>
+          </a:p>
+          <a:p>
+            <a:endParaRPr/>
+          </a:p>
+          <a:p>
+            <a:r>
+              <a:t>HTTP-заголовки:</a:t>
+            </a:r>
+          </a:p>
+          <a:p>
+            <a:r>
+              <a:t>  Content-Security-Policy  ·  X-Frame-Options: DENY</a:t>
+            </a:r>
+          </a:p>
+          <a:p>
+            <a:r>
+              <a:t>  X-Content-Type-Options: nosniff  ·  HSTS  ·  Referrer-Policy</a:t>
+            </a:r>
+          </a:p>
+          <a:p>
+            <a:r>
+              <a:t>  Socket.IO CORS: same-origin only</a:t>
+            </a:r>
+          </a:p>
+        </p:txBody>
+      </p:sp>
+      <p:sp>
+        <p:nvSpPr>
+          <p:cNvPr id="8" name="Google Shape;92;p32">
+            <a:extLst>
+              <a:ext uri="{FF2B5EF4-FFF2-40B4-BE49-F238E27FC236}">
+                <a16:creationId xmlns:a16="http://schemas.microsoft.com/office/drawing/2014/main" id="{33E0BDFA-652A-405A-ACED-7FB9D2BD8F9B}"/>
+              </a:ext>
+            </a:extLst>
+          </p:cNvPr>
+          <p:cNvSpPr txBox="1">
+            <a:spLocks/>
+          </p:cNvSpPr>
+          <p:nvPr/>
+        </p:nvSpPr>
+        <p:spPr>
+          <a:xfrm>
+            <a:off x="10559347" y="29972"/>
+            <a:ext cx="1048511" cy="274828"/>
+          </a:xfrm>
+          <a:prstGeom prst="rect">
+            <a:avLst/>
+          </a:prstGeom>
+          <a:noFill/>
+          <a:ln>
+            <a:noFill/>
+          </a:ln>
+        </p:spPr>
+        <p:txBody>
+          <a:bodyPr spcFirstLastPara="1" vert="horz" wrap="square" lIns="91425" tIns="45700" rIns="91425" bIns="45700" rtlCol="0" anchor="ctr" anchorCtr="0">
+            <a:noAutofit/>
+          </a:bodyPr>
+          <a:lstStyle>
+            <a:defPPr>
+              <a:defRPr lang="ru-RU"/>
+            </a:defPPr>
+            <a:lvl1pPr marL="0" algn="r" defTabSz="913284" rtl="0" eaLnBrk="1" latinLnBrk="0" hangingPunct="1">
+              <a:defRPr sz="2400" kern="1200">
+                <a:solidFill>
+                  <a:schemeClr val="tx1">
+                    <a:tint val="75000"/>
+                  </a:schemeClr>
+                </a:solidFill>
+                <a:latin typeface="+mn-lt"/>
+                <a:ea typeface="+mn-ea"/>
+                <a:cs typeface="+mn-cs"/>
+              </a:defRPr>
+            </a:lvl1pPr>
+            <a:lvl2pPr marL="456641" algn="l" defTabSz="913284" rtl="0" eaLnBrk="1" latinLnBrk="0" hangingPunct="1">
+              <a:defRPr sz="1800" kern="1200">
+                <a:solidFill>
+                  <a:schemeClr val="tx1"/>
+                </a:solidFill>
+                <a:latin typeface="+mn-lt"/>
+                <a:ea typeface="+mn-ea"/>
+                <a:cs typeface="+mn-cs"/>
+              </a:defRPr>
+            </a:lvl2pPr>
+            <a:lvl3pPr marL="913284" algn="l" defTabSz="913284" rtl="0" eaLnBrk="1" latinLnBrk="0" hangingPunct="1">
+              <a:defRPr sz="1800" kern="1200">
+                <a:solidFill>
+                  <a:schemeClr val="tx1"/>
+                </a:solidFill>
+                <a:latin typeface="+mn-lt"/>
+                <a:ea typeface="+mn-ea"/>
+                <a:cs typeface="+mn-cs"/>
+              </a:defRPr>
+            </a:lvl3pPr>
+            <a:lvl4pPr marL="1369927" algn="l" defTabSz="913284" rtl="0" eaLnBrk="1" latinLnBrk="0" hangingPunct="1">
+              <a:defRPr sz="1800" kern="1200">
+                <a:solidFill>
+                  <a:schemeClr val="tx1"/>
+                </a:solidFill>
+                <a:latin typeface="+mn-lt"/>
+                <a:ea typeface="+mn-ea"/>
+                <a:cs typeface="+mn-cs"/>
+              </a:defRPr>
+            </a:lvl4pPr>
+            <a:lvl5pPr marL="1826572" algn="l" defTabSz="913284" rtl="0" eaLnBrk="1" latinLnBrk="0" hangingPunct="1">
+              <a:defRPr sz="1800" kern="1200">
+                <a:solidFill>
+                  <a:schemeClr val="tx1"/>
+                </a:solidFill>
+                <a:latin typeface="+mn-lt"/>
+                <a:ea typeface="+mn-ea"/>
+                <a:cs typeface="+mn-cs"/>
+              </a:defRPr>
+            </a:lvl5pPr>
+            <a:lvl6pPr marL="2283212" algn="l" defTabSz="913284" rtl="0" eaLnBrk="1" latinLnBrk="0" hangingPunct="1">
+              <a:defRPr sz="1800" kern="1200">
+                <a:solidFill>
+                  <a:schemeClr val="tx1"/>
+                </a:solidFill>
+                <a:latin typeface="+mn-lt"/>
+                <a:ea typeface="+mn-ea"/>
+                <a:cs typeface="+mn-cs"/>
+              </a:defRPr>
+            </a:lvl6pPr>
+            <a:lvl7pPr marL="2739853" algn="l" defTabSz="913284" rtl="0" eaLnBrk="1" latinLnBrk="0" hangingPunct="1">
+              <a:defRPr sz="1800" kern="1200">
+                <a:solidFill>
+                  <a:schemeClr val="tx1"/>
+                </a:solidFill>
+                <a:latin typeface="+mn-lt"/>
+                <a:ea typeface="+mn-ea"/>
+                <a:cs typeface="+mn-cs"/>
+              </a:defRPr>
+            </a:lvl7pPr>
+            <a:lvl8pPr marL="3196496" algn="l" defTabSz="913284" rtl="0" eaLnBrk="1" latinLnBrk="0" hangingPunct="1">
+              <a:defRPr sz="1800" kern="1200">
+                <a:solidFill>
+                  <a:schemeClr val="tx1"/>
+                </a:solidFill>
+                <a:latin typeface="+mn-lt"/>
+                <a:ea typeface="+mn-ea"/>
+                <a:cs typeface="+mn-cs"/>
+              </a:defRPr>
+            </a:lvl8pPr>
+            <a:lvl9pPr marL="3653137" algn="l" defTabSz="913284" rtl="0" eaLnBrk="1" latinLnBrk="0" hangingPunct="1">
+              <a:defRPr sz="1800" kern="1200">
+                <a:solidFill>
+                  <a:schemeClr val="tx1"/>
+                </a:solidFill>
+                <a:latin typeface="+mn-lt"/>
+                <a:ea typeface="+mn-ea"/>
+                <a:cs typeface="+mn-cs"/>
+              </a:defRPr>
+            </a:lvl9pPr>
+          </a:lstStyle>
+          <a:p>
+            <a:pPr algn="ctr">
+              <a:buSzPts val="3600"/>
+            </a:pPr>
+            <a:r>
+              <a:rPr lang="ru-RU" sz="1800" b="1" dirty="0">
+                <a:solidFill>
+                  <a:schemeClr val="lt2"/>
+                </a:solidFill>
+              </a:rPr>
+              <a:t>7 / 11</a:t>
+            </a:r>
+          </a:p>
+        </p:txBody>
+      </p:sp>
+    </p:spTree>
+  </p:cSld>
+  <p:clrMapOvr>
+    <a:masterClrMapping/>
+  </p:clrMapOvr>
+</p:sld>
+</file>
+
+<file path=ppt/slides/slide7.xml><?xml version="1.0" encoding="utf-8"?>
+<p:sld xmlns:a="http://schemas.openxmlformats.org/drawingml/2006/main" xmlns:r="http://schemas.openxmlformats.org/officeDocument/2006/relationships" xmlns:p="http://schemas.openxmlformats.org/presentationml/2006/main">
+  <p:cSld>
+    <p:spTree>
+      <p:nvGrpSpPr>
+        <p:cNvPr id="1" name=""/>
+        <p:cNvGrpSpPr/>
+        <p:nvPr/>
+      </p:nvGrpSpPr>
+      <p:grpSpPr>
+        <a:xfrm>
+          <a:off x="0" y="0"/>
+          <a:ext cx="0" cy="0"/>
+          <a:chOff x="0" y="0"/>
+          <a:chExt cx="0" cy="0"/>
+        </a:xfrm>
+      </p:grpSpPr>
+      <p:sp>
+        <p:nvSpPr>
           <p:cNvPr id="2" name="Заголовок 1">
             <a:extLst>
               <a:ext uri="{FF2B5EF4-FFF2-40B4-BE49-F238E27FC236}">
@@ -9737,7 +5970,7 @@
           <a:p>
             <a:r>
               <a:rPr lang="ru-RU" dirty="0"/>
-              <a:t>Функционал</a:t>
+              <a:t>Демонстрационное видео</a:t>
             </a:r>
           </a:p>
         </p:txBody>
@@ -9766,127 +5999,100 @@
         </p:spPr>
         <p:txBody>
           <a:bodyPr>
-            <a:normAutofit/>
+            <a:noAutofit/>
           </a:bodyPr>
           <a:lstStyle/>
           <a:p>
             <a:pPr marL="0" indent="0" algn="just">
               <a:lnSpc>
-                <a:spcPct val="150000"/>
+                <a:spcPct val="170000"/>
               </a:lnSpc>
               <a:buNone/>
             </a:pPr>
             <a:r>
               <a:rPr lang="ru-RU" sz="2000" i="1" dirty="0"/>
-              <a:t>Анонимный вход — без регистрации, авто-ID: Anon1, Anon2 …</a:t>
+              <a:t>[ Видео будет добавлено перед выступлением ]</a:t>
             </a:r>
           </a:p>
           <a:p>
             <a:pPr marL="0" indent="0" algn="just">
               <a:lnSpc>
-                <a:spcPct val="150000"/>
+                <a:spcPct val="170000"/>
               </a:lnSpc>
               <a:buNone/>
             </a:pPr>
-            <a:r>
-              <a:rPr lang="ru-RU" sz="2000" i="1" dirty="0"/>
-              <a:t>Открытые / закрытые комнаты с ролями (Прародитель / Участник)</a:t>
-            </a:r>
+            <a:endParaRPr lang="ru-RU" sz="2000" i="1" dirty="0"/>
           </a:p>
           <a:p>
             <a:pPr marL="0" indent="0" algn="just">
               <a:lnSpc>
-                <a:spcPct val="150000"/>
+                <a:spcPct val="170000"/>
               </a:lnSpc>
               <a:buNone/>
             </a:pPr>
             <a:r>
               <a:rPr lang="ru-RU" sz="2000" i="1" dirty="0"/>
-              <a:t>Личная комната «Избранное» для каждого аккаунта</a:t>
+              <a:t>В демо показано:</a:t>
             </a:r>
           </a:p>
           <a:p>
             <a:pPr marL="0" indent="0" algn="just">
               <a:lnSpc>
-                <a:spcPct val="150000"/>
+                <a:spcPct val="170000"/>
               </a:lnSpc>
               <a:buNone/>
             </a:pPr>
             <a:r>
               <a:rPr lang="ru-RU" sz="2000" i="1" dirty="0"/>
-              <a:t>Real-time чат: WebSocket с fallback на polling</a:t>
+              <a:t>  — Анонимный вход и получение AnonN-ID</a:t>
             </a:r>
           </a:p>
           <a:p>
             <a:pPr marL="0" indent="0" algn="just">
               <a:lnSpc>
-                <a:spcPct val="150000"/>
+                <a:spcPct val="170000"/>
               </a:lnSpc>
               <a:buNone/>
             </a:pPr>
             <a:r>
               <a:rPr lang="ru-RU" sz="2000" i="1" dirty="0"/>
-              <a:t>Загрузка файлов до 5 ГБ (изображения, видео, документы)</a:t>
+              <a:t>  — Создание открытой и закрытой комнаты</a:t>
             </a:r>
           </a:p>
           <a:p>
             <a:pPr marL="0" indent="0" algn="just">
               <a:lnSpc>
-                <a:spcPct val="150000"/>
+                <a:spcPct val="170000"/>
               </a:lnSpc>
               <a:buNone/>
             </a:pPr>
             <a:r>
               <a:rPr lang="ru-RU" sz="2000" i="1" dirty="0"/>
-              <a:t>Редактирование и удаление своих сообщений</a:t>
+              <a:t>  — Real-time обмен сообщениями</a:t>
             </a:r>
           </a:p>
           <a:p>
             <a:pPr marL="0" indent="0" algn="just">
               <a:lnSpc>
-                <a:spcPct val="150000"/>
+                <a:spcPct val="170000"/>
               </a:lnSpc>
               <a:buNone/>
             </a:pPr>
             <a:r>
               <a:rPr lang="ru-RU" sz="2000" i="1" dirty="0"/>
-              <a:t>Ответы на сообщения (reply)</a:t>
+              <a:t>  — Загрузка медиафайла</a:t>
             </a:r>
           </a:p>
           <a:p>
             <a:pPr marL="0" indent="0" algn="just">
               <a:lnSpc>
-                <a:spcPct val="150000"/>
+                <a:spcPct val="170000"/>
               </a:lnSpc>
               <a:buNone/>
             </a:pPr>
             <a:r>
               <a:rPr lang="ru-RU" sz="2000" i="1" dirty="0"/>
-              <a:t>REST API с ключами для ботов</a:t>
-            </a:r>
-          </a:p>
-          <a:p>
-            <a:pPr marL="0" indent="0" algn="just">
-              <a:lnSpc>
-                <a:spcPct val="150000"/>
-              </a:lnSpc>
-              <a:buNone/>
-            </a:pPr>
-            <a:r>
-              <a:rPr lang="ru-RU" sz="2000" i="1" dirty="0"/>
-              <a:t>Тёмная / светлая тема без мигания при загрузке</a:t>
-            </a:r>
-          </a:p>
-          <a:p>
-            <a:pPr marL="0" indent="0" algn="just">
-              <a:lnSpc>
-                <a:spcPct val="150000"/>
-              </a:lnSpc>
-              <a:buNone/>
-            </a:pPr>
-            <a:r>
-              <a:rPr lang="ru-RU" sz="2000" i="1" dirty="0"/>
-              <a:t>Push-уведомления через Service Worker</a:t>
+              <a:t>  — Переключение тёмной темы</a:t>
             </a:r>
           </a:p>
         </p:txBody>
@@ -10103,7 +6309,7 @@
                   <a:schemeClr val="lt2"/>
                 </a:solidFill>
               </a:rPr>
-              <a:t>6 / 11</a:t>
+              <a:t>8 / 11</a:t>
             </a:r>
           </a:p>
         </p:txBody>
@@ -10111,282 +6317,9 @@
     </p:spTree>
     <p:extLst>
       <p:ext uri="{BB962C8B-B14F-4D97-AF65-F5344CB8AC3E}">
-        <p14:creationId xmlns:p14="http://schemas.microsoft.com/office/powerpoint/2010/main" val="4190888240"/>
+        <p14:creationId xmlns:p14="http://schemas.microsoft.com/office/powerpoint/2010/main" val="2241011430"/>
       </p:ext>
     </p:extLst>
-  </p:cSld>
-  <p:clrMapOvr>
-    <a:masterClrMapping/>
-  </p:clrMapOvr>
-</p:sld>
-</file>
-
-<file path=ppt/slides/slide7.xml><?xml version="1.0" encoding="utf-8"?>
-<p:sld xmlns:a="http://schemas.openxmlformats.org/drawingml/2006/main" xmlns:p="http://schemas.openxmlformats.org/presentationml/2006/main" xmlns:r="http://schemas.openxmlformats.org/officeDocument/2006/relationships">
-  <p:cSld>
-    <p:spTree>
-      <p:nvGrpSpPr>
-        <p:cNvPr id="1" name=""/>
-        <p:cNvGrpSpPr/>
-        <p:nvPr/>
-      </p:nvGrpSpPr>
-      <p:grpSpPr/>
-      <p:sp>
-        <p:nvSpPr>
-          <p:cNvPr id="2" name="Title 1"/>
-          <p:cNvSpPr>
-            <a:spLocks noGrp="1"/>
-          </p:cNvSpPr>
-          <p:nvPr>
-            <p:ph type="title"/>
-          </p:nvPr>
-        </p:nvSpPr>
-        <p:spPr/>
-        <p:txBody>
-          <a:bodyPr/>
-          <a:lstStyle/>
-          <a:p>
-            <a:r>
-              <a:t>Безопасность</a:t>
-            </a:r>
-          </a:p>
-        </p:txBody>
-      </p:sp>
-      <p:sp>
-        <p:nvSpPr>
-          <p:cNvPr id="3" name="Content Placeholder 2"/>
-          <p:cNvSpPr>
-            <a:spLocks noGrp="1"/>
-          </p:cNvSpPr>
-          <p:nvPr>
-            <p:ph idx="1"/>
-          </p:nvPr>
-        </p:nvSpPr>
-        <p:spPr/>
-        <p:txBody>
-          <a:bodyPr/>
-          <a:lstStyle/>
-          <a:p>
-            <a:r>
-              <a:t>Аутентификация и сессии:</a:t>
-            </a:r>
-          </a:p>
-          <a:p>
-            <a:r>
-              <a:t>  HMAC-подписанные анонимные cookie (генерируются только сервером)</a:t>
-            </a:r>
-          </a:p>
-          <a:p>
-            <a:r>
-              <a:t>  Защита от Session Fixation — регенерация ID при каждом входе</a:t>
-            </a:r>
-          </a:p>
-          <a:p>
-            <a:r>
-              <a:t>  Хеширование паролей — PBKDF2-SHA256 (Werkzeug)</a:t>
-            </a:r>
-          </a:p>
-          <a:p>
-            <a:r>
-              <a:t>  Rate-limit входа: 5 попыток / 10 минут с одного IP</a:t>
-            </a:r>
-          </a:p>
-          <a:p>
-            <a:r>
-              <a:t/>
-            </a:r>
-          </a:p>
-          <a:p>
-            <a:r>
-              <a:t>CSRF и файлы:</a:t>
-            </a:r>
-          </a:p>
-          <a:p>
-            <a:r>
-              <a:t>  CSRF-токены на всех формах и API-эндпоинтах</a:t>
-            </a:r>
-          </a:p>
-          <a:p>
-            <a:r>
-              <a:t>  Whitelist MIME-типов + привязка к расширению файла</a:t>
-            </a:r>
-          </a:p>
-          <a:p>
-            <a:r>
-              <a:t>  Content-Disposition: attachment для не-медиа файлов</a:t>
-            </a:r>
-          </a:p>
-          <a:p>
-            <a:r>
-              <a:t/>
-            </a:r>
-          </a:p>
-          <a:p>
-            <a:r>
-              <a:t>HTTP-заголовки:</a:t>
-            </a:r>
-          </a:p>
-          <a:p>
-            <a:r>
-              <a:t>  Content-Security-Policy  ·  X-Frame-Options: DENY</a:t>
-            </a:r>
-          </a:p>
-          <a:p>
-            <a:r>
-              <a:t>  X-Content-Type-Options: nosniff  ·  HSTS  ·  Referrer-Policy</a:t>
-            </a:r>
-          </a:p>
-          <a:p>
-            <a:r>
-              <a:t>  Socket.IO CORS: same-origin only</a:t>
-            </a:r>
-          </a:p>
-        </p:txBody>
-      </p:sp>
-      <p:sp>
-        <p:nvSpPr>
-          <p:cNvPr id="8" name="Google Shape;92;p32">
-            <a:extLst>
-              <a:ext uri="{FF2B5EF4-FFF2-40B4-BE49-F238E27FC236}">
-                <a16:creationId xmlns:a16="http://schemas.microsoft.com/office/drawing/2014/main" id="{33E0BDFA-652A-405A-ACED-7FB9D2BD8F9B}"/>
-              </a:ext>
-            </a:extLst>
-          </p:cNvPr>
-          <p:cNvSpPr txBox="1">
-            <a:spLocks/>
-          </p:cNvSpPr>
-          <p:nvPr/>
-        </p:nvSpPr>
-        <p:spPr>
-          <a:xfrm>
-            <a:off x="10559347" y="29972"/>
-            <a:ext cx="1048511" cy="274828"/>
-          </a:xfrm>
-          <a:prstGeom prst="rect">
-            <a:avLst/>
-          </a:prstGeom>
-          <a:noFill/>
-          <a:ln>
-            <a:noFill/>
-          </a:ln>
-        </p:spPr>
-        <p:txBody>
-          <a:bodyPr spcFirstLastPara="1" vert="horz" wrap="square" lIns="91425" tIns="45700" rIns="91425" bIns="45700" rtlCol="0" anchor="ctr" anchorCtr="0">
-            <a:noAutofit/>
-          </a:bodyPr>
-          <a:lstStyle>
-            <a:defPPr>
-              <a:defRPr lang="ru-RU"/>
-            </a:defPPr>
-            <a:lvl1pPr marL="0" algn="r" defTabSz="913284" rtl="0" eaLnBrk="1" latinLnBrk="0" hangingPunct="1">
-              <a:defRPr sz="2400" kern="1200">
-                <a:solidFill>
-                  <a:schemeClr val="tx1">
-                    <a:tint val="75000"/>
-                  </a:schemeClr>
-                </a:solidFill>
-                <a:latin typeface="+mn-lt"/>
-                <a:ea typeface="+mn-ea"/>
-                <a:cs typeface="+mn-cs"/>
-              </a:defRPr>
-            </a:lvl1pPr>
-            <a:lvl2pPr marL="456641" algn="l" defTabSz="913284" rtl="0" eaLnBrk="1" latinLnBrk="0" hangingPunct="1">
-              <a:defRPr sz="1800" kern="1200">
-                <a:solidFill>
-                  <a:schemeClr val="tx1"/>
-                </a:solidFill>
-                <a:latin typeface="+mn-lt"/>
-                <a:ea typeface="+mn-ea"/>
-                <a:cs typeface="+mn-cs"/>
-              </a:defRPr>
-            </a:lvl2pPr>
-            <a:lvl3pPr marL="913284" algn="l" defTabSz="913284" rtl="0" eaLnBrk="1" latinLnBrk="0" hangingPunct="1">
-              <a:defRPr sz="1800" kern="1200">
-                <a:solidFill>
-                  <a:schemeClr val="tx1"/>
-                </a:solidFill>
-                <a:latin typeface="+mn-lt"/>
-                <a:ea typeface="+mn-ea"/>
-                <a:cs typeface="+mn-cs"/>
-              </a:defRPr>
-            </a:lvl3pPr>
-            <a:lvl4pPr marL="1369927" algn="l" defTabSz="913284" rtl="0" eaLnBrk="1" latinLnBrk="0" hangingPunct="1">
-              <a:defRPr sz="1800" kern="1200">
-                <a:solidFill>
-                  <a:schemeClr val="tx1"/>
-                </a:solidFill>
-                <a:latin typeface="+mn-lt"/>
-                <a:ea typeface="+mn-ea"/>
-                <a:cs typeface="+mn-cs"/>
-              </a:defRPr>
-            </a:lvl4pPr>
-            <a:lvl5pPr marL="1826572" algn="l" defTabSz="913284" rtl="0" eaLnBrk="1" latinLnBrk="0" hangingPunct="1">
-              <a:defRPr sz="1800" kern="1200">
-                <a:solidFill>
-                  <a:schemeClr val="tx1"/>
-                </a:solidFill>
-                <a:latin typeface="+mn-lt"/>
-                <a:ea typeface="+mn-ea"/>
-                <a:cs typeface="+mn-cs"/>
-              </a:defRPr>
-            </a:lvl5pPr>
-            <a:lvl6pPr marL="2283212" algn="l" defTabSz="913284" rtl="0" eaLnBrk="1" latinLnBrk="0" hangingPunct="1">
-              <a:defRPr sz="1800" kern="1200">
-                <a:solidFill>
-                  <a:schemeClr val="tx1"/>
-                </a:solidFill>
-                <a:latin typeface="+mn-lt"/>
-                <a:ea typeface="+mn-ea"/>
-                <a:cs typeface="+mn-cs"/>
-              </a:defRPr>
-            </a:lvl6pPr>
-            <a:lvl7pPr marL="2739853" algn="l" defTabSz="913284" rtl="0" eaLnBrk="1" latinLnBrk="0" hangingPunct="1">
-              <a:defRPr sz="1800" kern="1200">
-                <a:solidFill>
-                  <a:schemeClr val="tx1"/>
-                </a:solidFill>
-                <a:latin typeface="+mn-lt"/>
-                <a:ea typeface="+mn-ea"/>
-                <a:cs typeface="+mn-cs"/>
-              </a:defRPr>
-            </a:lvl7pPr>
-            <a:lvl8pPr marL="3196496" algn="l" defTabSz="913284" rtl="0" eaLnBrk="1" latinLnBrk="0" hangingPunct="1">
-              <a:defRPr sz="1800" kern="1200">
-                <a:solidFill>
-                  <a:schemeClr val="tx1"/>
-                </a:solidFill>
-                <a:latin typeface="+mn-lt"/>
-                <a:ea typeface="+mn-ea"/>
-                <a:cs typeface="+mn-cs"/>
-              </a:defRPr>
-            </a:lvl8pPr>
-            <a:lvl9pPr marL="3653137" algn="l" defTabSz="913284" rtl="0" eaLnBrk="1" latinLnBrk="0" hangingPunct="1">
-              <a:defRPr sz="1800" kern="1200">
-                <a:solidFill>
-                  <a:schemeClr val="tx1"/>
-                </a:solidFill>
-                <a:latin typeface="+mn-lt"/>
-                <a:ea typeface="+mn-ea"/>
-                <a:cs typeface="+mn-cs"/>
-              </a:defRPr>
-            </a:lvl9pPr>
-          </a:lstStyle>
-          <a:p>
-            <a:pPr algn="ctr">
-              <a:buSzPts val="3600"/>
-            </a:pPr>
-            <a:r>
-              <a:rPr lang="ru-RU" sz="1800" b="1" dirty="0">
-                <a:solidFill>
-                  <a:schemeClr val="lt2"/>
-                </a:solidFill>
-              </a:rPr>
-              <a:t>7 / 11</a:t>
-            </a:r>
-          </a:p>
-        </p:txBody>
-      </p:sp>
-    </p:spTree>
   </p:cSld>
   <p:clrMapOvr>
     <a:masterClrMapping/>
@@ -10434,7 +6367,7 @@
           <a:p>
             <a:r>
               <a:rPr lang="ru-RU" dirty="0"/>
-              <a:t>Демонстрационное видео</a:t>
+              <a:t>Выводы</a:t>
             </a:r>
           </a:p>
         </p:txBody>
@@ -10463,113 +6396,119 @@
         </p:spPr>
         <p:txBody>
           <a:bodyPr>
-            <a:noAutofit/>
+            <a:normAutofit fontScale="85000" lnSpcReduction="10000"/>
           </a:bodyPr>
           <a:lstStyle/>
           <a:p>
             <a:pPr marL="0" indent="0" algn="just">
               <a:lnSpc>
-                <a:spcPct val="170000"/>
+                <a:spcPct val="150000"/>
               </a:lnSpc>
               <a:buNone/>
             </a:pPr>
             <a:r>
               <a:rPr lang="ru-RU" sz="2000" i="1" dirty="0"/>
-              <a:t>[ Видео будет добавлено перед выступлением ]</a:t>
+              <a:t>Что реализовано:</a:t>
             </a:r>
           </a:p>
           <a:p>
             <a:pPr marL="0" indent="0" algn="just">
               <a:lnSpc>
-                <a:spcPct val="170000"/>
+                <a:spcPct val="150000"/>
               </a:lnSpc>
               <a:buNone/>
             </a:pPr>
             <a:r>
               <a:rPr lang="ru-RU" sz="2000" i="1" dirty="0"/>
-              <a:t/>
+              <a:t>  Полностью рабочий анонимный мессенджер</a:t>
             </a:r>
           </a:p>
           <a:p>
             <a:pPr marL="0" indent="0" algn="just">
               <a:lnSpc>
-                <a:spcPct val="170000"/>
+                <a:spcPct val="150000"/>
               </a:lnSpc>
               <a:buNone/>
             </a:pPr>
             <a:r>
               <a:rPr lang="ru-RU" sz="2000" i="1" dirty="0"/>
-              <a:t>В демо показано:</a:t>
+              <a:t>  Закрыто 13 уязвимостей в ходе аудита безопасности</a:t>
             </a:r>
           </a:p>
           <a:p>
             <a:pPr marL="0" indent="0" algn="just">
               <a:lnSpc>
-                <a:spcPct val="170000"/>
+                <a:spcPct val="150000"/>
               </a:lnSpc>
               <a:buNone/>
             </a:pPr>
             <a:r>
               <a:rPr lang="ru-RU" sz="2000" i="1" dirty="0"/>
-              <a:t>  — Анонимный вход и получение AnonN-ID</a:t>
+              <a:t>  REST API для интеграции ботов</a:t>
             </a:r>
           </a:p>
           <a:p>
             <a:pPr marL="0" indent="0" algn="just">
               <a:lnSpc>
-                <a:spcPct val="170000"/>
+                <a:spcPct val="150000"/>
               </a:lnSpc>
               <a:buNone/>
             </a:pPr>
-            <a:r>
-              <a:rPr lang="ru-RU" sz="2000" i="1" dirty="0"/>
-              <a:t>  — Создание открытой и закрытой комнаты</a:t>
-            </a:r>
+            <a:endParaRPr lang="ru-RU" sz="2000" i="1" dirty="0"/>
           </a:p>
           <a:p>
             <a:pPr marL="0" indent="0" algn="just">
               <a:lnSpc>
-                <a:spcPct val="170000"/>
+                <a:spcPct val="150000"/>
               </a:lnSpc>
               <a:buNone/>
             </a:pPr>
             <a:r>
               <a:rPr lang="ru-RU" sz="2000" i="1" dirty="0"/>
-              <a:t>  — Real-time обмен сообщениями</a:t>
+              <a:t>Планы развития:</a:t>
             </a:r>
           </a:p>
           <a:p>
             <a:pPr marL="0" indent="0" algn="just">
               <a:lnSpc>
-                <a:spcPct val="170000"/>
+                <a:spcPct val="150000"/>
               </a:lnSpc>
               <a:buNone/>
             </a:pPr>
-            <a:r>
-              <a:rPr lang="ru-RU" sz="2000" i="1" dirty="0"/>
-              <a:t>  — Загрузка медиафайла</a:t>
-            </a:r>
+            <a:endParaRPr lang="ru-RU" sz="2000" i="1" dirty="0"/>
           </a:p>
           <a:p>
             <a:pPr marL="0" indent="0" algn="just">
               <a:lnSpc>
-                <a:spcPct val="170000"/>
+                <a:spcPct val="150000"/>
               </a:lnSpc>
               <a:buNone/>
             </a:pPr>
             <a:r>
               <a:rPr lang="ru-RU" sz="2000" i="1" dirty="0"/>
-              <a:t>  — Переключение тёмной темы</a:t>
-            </a:r>
-          </a:p>
-        </p:txBody>
-      </p:sp>
-      <p:sp>
-        <p:nvSpPr>
-          <p:cNvPr id="7" name="Google Shape;91;p32">
-            <a:extLst>
-              <a:ext uri="{FF2B5EF4-FFF2-40B4-BE49-F238E27FC236}">
-                <a16:creationId xmlns:a16="http://schemas.microsoft.com/office/drawing/2014/main" id="{D9A9185A-CA8B-796F-7265-26922E58FA53}"/>
+              <a:t>Мобильная PWA-версия</a:t>
+            </a:r>
+          </a:p>
+          <a:p>
+            <a:pPr marL="0" indent="0" algn="just">
+              <a:lnSpc>
+                <a:spcPct val="150000"/>
+              </a:lnSpc>
+              <a:buNone/>
+            </a:pPr>
+            <a:r>
+              <a:rPr lang="ru-RU" sz="2000" i="1" dirty="0"/>
+              <a:t>  </a:t>
+            </a:r>
+          </a:p>
+        </p:txBody>
+      </p:sp>
+      <p:sp>
+        <p:nvSpPr>
+          <p:cNvPr id="4" name="Google Shape;91;p32">
+            <a:extLst>
+              <a:ext uri="{FF2B5EF4-FFF2-40B4-BE49-F238E27FC236}">
+                <a16:creationId xmlns:a16="http://schemas.microsoft.com/office/drawing/2014/main" id="{75188BF8-F1E2-885B-4D51-3AE651D59456}"/>
               </a:ext>
             </a:extLst>
           </p:cNvPr>
@@ -10640,10 +6579,10 @@
       </p:sp>
       <p:sp>
         <p:nvSpPr>
-          <p:cNvPr id="8" name="Google Shape;92;p32">
-            <a:extLst>
-              <a:ext uri="{FF2B5EF4-FFF2-40B4-BE49-F238E27FC236}">
-                <a16:creationId xmlns:a16="http://schemas.microsoft.com/office/drawing/2014/main" id="{33E0BDFA-652A-405A-ACED-7FB9D2BD8F9B}"/>
+          <p:cNvPr id="5" name="Google Shape;92;p32">
+            <a:extLst>
+              <a:ext uri="{FF2B5EF4-FFF2-40B4-BE49-F238E27FC236}">
+                <a16:creationId xmlns:a16="http://schemas.microsoft.com/office/drawing/2014/main" id="{07EAC0BF-AE43-35B6-46DA-A97923295634}"/>
               </a:ext>
             </a:extLst>
           </p:cNvPr>
@@ -10776,7 +6715,7 @@
                   <a:schemeClr val="lt2"/>
                 </a:solidFill>
               </a:rPr>
-              <a:t>8 / 11</a:t>
+              <a:t>9 / 11</a:t>
             </a:r>
           </a:p>
         </p:txBody>
@@ -10784,7 +6723,7 @@
     </p:spTree>
     <p:extLst>
       <p:ext uri="{BB962C8B-B14F-4D97-AF65-F5344CB8AC3E}">
-        <p14:creationId xmlns:p14="http://schemas.microsoft.com/office/powerpoint/2010/main" val="2241011430"/>
+        <p14:creationId xmlns:p14="http://schemas.microsoft.com/office/powerpoint/2010/main" val="4228362792"/>
       </p:ext>
     </p:extLst>
   </p:cSld>
@@ -10834,7 +6773,7 @@
           <a:p>
             <a:r>
               <a:rPr lang="ru-RU" dirty="0"/>
-              <a:t>Выводы</a:t>
+              <a:t>Список использованных источников</a:t>
             </a:r>
           </a:p>
         </p:txBody>
@@ -10863,7 +6802,7 @@
         </p:spPr>
         <p:txBody>
           <a:bodyPr>
-            <a:normAutofit/>
+            <a:normAutofit fontScale="92500" lnSpcReduction="10000"/>
           </a:bodyPr>
           <a:lstStyle/>
           <a:p>
@@ -10875,7 +6814,7 @@
             </a:pPr>
             <a:r>
               <a:rPr lang="ru-RU" sz="2000" i="1" dirty="0"/>
-              <a:t>Что реализовано:</a:t>
+              <a:t>1.  Flask Documentation — flask.palletsprojects.com</a:t>
             </a:r>
           </a:p>
           <a:p>
@@ -10887,7 +6826,7 @@
             </a:pPr>
             <a:r>
               <a:rPr lang="ru-RU" sz="2000" i="1" dirty="0"/>
-              <a:t>  Полностью рабочий анонимный мессенджер</a:t>
+              <a:t>2.  Flask-SocketIO — flask-socketio.readthedocs.io</a:t>
             </a:r>
           </a:p>
           <a:p>
@@ -10899,7 +6838,7 @@
             </a:pPr>
             <a:r>
               <a:rPr lang="ru-RU" sz="2000" i="1" dirty="0"/>
-              <a:t>  Закрыто 11 уязвимостей в ходе аудита безопасности</a:t>
+              <a:t>3.  SQLAlchemy ORM — docs.sqlalchemy.org</a:t>
             </a:r>
           </a:p>
           <a:p>
@@ -10911,7 +6850,7 @@
             </a:pPr>
             <a:r>
               <a:rPr lang="ru-RU" sz="2000" i="1" dirty="0"/>
-              <a:t>  REST API для интеграции ботов</a:t>
+              <a:t>4.  OWASP Top 10 (2021) — owasp.org/Top10</a:t>
             </a:r>
           </a:p>
           <a:p>
@@ -10923,7 +6862,7 @@
             </a:pPr>
             <a:r>
               <a:rPr lang="ru-RU" sz="2000" i="1" dirty="0"/>
-              <a:t/>
+              <a:t>5.  Flask-WTF / CSRF — flask-wtf.readthedocs.io</a:t>
             </a:r>
           </a:p>
           <a:p>
@@ -10935,7 +6874,7 @@
             </a:pPr>
             <a:r>
               <a:rPr lang="ru-RU" sz="2000" i="1" dirty="0"/>
-              <a:t>Планы развития:</a:t>
+              <a:t>6.  Werkzeug Security — werkzeug.palletsprojects.com</a:t>
             </a:r>
           </a:p>
           <a:p>
@@ -10947,7 +6886,7 @@
             </a:pPr>
             <a:r>
               <a:rPr lang="ru-RU" sz="2000" i="1" dirty="0"/>
-              <a:t>  End-to-End шифрование сообщений</a:t>
+              <a:t>7.  MDN: Content-Security-Policy — developer.mozilla.org</a:t>
             </a:r>
           </a:p>
           <a:p>
@@ -10959,31 +6898,7 @@
             </a:pPr>
             <a:r>
               <a:rPr lang="ru-RU" sz="2000" i="1" dirty="0"/>
-              <a:t>  Docker-контейнеризация и CI/CD</a:t>
-            </a:r>
-          </a:p>
-          <a:p>
-            <a:pPr marL="0" indent="0" algn="just">
-              <a:lnSpc>
-                <a:spcPct val="150000"/>
-              </a:lnSpc>
-              <a:buNone/>
-            </a:pPr>
-            <a:r>
-              <a:rPr lang="ru-RU" sz="2000" i="1" dirty="0"/>
-              <a:t>  Мобильная PWA-версия</a:t>
-            </a:r>
-          </a:p>
-          <a:p>
-            <a:pPr marL="0" indent="0" algn="just">
-              <a:lnSpc>
-                <a:spcPct val="150000"/>
-              </a:lnSpc>
-              <a:buNone/>
-            </a:pPr>
-            <a:r>
-              <a:rPr lang="ru-RU" sz="2000" i="1" dirty="0"/>
-              <a:t>  Голосовые сообщения</a:t>
+              <a:t>8.  Python Secrets — docs.python.org/3/library/secrets.html</a:t>
             </a:r>
           </a:p>
         </p:txBody>
@@ -11200,7 +7115,7 @@
                   <a:schemeClr val="lt2"/>
                 </a:solidFill>
               </a:rPr>
-              <a:t>9 / 11</a:t>
+              <a:t>10 / 11</a:t>
             </a:r>
           </a:p>
         </p:txBody>
@@ -11208,7 +7123,7 @@
     </p:spTree>
     <p:extLst>
       <p:ext uri="{BB962C8B-B14F-4D97-AF65-F5344CB8AC3E}">
-        <p14:creationId xmlns:p14="http://schemas.microsoft.com/office/powerpoint/2010/main" val="4228362792"/>
+        <p14:creationId xmlns:p14="http://schemas.microsoft.com/office/powerpoint/2010/main" val="2945751244"/>
       </p:ext>
     </p:extLst>
   </p:cSld>
